--- a/presentations/task-018-class-harness/Harness_课堂汇报_项目重点版.pptx
+++ b/presentations/task-018-class-harness/Harness_课堂汇报_项目重点版.pptx
@@ -1513,24 +1513,106 @@
       </p:grpSpPr>
       <p:sp>
         <p:nvSpPr>
-          <p:cNvPr id="2" name="Shape 0"/>
-          <p:cNvSpPr/>
-          <p:nvPr/>
-        </p:nvSpPr>
-        <p:spPr>
-          <a:xfrm>
-            <a:off x="457200" y="979932"/>
-            <a:ext cx="1143000" cy="45720"/>
+          <p:cNvPr id="2" name="Editable_Title"/>
+          <p:cNvSpPr/>
+          <p:nvPr/>
+        </p:nvSpPr>
+        <p:spPr>
+          <a:xfrm>
+            <a:off x="457200" y="137160"/>
+            <a:ext cx="8229600" cy="512064"/>
+          </a:xfrm>
+          <a:prstGeom prst="rect">
+            <a:avLst/>
+          </a:prstGeom>
+          <a:noFill/>
+          <a:ln/>
+        </p:spPr>
+        <p:txBody>
+          <a:bodyPr wrap="square" lIns="0" tIns="0" rIns="0" bIns="0" rtlCol="0" anchor="ctr">
+            <a:normAutofit/>
+          </a:bodyPr>
+          <a:lstStyle/>
+          <a:p>
+            <a:pPr algn="l" indent="0" marL="0">
+              <a:buNone/>
+            </a:pPr>
+            <a:r>
+              <a:rPr lang="en-US" sz="2400" b="1" dirty="0">
+                <a:solidFill>
+                  <a:srgbClr val="18364A"/>
+                </a:solidFill>
+                <a:latin typeface="Microsoft YaHei" pitchFamily="34" charset="0"/>
+                <a:ea typeface="Microsoft YaHei" pitchFamily="34" charset="-122"/>
+                <a:cs typeface="Microsoft YaHei" pitchFamily="34" charset="-120"/>
+              </a:rPr>
+              <a:t>课题方向：面向光子芯片设计的 Agent Harness</a:t>
+            </a:r>
+            <a:endParaRPr lang="en-US" sz="2400" dirty="0"/>
+          </a:p>
+        </p:txBody>
+      </p:sp>
+      <p:sp>
+        <p:nvSpPr>
+          <p:cNvPr id="3" name="Editable_Subtitle"/>
+          <p:cNvSpPr/>
+          <p:nvPr/>
+        </p:nvSpPr>
+        <p:spPr>
+          <a:xfrm>
+            <a:off x="457200" y="749808"/>
+            <a:ext cx="8229600" cy="246888"/>
+          </a:xfrm>
+          <a:prstGeom prst="rect">
+            <a:avLst/>
+          </a:prstGeom>
+          <a:noFill/>
+          <a:ln/>
+        </p:spPr>
+        <p:txBody>
+          <a:bodyPr wrap="square" lIns="0" tIns="0" rIns="0" bIns="0" rtlCol="0" anchor="ctr">
+            <a:normAutofit/>
+          </a:bodyPr>
+          <a:lstStyle/>
+          <a:p>
+            <a:pPr algn="l" indent="0" marL="0">
+              <a:buNone/>
+            </a:pPr>
+            <a:r>
+              <a:rPr lang="en-US" sz="1150" dirty="0">
+                <a:solidFill>
+                  <a:srgbClr val="536570"/>
+                </a:solidFill>
+                <a:latin typeface="Microsoft YaHei" pitchFamily="34" charset="0"/>
+                <a:ea typeface="Microsoft YaHei" pitchFamily="34" charset="-122"/>
+                <a:cs typeface="Microsoft YaHei" pitchFamily="34" charset="-120"/>
+              </a:rPr>
+              <a:t>Harness 组织模型、专业工具、状态与验证；与 DAS 需求模块衔接</a:t>
+            </a:r>
+            <a:endParaRPr lang="en-US" sz="1150" dirty="0"/>
+          </a:p>
+        </p:txBody>
+      </p:sp>
+      <p:sp>
+        <p:nvSpPr>
+          <p:cNvPr id="4" name="Header_Accent"/>
+          <p:cNvSpPr/>
+          <p:nvPr/>
+        </p:nvSpPr>
+        <p:spPr>
+          <a:xfrm>
+            <a:off x="457200" y="1042416"/>
+            <a:ext cx="1005840" cy="36576"/>
           </a:xfrm>
           <a:prstGeom prst="rect">
             <a:avLst/>
           </a:prstGeom>
           <a:solidFill>
-            <a:srgbClr val="0B2545"/>
+            <a:srgbClr val="18364A"/>
           </a:solidFill>
           <a:ln w="12700">
             <a:solidFill>
-              <a:srgbClr val="0B2545"/>
+              <a:srgbClr val="18364A"/>
             </a:solidFill>
             <a:prstDash val="solid"/>
           </a:ln>
@@ -1538,148 +1620,869 @@
       </p:sp>
       <p:sp>
         <p:nvSpPr>
-          <p:cNvPr id="3" name="Text 1"/>
-          <p:cNvSpPr txBox="1"/>
-          <p:nvPr/>
-        </p:nvSpPr>
-        <p:spPr>
-          <a:xfrm>
-            <a:off x="457200" y="91440"/>
-            <a:ext cx="8229600" cy="495300"/>
-          </a:xfrm>
-          <a:prstGeom prst="rect">
-            <a:avLst/>
-          </a:prstGeom>
-          <a:noFill/>
-          <a:ln/>
-        </p:spPr>
-        <p:txBody>
-          <a:bodyPr wrap="square" lIns="0" tIns="0" rIns="0" bIns="0" rtlCol="0" anchor="t"/>
+          <p:cNvPr id="5" name="Native_rect_1"/>
+          <p:cNvSpPr/>
+          <p:nvPr/>
+        </p:nvSpPr>
+        <p:spPr>
+          <a:xfrm>
+            <a:off x="457200" y="1234440"/>
+            <a:ext cx="8229600" cy="530352"/>
+          </a:xfrm>
+          <a:prstGeom prst="rect">
+            <a:avLst/>
+          </a:prstGeom>
+          <a:solidFill>
+            <a:srgbClr val="E6F3EF"/>
+          </a:solidFill>
+          <a:ln w="8890">
+            <a:solidFill>
+              <a:srgbClr val="CBD9DF"/>
+            </a:solidFill>
+            <a:prstDash val="solid"/>
+          </a:ln>
+        </p:spPr>
+      </p:sp>
+      <p:sp>
+        <p:nvSpPr>
+          <p:cNvPr id="6" name="Native_text_2"/>
+          <p:cNvSpPr/>
+          <p:nvPr/>
+        </p:nvSpPr>
+        <p:spPr>
+          <a:xfrm>
+            <a:off x="640080" y="1298448"/>
+            <a:ext cx="7863840" cy="402336"/>
+          </a:xfrm>
+          <a:prstGeom prst="rect">
+            <a:avLst/>
+          </a:prstGeom>
+          <a:noFill/>
+          <a:ln/>
+        </p:spPr>
+        <p:txBody>
+          <a:bodyPr wrap="square" lIns="0" tIns="0" rIns="0" bIns="0" rtlCol="0" anchor="ctr">
+            <a:normAutofit/>
+          </a:bodyPr>
+          <a:lstStyle/>
+          <a:p>
+            <a:pPr algn="ctr" indent="0" marL="0">
+              <a:buNone/>
+            </a:pPr>
+            <a:r>
+              <a:rPr lang="en-US" sz="1700" b="1" dirty="0">
+                <a:solidFill>
+                  <a:srgbClr val="167B78"/>
+                </a:solidFill>
+                <a:latin typeface="Microsoft YaHei" pitchFamily="34" charset="0"/>
+                <a:ea typeface="Microsoft YaHei" pitchFamily="34" charset="-122"/>
+                <a:cs typeface="Microsoft YaHei" pitchFamily="34" charset="-120"/>
+              </a:rPr>
+              <a:t>Harness：围绕 Agent 组织工具执行、状态保存和验证检查</a:t>
+            </a:r>
+            <a:endParaRPr lang="en-US" sz="1700" dirty="0"/>
+          </a:p>
+        </p:txBody>
+      </p:sp>
+      <p:sp>
+        <p:nvSpPr>
+          <p:cNvPr id="7" name="Native_rect_3"/>
+          <p:cNvSpPr/>
+          <p:nvPr/>
+        </p:nvSpPr>
+        <p:spPr>
+          <a:xfrm>
+            <a:off x="457200" y="1984248"/>
+            <a:ext cx="1783080" cy="1325880"/>
+          </a:xfrm>
+          <a:prstGeom prst="rect">
+            <a:avLst/>
+          </a:prstGeom>
+          <a:solidFill>
+            <a:srgbClr val="EAF0F7"/>
+          </a:solidFill>
+          <a:ln w="8890">
+            <a:solidFill>
+              <a:srgbClr val="CBD9DF"/>
+            </a:solidFill>
+            <a:prstDash val="solid"/>
+          </a:ln>
+        </p:spPr>
+      </p:sp>
+      <p:sp>
+        <p:nvSpPr>
+          <p:cNvPr id="8" name="Native_text_4"/>
+          <p:cNvSpPr/>
+          <p:nvPr/>
+        </p:nvSpPr>
+        <p:spPr>
+          <a:xfrm>
+            <a:off x="548640" y="2075688"/>
+            <a:ext cx="1600200" cy="402336"/>
+          </a:xfrm>
+          <a:prstGeom prst="rect">
+            <a:avLst/>
+          </a:prstGeom>
+          <a:noFill/>
+          <a:ln/>
+        </p:spPr>
+        <p:txBody>
+          <a:bodyPr wrap="square" lIns="0" tIns="0" rIns="0" bIns="0" rtlCol="0" anchor="ctr">
+            <a:normAutofit/>
+          </a:bodyPr>
+          <a:lstStyle/>
+          <a:p>
+            <a:pPr algn="ctr" indent="0" marL="0">
+              <a:buNone/>
+            </a:pPr>
+            <a:r>
+              <a:rPr lang="en-US" sz="1600" b="1" dirty="0">
+                <a:solidFill>
+                  <a:srgbClr val="18364A"/>
+                </a:solidFill>
+                <a:latin typeface="Microsoft YaHei" pitchFamily="34" charset="0"/>
+                <a:ea typeface="Microsoft YaHei" pitchFamily="34" charset="-122"/>
+                <a:cs typeface="Microsoft YaHei" pitchFamily="34" charset="-120"/>
+              </a:rPr>
+              <a:t>需求与约束</a:t>
+            </a:r>
+            <a:endParaRPr lang="en-US" sz="1600" dirty="0"/>
+          </a:p>
+        </p:txBody>
+      </p:sp>
+      <p:sp>
+        <p:nvSpPr>
+          <p:cNvPr id="9" name="Native_text_5"/>
+          <p:cNvSpPr/>
+          <p:nvPr/>
+        </p:nvSpPr>
+        <p:spPr>
+          <a:xfrm>
+            <a:off x="548640" y="2624328"/>
+            <a:ext cx="1600200" cy="621792"/>
+          </a:xfrm>
+          <a:prstGeom prst="rect">
+            <a:avLst/>
+          </a:prstGeom>
+          <a:noFill/>
+          <a:ln/>
+        </p:spPr>
+        <p:txBody>
+          <a:bodyPr wrap="square" lIns="0" tIns="0" rIns="0" bIns="0" rtlCol="0" anchor="ctr">
+            <a:normAutofit/>
+          </a:bodyPr>
+          <a:lstStyle/>
+          <a:p>
+            <a:pPr algn="ctr" indent="0" marL="0">
+              <a:buNone/>
+            </a:pPr>
+            <a:r>
+              <a:rPr lang="en-US" sz="1270" dirty="0">
+                <a:solidFill>
+                  <a:srgbClr val="536570"/>
+                </a:solidFill>
+                <a:latin typeface="Microsoft YaHei" pitchFamily="34" charset="0"/>
+                <a:ea typeface="Microsoft YaHei" pitchFamily="34" charset="-122"/>
+                <a:cs typeface="Microsoft YaHei" pitchFamily="34" charset="-120"/>
+              </a:rPr>
+              <a:t>目标指标</a:t>
+            </a:r>
+            <a:endParaRPr lang="en-US" sz="1270" dirty="0"/>
+          </a:p>
+          <a:p>
+            <a:pPr algn="ctr" indent="0" marL="0">
+              <a:buNone/>
+            </a:pPr>
+            <a:r>
+              <a:rPr lang="en-US" sz="1270" dirty="0">
+                <a:solidFill>
+                  <a:srgbClr val="536570"/>
+                </a:solidFill>
+                <a:latin typeface="Microsoft YaHei" pitchFamily="34" charset="0"/>
+                <a:ea typeface="Microsoft YaHei" pitchFamily="34" charset="-122"/>
+                <a:cs typeface="Microsoft YaHei" pitchFamily="34" charset="-120"/>
+              </a:rPr>
+              <a:t>工艺 / 几何条件</a:t>
+            </a:r>
+            <a:endParaRPr lang="en-US" sz="1270" dirty="0"/>
+          </a:p>
+        </p:txBody>
+      </p:sp>
+      <p:sp>
+        <p:nvSpPr>
+          <p:cNvPr id="10" name="Native_rect_6"/>
+          <p:cNvSpPr/>
+          <p:nvPr/>
+        </p:nvSpPr>
+        <p:spPr>
+          <a:xfrm>
+            <a:off x="2606040" y="1984248"/>
+            <a:ext cx="1783080" cy="1325880"/>
+          </a:xfrm>
+          <a:prstGeom prst="rect">
+            <a:avLst/>
+          </a:prstGeom>
+          <a:solidFill>
+            <a:srgbClr val="E6F3EF"/>
+          </a:solidFill>
+          <a:ln w="8890">
+            <a:solidFill>
+              <a:srgbClr val="CBD9DF"/>
+            </a:solidFill>
+            <a:prstDash val="solid"/>
+          </a:ln>
+        </p:spPr>
+      </p:sp>
+      <p:sp>
+        <p:nvSpPr>
+          <p:cNvPr id="11" name="Native_text_7"/>
+          <p:cNvSpPr/>
+          <p:nvPr/>
+        </p:nvSpPr>
+        <p:spPr>
+          <a:xfrm>
+            <a:off x="2697480" y="2075688"/>
+            <a:ext cx="1600200" cy="402336"/>
+          </a:xfrm>
+          <a:prstGeom prst="rect">
+            <a:avLst/>
+          </a:prstGeom>
+          <a:noFill/>
+          <a:ln/>
+        </p:spPr>
+        <p:txBody>
+          <a:bodyPr wrap="square" lIns="0" tIns="0" rIns="0" bIns="0" rtlCol="0" anchor="ctr">
+            <a:normAutofit/>
+          </a:bodyPr>
+          <a:lstStyle/>
+          <a:p>
+            <a:pPr algn="ctr" indent="0" marL="0">
+              <a:buNone/>
+            </a:pPr>
+            <a:r>
+              <a:rPr lang="en-US" sz="1600" b="1" dirty="0">
+                <a:solidFill>
+                  <a:srgbClr val="18364A"/>
+                </a:solidFill>
+                <a:latin typeface="Microsoft YaHei" pitchFamily="34" charset="0"/>
+                <a:ea typeface="Microsoft YaHei" pitchFamily="34" charset="-122"/>
+                <a:cs typeface="Microsoft YaHei" pitchFamily="34" charset="-120"/>
+              </a:rPr>
+              <a:t>Agent</a:t>
+            </a:r>
+            <a:endParaRPr lang="en-US" sz="1600" dirty="0"/>
+          </a:p>
+        </p:txBody>
+      </p:sp>
+      <p:sp>
+        <p:nvSpPr>
+          <p:cNvPr id="12" name="Native_text_8"/>
+          <p:cNvSpPr/>
+          <p:nvPr/>
+        </p:nvSpPr>
+        <p:spPr>
+          <a:xfrm>
+            <a:off x="2697480" y="2624328"/>
+            <a:ext cx="1600200" cy="621792"/>
+          </a:xfrm>
+          <a:prstGeom prst="rect">
+            <a:avLst/>
+          </a:prstGeom>
+          <a:noFill/>
+          <a:ln/>
+        </p:spPr>
+        <p:txBody>
+          <a:bodyPr wrap="square" lIns="0" tIns="0" rIns="0" bIns="0" rtlCol="0" anchor="ctr">
+            <a:normAutofit/>
+          </a:bodyPr>
+          <a:lstStyle/>
+          <a:p>
+            <a:pPr algn="ctr" indent="0" marL="0">
+              <a:buNone/>
+            </a:pPr>
+            <a:r>
+              <a:rPr lang="en-US" sz="1270" dirty="0">
+                <a:solidFill>
+                  <a:srgbClr val="536570"/>
+                </a:solidFill>
+                <a:latin typeface="Microsoft YaHei" pitchFamily="34" charset="0"/>
+                <a:ea typeface="Microsoft YaHei" pitchFamily="34" charset="-122"/>
+                <a:cs typeface="Microsoft YaHei" pitchFamily="34" charset="-120"/>
+              </a:rPr>
+              <a:t>规划设计</a:t>
+            </a:r>
+            <a:endParaRPr lang="en-US" sz="1270" dirty="0"/>
+          </a:p>
+          <a:p>
+            <a:pPr algn="ctr" indent="0" marL="0">
+              <a:buNone/>
+            </a:pPr>
+            <a:r>
+              <a:rPr lang="en-US" sz="1270" dirty="0">
+                <a:solidFill>
+                  <a:srgbClr val="536570"/>
+                </a:solidFill>
+                <a:latin typeface="Microsoft YaHei" pitchFamily="34" charset="0"/>
+                <a:ea typeface="Microsoft YaHei" pitchFamily="34" charset="-122"/>
+                <a:cs typeface="Microsoft YaHei" pitchFamily="34" charset="-120"/>
+              </a:rPr>
+              <a:t>解释结果 / 选动作</a:t>
+            </a:r>
+            <a:endParaRPr lang="en-US" sz="1270" dirty="0"/>
+          </a:p>
+        </p:txBody>
+      </p:sp>
+      <p:sp>
+        <p:nvSpPr>
+          <p:cNvPr id="13" name="Native_rect_9"/>
+          <p:cNvSpPr/>
+          <p:nvPr/>
+        </p:nvSpPr>
+        <p:spPr>
+          <a:xfrm>
+            <a:off x="4754880" y="1984248"/>
+            <a:ext cx="1783080" cy="1325880"/>
+          </a:xfrm>
+          <a:prstGeom prst="rect">
+            <a:avLst/>
+          </a:prstGeom>
+          <a:solidFill>
+            <a:srgbClr val="EAF0F7"/>
+          </a:solidFill>
+          <a:ln w="8890">
+            <a:solidFill>
+              <a:srgbClr val="CBD9DF"/>
+            </a:solidFill>
+            <a:prstDash val="solid"/>
+          </a:ln>
+        </p:spPr>
+      </p:sp>
+      <p:sp>
+        <p:nvSpPr>
+          <p:cNvPr id="14" name="Native_text_10"/>
+          <p:cNvSpPr/>
+          <p:nvPr/>
+        </p:nvSpPr>
+        <p:spPr>
+          <a:xfrm>
+            <a:off x="4846320" y="2075688"/>
+            <a:ext cx="1600200" cy="402336"/>
+          </a:xfrm>
+          <a:prstGeom prst="rect">
+            <a:avLst/>
+          </a:prstGeom>
+          <a:noFill/>
+          <a:ln/>
+        </p:spPr>
+        <p:txBody>
+          <a:bodyPr wrap="square" lIns="0" tIns="0" rIns="0" bIns="0" rtlCol="0" anchor="ctr">
+            <a:normAutofit/>
+          </a:bodyPr>
+          <a:lstStyle/>
+          <a:p>
+            <a:pPr algn="ctr" indent="0" marL="0">
+              <a:buNone/>
+            </a:pPr>
+            <a:r>
+              <a:rPr lang="en-US" sz="1600" b="1" dirty="0">
+                <a:solidFill>
+                  <a:srgbClr val="18364A"/>
+                </a:solidFill>
+                <a:latin typeface="Microsoft YaHei" pitchFamily="34" charset="0"/>
+                <a:ea typeface="Microsoft YaHei" pitchFamily="34" charset="-122"/>
+                <a:cs typeface="Microsoft YaHei" pitchFamily="34" charset="-120"/>
+              </a:rPr>
+              <a:t>专业工具</a:t>
+            </a:r>
+            <a:endParaRPr lang="en-US" sz="1600" dirty="0"/>
+          </a:p>
+        </p:txBody>
+      </p:sp>
+      <p:sp>
+        <p:nvSpPr>
+          <p:cNvPr id="15" name="Native_text_11"/>
+          <p:cNvSpPr/>
+          <p:nvPr/>
+        </p:nvSpPr>
+        <p:spPr>
+          <a:xfrm>
+            <a:off x="4846320" y="2624328"/>
+            <a:ext cx="1600200" cy="621792"/>
+          </a:xfrm>
+          <a:prstGeom prst="rect">
+            <a:avLst/>
+          </a:prstGeom>
+          <a:noFill/>
+          <a:ln/>
+        </p:spPr>
+        <p:txBody>
+          <a:bodyPr wrap="square" lIns="0" tIns="0" rIns="0" bIns="0" rtlCol="0" anchor="ctr">
+            <a:normAutofit/>
+          </a:bodyPr>
+          <a:lstStyle/>
+          <a:p>
+            <a:pPr algn="ctr" indent="0" marL="0">
+              <a:buNone/>
+            </a:pPr>
+            <a:r>
+              <a:rPr lang="en-US" sz="1270" dirty="0">
+                <a:solidFill>
+                  <a:srgbClr val="536570"/>
+                </a:solidFill>
+                <a:latin typeface="Microsoft YaHei" pitchFamily="34" charset="0"/>
+                <a:ea typeface="Microsoft YaHei" pitchFamily="34" charset="-122"/>
+                <a:cs typeface="Microsoft YaHei" pitchFamily="34" charset="-120"/>
+              </a:rPr>
+              <a:t>CAD / 仿真器</a:t>
+            </a:r>
+            <a:endParaRPr lang="en-US" sz="1270" dirty="0"/>
+          </a:p>
+          <a:p>
+            <a:pPr algn="ctr" indent="0" marL="0">
+              <a:buNone/>
+            </a:pPr>
+            <a:r>
+              <a:rPr lang="en-US" sz="1270" dirty="0">
+                <a:solidFill>
+                  <a:srgbClr val="536570"/>
+                </a:solidFill>
+                <a:latin typeface="Microsoft YaHei" pitchFamily="34" charset="0"/>
+                <a:ea typeface="Microsoft YaHei" pitchFamily="34" charset="-122"/>
+                <a:cs typeface="Microsoft YaHei" pitchFamily="34" charset="-120"/>
+              </a:rPr>
+              <a:t>产生结构与数值结果</a:t>
+            </a:r>
+            <a:endParaRPr lang="en-US" sz="1270" dirty="0"/>
+          </a:p>
+        </p:txBody>
+      </p:sp>
+      <p:sp>
+        <p:nvSpPr>
+          <p:cNvPr id="16" name="Native_rect_12"/>
+          <p:cNvSpPr/>
+          <p:nvPr/>
+        </p:nvSpPr>
+        <p:spPr>
+          <a:xfrm>
+            <a:off x="6903720" y="1984248"/>
+            <a:ext cx="1783080" cy="1325880"/>
+          </a:xfrm>
+          <a:prstGeom prst="rect">
+            <a:avLst/>
+          </a:prstGeom>
+          <a:solidFill>
+            <a:srgbClr val="EAF0F7"/>
+          </a:solidFill>
+          <a:ln w="8890">
+            <a:solidFill>
+              <a:srgbClr val="CBD9DF"/>
+            </a:solidFill>
+            <a:prstDash val="solid"/>
+          </a:ln>
+        </p:spPr>
+      </p:sp>
+      <p:sp>
+        <p:nvSpPr>
+          <p:cNvPr id="17" name="Native_text_13"/>
+          <p:cNvSpPr/>
+          <p:nvPr/>
+        </p:nvSpPr>
+        <p:spPr>
+          <a:xfrm>
+            <a:off x="6995160" y="2075688"/>
+            <a:ext cx="1600200" cy="402336"/>
+          </a:xfrm>
+          <a:prstGeom prst="rect">
+            <a:avLst/>
+          </a:prstGeom>
+          <a:noFill/>
+          <a:ln/>
+        </p:spPr>
+        <p:txBody>
+          <a:bodyPr wrap="square" lIns="0" tIns="0" rIns="0" bIns="0" rtlCol="0" anchor="ctr">
+            <a:normAutofit/>
+          </a:bodyPr>
+          <a:lstStyle/>
+          <a:p>
+            <a:pPr algn="ctr" indent="0" marL="0">
+              <a:buNone/>
+            </a:pPr>
+            <a:r>
+              <a:rPr lang="en-US" sz="1600" b="1" dirty="0">
+                <a:solidFill>
+                  <a:srgbClr val="18364A"/>
+                </a:solidFill>
+                <a:latin typeface="Microsoft YaHei" pitchFamily="34" charset="0"/>
+                <a:ea typeface="Microsoft YaHei" pitchFamily="34" charset="-122"/>
+                <a:cs typeface="Microsoft YaHei" pitchFamily="34" charset="-120"/>
+              </a:rPr>
+              <a:t>确定性评价</a:t>
+            </a:r>
+            <a:endParaRPr lang="en-US" sz="1600" dirty="0"/>
+          </a:p>
+        </p:txBody>
+      </p:sp>
+      <p:sp>
+        <p:nvSpPr>
+          <p:cNvPr id="18" name="Native_text_14"/>
+          <p:cNvSpPr/>
+          <p:nvPr/>
+        </p:nvSpPr>
+        <p:spPr>
+          <a:xfrm>
+            <a:off x="6995160" y="2624328"/>
+            <a:ext cx="1600200" cy="621792"/>
+          </a:xfrm>
+          <a:prstGeom prst="rect">
+            <a:avLst/>
+          </a:prstGeom>
+          <a:noFill/>
+          <a:ln/>
+        </p:spPr>
+        <p:txBody>
+          <a:bodyPr wrap="square" lIns="0" tIns="0" rIns="0" bIns="0" rtlCol="0" anchor="ctr">
+            <a:normAutofit/>
+          </a:bodyPr>
+          <a:lstStyle/>
+          <a:p>
+            <a:pPr algn="ctr" indent="0" marL="0">
+              <a:buNone/>
+            </a:pPr>
+            <a:r>
+              <a:rPr lang="en-US" sz="1270" dirty="0">
+                <a:solidFill>
+                  <a:srgbClr val="536570"/>
+                </a:solidFill>
+                <a:latin typeface="Microsoft YaHei" pitchFamily="34" charset="0"/>
+                <a:ea typeface="Microsoft YaHei" pitchFamily="34" charset="-122"/>
+                <a:cs typeface="Microsoft YaHei" pitchFamily="34" charset="-120"/>
+              </a:rPr>
+              <a:t>计算指标</a:t>
+            </a:r>
+            <a:endParaRPr lang="en-US" sz="1270" dirty="0"/>
+          </a:p>
+          <a:p>
+            <a:pPr algn="ctr" indent="0" marL="0">
+              <a:buNone/>
+            </a:pPr>
+            <a:r>
+              <a:rPr lang="en-US" sz="1270" dirty="0">
+                <a:solidFill>
+                  <a:srgbClr val="536570"/>
+                </a:solidFill>
+                <a:latin typeface="Microsoft YaHei" pitchFamily="34" charset="0"/>
+                <a:ea typeface="Microsoft YaHei" pitchFamily="34" charset="-122"/>
+                <a:cs typeface="Microsoft YaHei" pitchFamily="34" charset="-120"/>
+              </a:rPr>
+              <a:t>检查约束与达标</a:t>
+            </a:r>
+            <a:endParaRPr lang="en-US" sz="1270" dirty="0"/>
+          </a:p>
+        </p:txBody>
+      </p:sp>
+      <p:sp>
+        <p:nvSpPr>
+          <p:cNvPr id="19" name="Native_line_15"/>
+          <p:cNvSpPr/>
+          <p:nvPr/>
+        </p:nvSpPr>
+        <p:spPr>
+          <a:xfrm>
+            <a:off x="2276856" y="2660904"/>
+            <a:ext cx="274320" cy="0"/>
+          </a:xfrm>
+          <a:prstGeom prst="line">
+            <a:avLst/>
+          </a:prstGeom>
+          <a:noFill/>
+          <a:ln w="19050">
+            <a:solidFill>
+              <a:srgbClr val="167B78"/>
+            </a:solidFill>
+            <a:prstDash val="solid"/>
+            <a:tailEnd type="triangle"/>
+          </a:ln>
+        </p:spPr>
+      </p:sp>
+      <p:sp>
+        <p:nvSpPr>
+          <p:cNvPr id="20" name="Native_line_16"/>
+          <p:cNvSpPr/>
+          <p:nvPr/>
+        </p:nvSpPr>
+        <p:spPr>
+          <a:xfrm>
+            <a:off x="4425696" y="2660904"/>
+            <a:ext cx="274320" cy="0"/>
+          </a:xfrm>
+          <a:prstGeom prst="line">
+            <a:avLst/>
+          </a:prstGeom>
+          <a:noFill/>
+          <a:ln w="19050">
+            <a:solidFill>
+              <a:srgbClr val="167B78"/>
+            </a:solidFill>
+            <a:prstDash val="solid"/>
+            <a:tailEnd type="triangle"/>
+          </a:ln>
+        </p:spPr>
+      </p:sp>
+      <p:sp>
+        <p:nvSpPr>
+          <p:cNvPr id="21" name="Native_line_17"/>
+          <p:cNvSpPr/>
+          <p:nvPr/>
+        </p:nvSpPr>
+        <p:spPr>
+          <a:xfrm>
+            <a:off x="6574536" y="2660904"/>
+            <a:ext cx="274320" cy="0"/>
+          </a:xfrm>
+          <a:prstGeom prst="line">
+            <a:avLst/>
+          </a:prstGeom>
+          <a:noFill/>
+          <a:ln w="19050">
+            <a:solidFill>
+              <a:srgbClr val="167B78"/>
+            </a:solidFill>
+            <a:prstDash val="solid"/>
+            <a:tailEnd type="triangle"/>
+          </a:ln>
+        </p:spPr>
+      </p:sp>
+      <p:sp>
+        <p:nvSpPr>
+          <p:cNvPr id="22" name="Native_line_18"/>
+          <p:cNvSpPr/>
+          <p:nvPr/>
+        </p:nvSpPr>
+        <p:spPr>
+          <a:xfrm>
+            <a:off x="7795260" y="3374136"/>
+            <a:ext cx="0" cy="429768"/>
+          </a:xfrm>
+          <a:prstGeom prst="line">
+            <a:avLst/>
+          </a:prstGeom>
+          <a:noFill/>
+          <a:ln w="19050">
+            <a:solidFill>
+              <a:srgbClr val="167B78"/>
+            </a:solidFill>
+            <a:prstDash val="solid"/>
+          </a:ln>
+        </p:spPr>
+      </p:sp>
+      <p:sp>
+        <p:nvSpPr>
+          <p:cNvPr id="23" name="Native_line_19"/>
+          <p:cNvSpPr/>
+          <p:nvPr/>
+        </p:nvSpPr>
+        <p:spPr>
+          <a:xfrm>
+            <a:off x="3497580" y="3803904"/>
+            <a:ext cx="4297680" cy="0"/>
+          </a:xfrm>
+          <a:prstGeom prst="line">
+            <a:avLst/>
+          </a:prstGeom>
+          <a:noFill/>
+          <a:ln w="19050">
+            <a:solidFill>
+              <a:srgbClr val="167B78"/>
+            </a:solidFill>
+            <a:prstDash val="solid"/>
+          </a:ln>
+        </p:spPr>
+      </p:sp>
+      <p:sp>
+        <p:nvSpPr>
+          <p:cNvPr id="24" name="Native_line_20"/>
+          <p:cNvSpPr/>
+          <p:nvPr/>
+        </p:nvSpPr>
+        <p:spPr>
+          <a:xfrm>
+            <a:off x="3497580" y="3374136"/>
+            <a:ext cx="0" cy="429768"/>
+          </a:xfrm>
+          <a:prstGeom prst="line">
+            <a:avLst/>
+          </a:prstGeom>
+          <a:noFill/>
+          <a:ln w="19050">
+            <a:solidFill>
+              <a:srgbClr val="167B78"/>
+            </a:solidFill>
+            <a:prstDash val="solid"/>
+            <a:headEnd type="triangle"/>
+          </a:ln>
+        </p:spPr>
+      </p:sp>
+      <p:sp>
+        <p:nvSpPr>
+          <p:cNvPr id="25" name="Native_text_21"/>
+          <p:cNvSpPr/>
+          <p:nvPr/>
+        </p:nvSpPr>
+        <p:spPr>
+          <a:xfrm>
+            <a:off x="4023360" y="3977640"/>
+            <a:ext cx="4114800" cy="283464"/>
+          </a:xfrm>
+          <a:prstGeom prst="rect">
+            <a:avLst/>
+          </a:prstGeom>
+          <a:noFill/>
+          <a:ln/>
+        </p:spPr>
+        <p:txBody>
+          <a:bodyPr wrap="square" lIns="0" tIns="0" rIns="0" bIns="0" rtlCol="0" anchor="ctr">
+            <a:normAutofit/>
+          </a:bodyPr>
+          <a:lstStyle/>
+          <a:p>
+            <a:pPr algn="ctr" indent="0" marL="0">
+              <a:buNone/>
+            </a:pPr>
+            <a:r>
+              <a:rPr lang="en-US" sz="1500" b="1" dirty="0">
+                <a:solidFill>
+                  <a:srgbClr val="167B78"/>
+                </a:solidFill>
+                <a:latin typeface="Microsoft YaHei" pitchFamily="34" charset="0"/>
+                <a:ea typeface="Microsoft YaHei" pitchFamily="34" charset="-122"/>
+                <a:cs typeface="Microsoft YaHei" pitchFamily="34" charset="-120"/>
+              </a:rPr>
+              <a:t>反馈：指标 + 条件 + 检查结果</a:t>
+            </a:r>
+            <a:endParaRPr lang="en-US" sz="1500" dirty="0"/>
+          </a:p>
+        </p:txBody>
+      </p:sp>
+      <p:sp>
+        <p:nvSpPr>
+          <p:cNvPr id="26" name="Native_text_22"/>
+          <p:cNvSpPr/>
+          <p:nvPr/>
+        </p:nvSpPr>
+        <p:spPr>
+          <a:xfrm>
+            <a:off x="457200" y="4005072"/>
+            <a:ext cx="2423160" cy="274320"/>
+          </a:xfrm>
+          <a:prstGeom prst="rect">
+            <a:avLst/>
+          </a:prstGeom>
+          <a:noFill/>
+          <a:ln/>
+        </p:spPr>
+        <p:txBody>
+          <a:bodyPr wrap="square" lIns="0" tIns="0" rIns="0" bIns="0" rtlCol="0" anchor="ctr">
+            <a:normAutofit/>
+          </a:bodyPr>
+          <a:lstStyle/>
+          <a:p>
+            <a:pPr algn="ctr" indent="0" marL="0">
+              <a:buNone/>
+            </a:pPr>
+            <a:r>
+              <a:rPr lang="en-US" sz="1200" dirty="0">
+                <a:solidFill>
+                  <a:srgbClr val="536570"/>
+                </a:solidFill>
+                <a:latin typeface="Microsoft YaHei" pitchFamily="34" charset="0"/>
+                <a:ea typeface="Microsoft YaHei" pitchFamily="34" charset="-122"/>
+                <a:cs typeface="Microsoft YaHei" pitchFamily="34" charset="-120"/>
+              </a:rPr>
+              <a:t>版本与轨迹持续记录</a:t>
+            </a:r>
+            <a:endParaRPr lang="en-US" sz="1200" dirty="0"/>
+          </a:p>
+        </p:txBody>
+      </p:sp>
+      <p:sp>
+        <p:nvSpPr>
+          <p:cNvPr id="27" name="Editable_Source"/>
+          <p:cNvSpPr/>
+          <p:nvPr/>
+        </p:nvSpPr>
+        <p:spPr>
+          <a:xfrm>
+            <a:off x="457200" y="4882896"/>
+            <a:ext cx="7772400" cy="173736"/>
+          </a:xfrm>
+          <a:prstGeom prst="rect">
+            <a:avLst/>
+          </a:prstGeom>
+          <a:noFill/>
+          <a:ln/>
+        </p:spPr>
+        <p:txBody>
+          <a:bodyPr wrap="square" lIns="0" tIns="0" rIns="0" bIns="0" rtlCol="0" anchor="ctr">
+            <a:normAutofit/>
+          </a:bodyPr>
           <a:lstStyle/>
           <a:p>
             <a:pPr algn="l" indent="0" marL="0">
               <a:buNone/>
             </a:pPr>
             <a:r>
-              <a:rPr lang="en-US" sz="2600" b="1" dirty="0">
-                <a:solidFill>
-                  <a:srgbClr val="1B2838"/>
-                </a:solidFill>
-                <a:latin typeface="Trebuchet MS" pitchFamily="34" charset="0"/>
-                <a:ea typeface="Trebuchet MS" pitchFamily="34" charset="-122"/>
-                <a:cs typeface="Trebuchet MS" pitchFamily="34" charset="-120"/>
-              </a:rPr>
-              <a:t>课题方向：面向光子芯片设计的 Agent Harness</a:t>
-            </a:r>
-            <a:endParaRPr lang="en-US" sz="2600" dirty="0"/>
-          </a:p>
-        </p:txBody>
-      </p:sp>
-      <p:sp>
-        <p:nvSpPr>
-          <p:cNvPr id="4" name="Text 2"/>
-          <p:cNvSpPr txBox="1"/>
-          <p:nvPr/>
-        </p:nvSpPr>
-        <p:spPr>
-          <a:xfrm>
-            <a:off x="457200" y="632460"/>
-            <a:ext cx="8229600" cy="292608"/>
-          </a:xfrm>
-          <a:prstGeom prst="rect">
-            <a:avLst/>
-          </a:prstGeom>
-          <a:noFill/>
-          <a:ln/>
-        </p:spPr>
-        <p:txBody>
-          <a:bodyPr wrap="square" lIns="0" tIns="0" rIns="0" bIns="0" rtlCol="0" anchor="t"/>
-          <a:lstStyle/>
-          <a:p>
-            <a:pPr algn="l" indent="0" marL="0">
-              <a:buNone/>
-            </a:pPr>
-            <a:r>
-              <a:rPr lang="en-US" sz="1300" dirty="0">
-                <a:solidFill>
-                  <a:srgbClr val="4B5563"/>
-                </a:solidFill>
-                <a:latin typeface="Calibri" pitchFamily="34" charset="0"/>
-                <a:ea typeface="Calibri" pitchFamily="34" charset="-122"/>
-                <a:cs typeface="Calibri" pitchFamily="34" charset="-120"/>
-              </a:rPr>
-              <a:t>Harness 组织模型、专业工具、状态与验证；与 DAS 需求模块衔接</a:t>
-            </a:r>
-            <a:endParaRPr lang="en-US" sz="1300" dirty="0"/>
-          </a:p>
-        </p:txBody>
-      </p:sp>
-      <p:pic>
-        <p:nvPicPr>
-          <p:cNvPr id="5" name="Image 0" descr="G:\PIC_Harness_Research\presentations\task-018-class-harness\assets\p02-harness-roles.svg">    </p:cNvPr>
-          <p:cNvPicPr>
-            <a:picLocks noChangeAspect="1"/>
-          </p:cNvPicPr>
-          <p:nvPr/>
-        </p:nvPicPr>
-        <p:blipFill>
-          <a:blip r:embed="rId1">
-            <a:extLst>
-              <a:ext uri="{96DAC541-7B7A-43D3-8B79-37D633B846F1}">
-                <asvg:svgBlip xmlns:asvg="http://schemas.microsoft.com/office/drawing/2016/SVG/main" r:embed="rId2"/>
-              </a:ext>
-            </a:extLst>
-          </a:blip>
-          <a:stretch>
-            <a:fillRect/>
-          </a:stretch>
-        </p:blipFill>
-        <p:spPr>
-          <a:xfrm>
-            <a:off x="457200" y="1208532"/>
-            <a:ext cx="8229600" cy="3569208"/>
-          </a:xfrm>
-          <a:prstGeom prst="rect">
-            <a:avLst/>
-          </a:prstGeom>
-        </p:spPr>
-      </p:pic>
-      <p:sp>
-        <p:nvSpPr>
-          <p:cNvPr id="6" name="Text 3"/>
-          <p:cNvSpPr txBox="1"/>
-          <p:nvPr/>
-        </p:nvSpPr>
-        <p:spPr>
-          <a:xfrm>
-            <a:off x="457200" y="4777740"/>
-            <a:ext cx="8229600" cy="274320"/>
-          </a:xfrm>
-          <a:prstGeom prst="rect">
-            <a:avLst/>
-          </a:prstGeom>
-          <a:noFill/>
-          <a:ln/>
-        </p:spPr>
-        <p:txBody>
-          <a:bodyPr wrap="square" lIns="0" tIns="0" rIns="0" bIns="0" rtlCol="0" anchor="ctr"/>
-          <a:lstStyle/>
-          <a:p>
-            <a:pPr algn="l" indent="0" marL="0">
-              <a:buNone/>
-            </a:pPr>
-            <a:r>
-              <a:rPr lang="en-US" sz="1100" dirty="0">
-                <a:solidFill>
-                  <a:srgbClr val="4B5563"/>
-                </a:solidFill>
-                <a:latin typeface="Calibri" pitchFamily="34" charset="0"/>
-                <a:ea typeface="Calibri" pitchFamily="34" charset="-122"/>
-                <a:cs typeface="Calibri" pitchFamily="34" charset="-120"/>
-              </a:rPr>
-              <a:t>依据：候选方向材料 §2–4；概念职责分工｜1/8</a:t>
-            </a:r>
-            <a:endParaRPr lang="en-US" sz="1100" dirty="0"/>
+              <a:rPr lang="en-US" sz="820" dirty="0">
+                <a:solidFill>
+                  <a:srgbClr val="536570"/>
+                </a:solidFill>
+                <a:latin typeface="Microsoft YaHei" pitchFamily="34" charset="0"/>
+                <a:ea typeface="Microsoft YaHei" pitchFamily="34" charset="-122"/>
+                <a:cs typeface="Microsoft YaHei" pitchFamily="34" charset="-120"/>
+              </a:rPr>
+              <a:t>依据：候选方向材料 §2–4；概念职责分工</a:t>
+            </a:r>
+            <a:endParaRPr lang="en-US" sz="820" dirty="0"/>
+          </a:p>
+        </p:txBody>
+      </p:sp>
+      <p:sp>
+        <p:nvSpPr>
+          <p:cNvPr id="28" name="Editable_PageNumber"/>
+          <p:cNvSpPr/>
+          <p:nvPr/>
+        </p:nvSpPr>
+        <p:spPr>
+          <a:xfrm>
+            <a:off x="8339328" y="4882896"/>
+            <a:ext cx="347472" cy="173736"/>
+          </a:xfrm>
+          <a:prstGeom prst="rect">
+            <a:avLst/>
+          </a:prstGeom>
+          <a:noFill/>
+          <a:ln/>
+        </p:spPr>
+        <p:txBody>
+          <a:bodyPr wrap="square" lIns="0" tIns="0" rIns="0" bIns="0" rtlCol="0" anchor="ctr">
+            <a:normAutofit/>
+          </a:bodyPr>
+          <a:lstStyle/>
+          <a:p>
+            <a:pPr algn="r" indent="0" marL="0">
+              <a:buNone/>
+            </a:pPr>
+            <a:r>
+              <a:rPr lang="en-US" sz="900" dirty="0">
+                <a:solidFill>
+                  <a:srgbClr val="536570"/>
+                </a:solidFill>
+                <a:latin typeface="Microsoft YaHei" pitchFamily="34" charset="0"/>
+                <a:ea typeface="Microsoft YaHei" pitchFamily="34" charset="-122"/>
+                <a:cs typeface="Microsoft YaHei" pitchFamily="34" charset="-120"/>
+              </a:rPr>
+              <a:t>1/8</a:t>
+            </a:r>
+            <a:endParaRPr lang="en-US" sz="900" dirty="0"/>
           </a:p>
         </p:txBody>
       </p:sp>
@@ -1717,24 +2520,106 @@
       </p:grpSpPr>
       <p:sp>
         <p:nvSpPr>
-          <p:cNvPr id="2" name="Shape 0"/>
-          <p:cNvSpPr/>
-          <p:nvPr/>
-        </p:nvSpPr>
-        <p:spPr>
-          <a:xfrm>
-            <a:off x="457200" y="979932"/>
-            <a:ext cx="1143000" cy="45720"/>
+          <p:cNvPr id="2" name="Editable_Title"/>
+          <p:cNvSpPr/>
+          <p:nvPr/>
+        </p:nvSpPr>
+        <p:spPr>
+          <a:xfrm>
+            <a:off x="457200" y="137160"/>
+            <a:ext cx="8229600" cy="512064"/>
+          </a:xfrm>
+          <a:prstGeom prst="rect">
+            <a:avLst/>
+          </a:prstGeom>
+          <a:noFill/>
+          <a:ln/>
+        </p:spPr>
+        <p:txBody>
+          <a:bodyPr wrap="square" lIns="0" tIns="0" rIns="0" bIns="0" rtlCol="0" anchor="ctr">
+            <a:normAutofit/>
+          </a:bodyPr>
+          <a:lstStyle/>
+          <a:p>
+            <a:pPr algn="l" indent="0" marL="0">
+              <a:buNone/>
+            </a:pPr>
+            <a:r>
+              <a:rPr lang="en-US" sz="2400" b="1" dirty="0">
+                <a:solidFill>
+                  <a:srgbClr val="18364A"/>
+                </a:solidFill>
+                <a:latin typeface="Microsoft YaHei" pitchFamily="34" charset="0"/>
+                <a:ea typeface="Microsoft YaHei" pitchFamily="34" charset="-122"/>
+                <a:cs typeface="Microsoft YaHei" pitchFamily="34" charset="-120"/>
+              </a:rPr>
+              <a:t>研究切入点：仿真后的物理诊断与设计决策</a:t>
+            </a:r>
+            <a:endParaRPr lang="en-US" sz="2400" dirty="0"/>
+          </a:p>
+        </p:txBody>
+      </p:sp>
+      <p:sp>
+        <p:nvSpPr>
+          <p:cNvPr id="3" name="Editable_Subtitle"/>
+          <p:cNvSpPr/>
+          <p:nvPr/>
+        </p:nvSpPr>
+        <p:spPr>
+          <a:xfrm>
+            <a:off x="457200" y="749808"/>
+            <a:ext cx="8229600" cy="246888"/>
+          </a:xfrm>
+          <a:prstGeom prst="rect">
+            <a:avLst/>
+          </a:prstGeom>
+          <a:noFill/>
+          <a:ln/>
+        </p:spPr>
+        <p:txBody>
+          <a:bodyPr wrap="square" lIns="0" tIns="0" rIns="0" bIns="0" rtlCol="0" anchor="ctr">
+            <a:normAutofit/>
+          </a:bodyPr>
+          <a:lstStyle/>
+          <a:p>
+            <a:pPr algn="l" indent="0" marL="0">
+              <a:buNone/>
+            </a:pPr>
+            <a:r>
+              <a:rPr lang="en-US" sz="1150" dirty="0">
+                <a:solidFill>
+                  <a:srgbClr val="536570"/>
+                </a:solidFill>
+                <a:latin typeface="Microsoft YaHei" pitchFamily="34" charset="0"/>
+                <a:ea typeface="Microsoft YaHei" pitchFamily="34" charset="-122"/>
+                <a:cs typeface="Microsoft YaHei" pitchFamily="34" charset="-120"/>
+              </a:rPr>
+              <a:t>拟研究方向：诊断形成可检验预测，动作由后续结果验证</a:t>
+            </a:r>
+            <a:endParaRPr lang="en-US" sz="1150" dirty="0"/>
+          </a:p>
+        </p:txBody>
+      </p:sp>
+      <p:sp>
+        <p:nvSpPr>
+          <p:cNvPr id="4" name="Header_Accent"/>
+          <p:cNvSpPr/>
+          <p:nvPr/>
+        </p:nvSpPr>
+        <p:spPr>
+          <a:xfrm>
+            <a:off x="457200" y="1042416"/>
+            <a:ext cx="1005840" cy="36576"/>
           </a:xfrm>
           <a:prstGeom prst="rect">
             <a:avLst/>
           </a:prstGeom>
           <a:solidFill>
-            <a:srgbClr val="0B2545"/>
+            <a:srgbClr val="18364A"/>
           </a:solidFill>
           <a:ln w="12700">
             <a:solidFill>
-              <a:srgbClr val="0B2545"/>
+              <a:srgbClr val="18364A"/>
             </a:solidFill>
             <a:prstDash val="solid"/>
           </a:ln>
@@ -1742,148 +2627,763 @@
       </p:sp>
       <p:sp>
         <p:nvSpPr>
-          <p:cNvPr id="3" name="Text 1"/>
-          <p:cNvSpPr txBox="1"/>
-          <p:nvPr/>
-        </p:nvSpPr>
-        <p:spPr>
-          <a:xfrm>
-            <a:off x="457200" y="91440"/>
-            <a:ext cx="8229600" cy="495300"/>
-          </a:xfrm>
-          <a:prstGeom prst="rect">
-            <a:avLst/>
-          </a:prstGeom>
-          <a:noFill/>
-          <a:ln/>
-        </p:spPr>
-        <p:txBody>
-          <a:bodyPr wrap="square" lIns="0" tIns="0" rIns="0" bIns="0" rtlCol="0" anchor="t"/>
+          <p:cNvPr id="5" name="Native_text_1"/>
+          <p:cNvSpPr/>
+          <p:nvPr/>
+        </p:nvSpPr>
+        <p:spPr>
+          <a:xfrm>
+            <a:off x="457200" y="1261872"/>
+            <a:ext cx="8229600" cy="301752"/>
+          </a:xfrm>
+          <a:prstGeom prst="rect">
+            <a:avLst/>
+          </a:prstGeom>
+          <a:noFill/>
+          <a:ln/>
+        </p:spPr>
+        <p:txBody>
+          <a:bodyPr wrap="square" lIns="0" tIns="0" rIns="0" bIns="0" rtlCol="0" anchor="ctr">
+            <a:normAutofit/>
+          </a:bodyPr>
+          <a:lstStyle/>
+          <a:p>
+            <a:pPr algn="ctr" indent="0" marL="0">
+              <a:buNone/>
+            </a:pPr>
+            <a:r>
+              <a:rPr lang="en-US" sz="1700" b="1" dirty="0">
+                <a:solidFill>
+                  <a:srgbClr val="167B78"/>
+                </a:solidFill>
+                <a:latin typeface="Microsoft YaHei" pitchFamily="34" charset="0"/>
+                <a:ea typeface="Microsoft YaHei" pitchFamily="34" charset="-122"/>
+                <a:cs typeface="Microsoft YaHei" pitchFamily="34" charset="-120"/>
+              </a:rPr>
+              <a:t>候选研究问题：如何利用物理知识与真实反馈选择下一步？</a:t>
+            </a:r>
+            <a:endParaRPr lang="en-US" sz="1700" dirty="0"/>
+          </a:p>
+        </p:txBody>
+      </p:sp>
+      <p:sp>
+        <p:nvSpPr>
+          <p:cNvPr id="6" name="Native_rect_2"/>
+          <p:cNvSpPr/>
+          <p:nvPr/>
+        </p:nvSpPr>
+        <p:spPr>
+          <a:xfrm>
+            <a:off x="457200" y="1938528"/>
+            <a:ext cx="2606040" cy="1325880"/>
+          </a:xfrm>
+          <a:prstGeom prst="rect">
+            <a:avLst/>
+          </a:prstGeom>
+          <a:solidFill>
+            <a:srgbClr val="EAF0F7"/>
+          </a:solidFill>
+          <a:ln w="8890">
+            <a:solidFill>
+              <a:srgbClr val="CBD9DF"/>
+            </a:solidFill>
+            <a:prstDash val="solid"/>
+          </a:ln>
+        </p:spPr>
+      </p:sp>
+      <p:sp>
+        <p:nvSpPr>
+          <p:cNvPr id="7" name="Native_text_3"/>
+          <p:cNvSpPr/>
+          <p:nvPr/>
+        </p:nvSpPr>
+        <p:spPr>
+          <a:xfrm>
+            <a:off x="548640" y="2029968"/>
+            <a:ext cx="2423160" cy="402336"/>
+          </a:xfrm>
+          <a:prstGeom prst="rect">
+            <a:avLst/>
+          </a:prstGeom>
+          <a:noFill/>
+          <a:ln/>
+        </p:spPr>
+        <p:txBody>
+          <a:bodyPr wrap="square" lIns="0" tIns="0" rIns="0" bIns="0" rtlCol="0" anchor="ctr">
+            <a:normAutofit/>
+          </a:bodyPr>
+          <a:lstStyle/>
+          <a:p>
+            <a:pPr algn="ctr" indent="0" marL="0">
+              <a:buNone/>
+            </a:pPr>
+            <a:r>
+              <a:rPr lang="en-US" sz="1600" b="1" dirty="0">
+                <a:solidFill>
+                  <a:srgbClr val="18364A"/>
+                </a:solidFill>
+                <a:latin typeface="Microsoft YaHei" pitchFamily="34" charset="0"/>
+                <a:ea typeface="Microsoft YaHei" pitchFamily="34" charset="-122"/>
+                <a:cs typeface="Microsoft YaHei" pitchFamily="34" charset="-120"/>
+              </a:rPr>
+              <a:t>仿真结果</a:t>
+            </a:r>
+            <a:endParaRPr lang="en-US" sz="1600" dirty="0"/>
+          </a:p>
+        </p:txBody>
+      </p:sp>
+      <p:sp>
+        <p:nvSpPr>
+          <p:cNvPr id="8" name="Native_text_4"/>
+          <p:cNvSpPr/>
+          <p:nvPr/>
+        </p:nvSpPr>
+        <p:spPr>
+          <a:xfrm>
+            <a:off x="548640" y="2578608"/>
+            <a:ext cx="2423160" cy="621792"/>
+          </a:xfrm>
+          <a:prstGeom prst="rect">
+            <a:avLst/>
+          </a:prstGeom>
+          <a:noFill/>
+          <a:ln/>
+        </p:spPr>
+        <p:txBody>
+          <a:bodyPr wrap="square" lIns="0" tIns="0" rIns="0" bIns="0" rtlCol="0" anchor="ctr">
+            <a:normAutofit/>
+          </a:bodyPr>
+          <a:lstStyle/>
+          <a:p>
+            <a:pPr algn="ctr" indent="0" marL="0">
+              <a:buNone/>
+            </a:pPr>
+            <a:r>
+              <a:rPr lang="en-US" sz="1270" dirty="0">
+                <a:solidFill>
+                  <a:srgbClr val="536570"/>
+                </a:solidFill>
+                <a:latin typeface="Microsoft YaHei" pitchFamily="34" charset="0"/>
+                <a:ea typeface="Microsoft YaHei" pitchFamily="34" charset="-122"/>
+                <a:cs typeface="Microsoft YaHei" pitchFamily="34" charset="-120"/>
+              </a:rPr>
+              <a:t>功率 / 光谱 / 场分布</a:t>
+            </a:r>
+            <a:endParaRPr lang="en-US" sz="1270" dirty="0"/>
+          </a:p>
+          <a:p>
+            <a:pPr algn="ctr" indent="0" marL="0">
+              <a:buNone/>
+            </a:pPr>
+            <a:r>
+              <a:rPr lang="en-US" sz="1270" dirty="0">
+                <a:solidFill>
+                  <a:srgbClr val="536570"/>
+                </a:solidFill>
+                <a:latin typeface="Microsoft YaHei" pitchFamily="34" charset="0"/>
+                <a:ea typeface="Microsoft YaHei" pitchFamily="34" charset="-122"/>
+                <a:cs typeface="Microsoft YaHei" pitchFamily="34" charset="-120"/>
+              </a:rPr>
+              <a:t>模型与求解条件</a:t>
+            </a:r>
+            <a:endParaRPr lang="en-US" sz="1270" dirty="0"/>
+          </a:p>
+        </p:txBody>
+      </p:sp>
+      <p:sp>
+        <p:nvSpPr>
+          <p:cNvPr id="9" name="Native_rect_5"/>
+          <p:cNvSpPr/>
+          <p:nvPr/>
+        </p:nvSpPr>
+        <p:spPr>
+          <a:xfrm>
+            <a:off x="3273552" y="1938528"/>
+            <a:ext cx="2606040" cy="1325880"/>
+          </a:xfrm>
+          <a:prstGeom prst="rect">
+            <a:avLst/>
+          </a:prstGeom>
+          <a:solidFill>
+            <a:srgbClr val="FBEFE3"/>
+          </a:solidFill>
+          <a:ln w="8890">
+            <a:solidFill>
+              <a:srgbClr val="CBD9DF"/>
+            </a:solidFill>
+            <a:prstDash val="solid"/>
+          </a:ln>
+        </p:spPr>
+      </p:sp>
+      <p:sp>
+        <p:nvSpPr>
+          <p:cNvPr id="10" name="Native_text_6"/>
+          <p:cNvSpPr/>
+          <p:nvPr/>
+        </p:nvSpPr>
+        <p:spPr>
+          <a:xfrm>
+            <a:off x="3364992" y="2029968"/>
+            <a:ext cx="2423160" cy="402336"/>
+          </a:xfrm>
+          <a:prstGeom prst="rect">
+            <a:avLst/>
+          </a:prstGeom>
+          <a:noFill/>
+          <a:ln/>
+        </p:spPr>
+        <p:txBody>
+          <a:bodyPr wrap="square" lIns="0" tIns="0" rIns="0" bIns="0" rtlCol="0" anchor="ctr">
+            <a:normAutofit/>
+          </a:bodyPr>
+          <a:lstStyle/>
+          <a:p>
+            <a:pPr algn="ctr" indent="0" marL="0">
+              <a:buNone/>
+            </a:pPr>
+            <a:r>
+              <a:rPr lang="en-US" sz="1600" b="1" dirty="0">
+                <a:solidFill>
+                  <a:srgbClr val="18364A"/>
+                </a:solidFill>
+                <a:latin typeface="Microsoft YaHei" pitchFamily="34" charset="0"/>
+                <a:ea typeface="Microsoft YaHei" pitchFamily="34" charset="-122"/>
+                <a:cs typeface="Microsoft YaHei" pitchFamily="34" charset="-120"/>
+              </a:rPr>
+              <a:t>物理诊断</a:t>
+            </a:r>
+            <a:endParaRPr lang="en-US" sz="1600" dirty="0"/>
+          </a:p>
+        </p:txBody>
+      </p:sp>
+      <p:sp>
+        <p:nvSpPr>
+          <p:cNvPr id="11" name="Native_text_7"/>
+          <p:cNvSpPr/>
+          <p:nvPr/>
+        </p:nvSpPr>
+        <p:spPr>
+          <a:xfrm>
+            <a:off x="3364992" y="2578608"/>
+            <a:ext cx="2423160" cy="621792"/>
+          </a:xfrm>
+          <a:prstGeom prst="rect">
+            <a:avLst/>
+          </a:prstGeom>
+          <a:noFill/>
+          <a:ln/>
+        </p:spPr>
+        <p:txBody>
+          <a:bodyPr wrap="square" lIns="0" tIns="0" rIns="0" bIns="0" rtlCol="0" anchor="ctr">
+            <a:normAutofit/>
+          </a:bodyPr>
+          <a:lstStyle/>
+          <a:p>
+            <a:pPr algn="ctr" indent="0" marL="0">
+              <a:buNone/>
+            </a:pPr>
+            <a:r>
+              <a:rPr lang="en-US" sz="1270" dirty="0">
+                <a:solidFill>
+                  <a:srgbClr val="536570"/>
+                </a:solidFill>
+                <a:latin typeface="Microsoft YaHei" pitchFamily="34" charset="0"/>
+                <a:ea typeface="Microsoft YaHei" pitchFamily="34" charset="-122"/>
+                <a:cs typeface="Microsoft YaHei" pitchFamily="34" charset="-120"/>
+              </a:rPr>
+              <a:t>哪里偏离目标？</a:t>
+            </a:r>
+            <a:endParaRPr lang="en-US" sz="1270" dirty="0"/>
+          </a:p>
+          <a:p>
+            <a:pPr algn="ctr" indent="0" marL="0">
+              <a:buNone/>
+            </a:pPr>
+            <a:r>
+              <a:rPr lang="en-US" sz="1270" dirty="0">
+                <a:solidFill>
+                  <a:srgbClr val="536570"/>
+                </a:solidFill>
+                <a:latin typeface="Microsoft YaHei" pitchFamily="34" charset="0"/>
+                <a:ea typeface="Microsoft YaHei" pitchFamily="34" charset="-122"/>
+                <a:cs typeface="Microsoft YaHei" pitchFamily="34" charset="-120"/>
+              </a:rPr>
+              <a:t>提出原因假设</a:t>
+            </a:r>
+            <a:endParaRPr lang="en-US" sz="1270" dirty="0"/>
+          </a:p>
+        </p:txBody>
+      </p:sp>
+      <p:sp>
+        <p:nvSpPr>
+          <p:cNvPr id="12" name="Native_rect_8"/>
+          <p:cNvSpPr/>
+          <p:nvPr/>
+        </p:nvSpPr>
+        <p:spPr>
+          <a:xfrm>
+            <a:off x="6080760" y="1938528"/>
+            <a:ext cx="2606040" cy="1325880"/>
+          </a:xfrm>
+          <a:prstGeom prst="rect">
+            <a:avLst/>
+          </a:prstGeom>
+          <a:solidFill>
+            <a:srgbClr val="E6F3EF"/>
+          </a:solidFill>
+          <a:ln w="8890">
+            <a:solidFill>
+              <a:srgbClr val="CBD9DF"/>
+            </a:solidFill>
+            <a:prstDash val="solid"/>
+          </a:ln>
+        </p:spPr>
+      </p:sp>
+      <p:sp>
+        <p:nvSpPr>
+          <p:cNvPr id="13" name="Native_text_9"/>
+          <p:cNvSpPr/>
+          <p:nvPr/>
+        </p:nvSpPr>
+        <p:spPr>
+          <a:xfrm>
+            <a:off x="6172200" y="2029968"/>
+            <a:ext cx="2423160" cy="402336"/>
+          </a:xfrm>
+          <a:prstGeom prst="rect">
+            <a:avLst/>
+          </a:prstGeom>
+          <a:noFill/>
+          <a:ln/>
+        </p:spPr>
+        <p:txBody>
+          <a:bodyPr wrap="square" lIns="0" tIns="0" rIns="0" bIns="0" rtlCol="0" anchor="ctr">
+            <a:normAutofit/>
+          </a:bodyPr>
+          <a:lstStyle/>
+          <a:p>
+            <a:pPr algn="ctr" indent="0" marL="0">
+              <a:buNone/>
+            </a:pPr>
+            <a:r>
+              <a:rPr lang="en-US" sz="1600" b="1" dirty="0">
+                <a:solidFill>
+                  <a:srgbClr val="18364A"/>
+                </a:solidFill>
+                <a:latin typeface="Microsoft YaHei" pitchFamily="34" charset="0"/>
+                <a:ea typeface="Microsoft YaHei" pitchFamily="34" charset="-122"/>
+                <a:cs typeface="Microsoft YaHei" pitchFamily="34" charset="-120"/>
+              </a:rPr>
+              <a:t>设计决策</a:t>
+            </a:r>
+            <a:endParaRPr lang="en-US" sz="1600" dirty="0"/>
+          </a:p>
+        </p:txBody>
+      </p:sp>
+      <p:sp>
+        <p:nvSpPr>
+          <p:cNvPr id="14" name="Native_text_10"/>
+          <p:cNvSpPr/>
+          <p:nvPr/>
+        </p:nvSpPr>
+        <p:spPr>
+          <a:xfrm>
+            <a:off x="6172200" y="2578608"/>
+            <a:ext cx="2423160" cy="621792"/>
+          </a:xfrm>
+          <a:prstGeom prst="rect">
+            <a:avLst/>
+          </a:prstGeom>
+          <a:noFill/>
+          <a:ln/>
+        </p:spPr>
+        <p:txBody>
+          <a:bodyPr wrap="square" lIns="0" tIns="0" rIns="0" bIns="0" rtlCol="0" anchor="ctr">
+            <a:normAutofit/>
+          </a:bodyPr>
+          <a:lstStyle/>
+          <a:p>
+            <a:pPr algn="ctr" indent="0" marL="0">
+              <a:buNone/>
+            </a:pPr>
+            <a:r>
+              <a:rPr lang="en-US" sz="1270" dirty="0">
+                <a:solidFill>
+                  <a:srgbClr val="536570"/>
+                </a:solidFill>
+                <a:latin typeface="Microsoft YaHei" pitchFamily="34" charset="0"/>
+                <a:ea typeface="Microsoft YaHei" pitchFamily="34" charset="-122"/>
+                <a:cs typeface="Microsoft YaHei" pitchFamily="34" charset="-120"/>
+              </a:rPr>
+              <a:t>改参数 / 换策略</a:t>
+            </a:r>
+            <a:endParaRPr lang="en-US" sz="1270" dirty="0"/>
+          </a:p>
+          <a:p>
+            <a:pPr algn="ctr" indent="0" marL="0">
+              <a:buNone/>
+            </a:pPr>
+            <a:r>
+              <a:rPr lang="en-US" sz="1270" dirty="0">
+                <a:solidFill>
+                  <a:srgbClr val="536570"/>
+                </a:solidFill>
+                <a:latin typeface="Microsoft YaHei" pitchFamily="34" charset="0"/>
+                <a:ea typeface="Microsoft YaHei" pitchFamily="34" charset="-122"/>
+                <a:cs typeface="Microsoft YaHei" pitchFamily="34" charset="-120"/>
+              </a:rPr>
+              <a:t>或补充验证</a:t>
+            </a:r>
+            <a:endParaRPr lang="en-US" sz="1270" dirty="0"/>
+          </a:p>
+        </p:txBody>
+      </p:sp>
+      <p:sp>
+        <p:nvSpPr>
+          <p:cNvPr id="15" name="Native_line_11"/>
+          <p:cNvSpPr/>
+          <p:nvPr/>
+        </p:nvSpPr>
+        <p:spPr>
+          <a:xfrm>
+            <a:off x="3099816" y="2606040"/>
+            <a:ext cx="128016" cy="0"/>
+          </a:xfrm>
+          <a:prstGeom prst="line">
+            <a:avLst/>
+          </a:prstGeom>
+          <a:noFill/>
+          <a:ln w="19050">
+            <a:solidFill>
+              <a:srgbClr val="167B78"/>
+            </a:solidFill>
+            <a:prstDash val="solid"/>
+            <a:tailEnd type="triangle"/>
+          </a:ln>
+        </p:spPr>
+      </p:sp>
+      <p:sp>
+        <p:nvSpPr>
+          <p:cNvPr id="16" name="Native_line_12"/>
+          <p:cNvSpPr/>
+          <p:nvPr/>
+        </p:nvSpPr>
+        <p:spPr>
+          <a:xfrm>
+            <a:off x="5916168" y="2606040"/>
+            <a:ext cx="128016" cy="0"/>
+          </a:xfrm>
+          <a:prstGeom prst="line">
+            <a:avLst/>
+          </a:prstGeom>
+          <a:noFill/>
+          <a:ln w="19050">
+            <a:solidFill>
+              <a:srgbClr val="167B78"/>
+            </a:solidFill>
+            <a:prstDash val="solid"/>
+            <a:tailEnd type="triangle"/>
+          </a:ln>
+        </p:spPr>
+      </p:sp>
+      <p:sp>
+        <p:nvSpPr>
+          <p:cNvPr id="17" name="Native_rect_13"/>
+          <p:cNvSpPr/>
+          <p:nvPr/>
+        </p:nvSpPr>
+        <p:spPr>
+          <a:xfrm>
+            <a:off x="3273552" y="3703320"/>
+            <a:ext cx="5413248" cy="896112"/>
+          </a:xfrm>
+          <a:prstGeom prst="rect">
+            <a:avLst/>
+          </a:prstGeom>
+          <a:solidFill>
+            <a:srgbClr val="E6F3EF"/>
+          </a:solidFill>
+          <a:ln w="8890">
+            <a:solidFill>
+              <a:srgbClr val="CBD9DF"/>
+            </a:solidFill>
+            <a:prstDash val="solid"/>
+          </a:ln>
+        </p:spPr>
+      </p:sp>
+      <p:sp>
+        <p:nvSpPr>
+          <p:cNvPr id="18" name="Native_text_14"/>
+          <p:cNvSpPr/>
+          <p:nvPr/>
+        </p:nvSpPr>
+        <p:spPr>
+          <a:xfrm>
+            <a:off x="3456432" y="3758184"/>
+            <a:ext cx="5047488" cy="384048"/>
+          </a:xfrm>
+          <a:prstGeom prst="rect">
+            <a:avLst/>
+          </a:prstGeom>
+          <a:noFill/>
+          <a:ln/>
+        </p:spPr>
+        <p:txBody>
+          <a:bodyPr wrap="square" lIns="0" tIns="0" rIns="0" bIns="0" rtlCol="0" anchor="ctr">
+            <a:normAutofit/>
+          </a:bodyPr>
+          <a:lstStyle/>
+          <a:p>
+            <a:pPr algn="ctr" indent="0" marL="0">
+              <a:buNone/>
+            </a:pPr>
+            <a:r>
+              <a:rPr lang="en-US" sz="1600" b="1" dirty="0">
+                <a:solidFill>
+                  <a:srgbClr val="167B78"/>
+                </a:solidFill>
+                <a:latin typeface="Microsoft YaHei" pitchFamily="34" charset="0"/>
+                <a:ea typeface="Microsoft YaHei" pitchFamily="34" charset="-122"/>
+                <a:cs typeface="Microsoft YaHei" pitchFamily="34" charset="-120"/>
+              </a:rPr>
+              <a:t>把诊断写成可检验预测</a:t>
+            </a:r>
+            <a:endParaRPr lang="en-US" sz="1600" dirty="0"/>
+          </a:p>
+        </p:txBody>
+      </p:sp>
+      <p:sp>
+        <p:nvSpPr>
+          <p:cNvPr id="19" name="Native_text_15"/>
+          <p:cNvSpPr/>
+          <p:nvPr/>
+        </p:nvSpPr>
+        <p:spPr>
+          <a:xfrm>
+            <a:off x="3456432" y="4251960"/>
+            <a:ext cx="5047488" cy="329184"/>
+          </a:xfrm>
+          <a:prstGeom prst="rect">
+            <a:avLst/>
+          </a:prstGeom>
+          <a:noFill/>
+          <a:ln/>
+        </p:spPr>
+        <p:txBody>
+          <a:bodyPr wrap="square" lIns="0" tIns="0" rIns="0" bIns="0" rtlCol="0" anchor="ctr">
+            <a:normAutofit/>
+          </a:bodyPr>
+          <a:lstStyle/>
+          <a:p>
+            <a:pPr algn="ctr" indent="0" marL="0">
+              <a:buNone/>
+            </a:pPr>
+            <a:r>
+              <a:rPr lang="en-US" sz="1300" dirty="0">
+                <a:solidFill>
+                  <a:srgbClr val="536570"/>
+                </a:solidFill>
+                <a:latin typeface="Microsoft YaHei" pitchFamily="34" charset="0"/>
+                <a:ea typeface="Microsoft YaHei" pitchFamily="34" charset="-122"/>
+                <a:cs typeface="Microsoft YaHei" pitchFamily="34" charset="-120"/>
+              </a:rPr>
+              <a:t>下一轮仿真是否支持预测？</a:t>
+            </a:r>
+            <a:endParaRPr lang="en-US" sz="1300" dirty="0"/>
+          </a:p>
+        </p:txBody>
+      </p:sp>
+      <p:sp>
+        <p:nvSpPr>
+          <p:cNvPr id="20" name="Native_line_16"/>
+          <p:cNvSpPr/>
+          <p:nvPr/>
+        </p:nvSpPr>
+        <p:spPr>
+          <a:xfrm>
+            <a:off x="7383780" y="3337560"/>
+            <a:ext cx="0" cy="310896"/>
+          </a:xfrm>
+          <a:prstGeom prst="line">
+            <a:avLst/>
+          </a:prstGeom>
+          <a:noFill/>
+          <a:ln w="19050">
+            <a:solidFill>
+              <a:srgbClr val="167B78"/>
+            </a:solidFill>
+            <a:prstDash val="solid"/>
+            <a:tailEnd type="triangle"/>
+          </a:ln>
+        </p:spPr>
+      </p:sp>
+      <p:sp>
+        <p:nvSpPr>
+          <p:cNvPr id="21" name="Native_line_17"/>
+          <p:cNvSpPr/>
+          <p:nvPr/>
+        </p:nvSpPr>
+        <p:spPr>
+          <a:xfrm>
+            <a:off x="1760220" y="4151376"/>
+            <a:ext cx="1467612" cy="0"/>
+          </a:xfrm>
+          <a:prstGeom prst="line">
+            <a:avLst/>
+          </a:prstGeom>
+          <a:noFill/>
+          <a:ln w="19050">
+            <a:solidFill>
+              <a:srgbClr val="167B78"/>
+            </a:solidFill>
+            <a:prstDash val="solid"/>
+          </a:ln>
+        </p:spPr>
+      </p:sp>
+      <p:sp>
+        <p:nvSpPr>
+          <p:cNvPr id="22" name="Native_line_18"/>
+          <p:cNvSpPr/>
+          <p:nvPr/>
+        </p:nvSpPr>
+        <p:spPr>
+          <a:xfrm>
+            <a:off x="1760220" y="3337560"/>
+            <a:ext cx="0" cy="813816"/>
+          </a:xfrm>
+          <a:prstGeom prst="line">
+            <a:avLst/>
+          </a:prstGeom>
+          <a:noFill/>
+          <a:ln w="19050">
+            <a:solidFill>
+              <a:srgbClr val="167B78"/>
+            </a:solidFill>
+            <a:prstDash val="solid"/>
+            <a:headEnd type="triangle"/>
+          </a:ln>
+        </p:spPr>
+      </p:sp>
+      <p:sp>
+        <p:nvSpPr>
+          <p:cNvPr id="23" name="Native_text_19"/>
+          <p:cNvSpPr/>
+          <p:nvPr/>
+        </p:nvSpPr>
+        <p:spPr>
+          <a:xfrm>
+            <a:off x="457200" y="4425696"/>
+            <a:ext cx="2606040" cy="292608"/>
+          </a:xfrm>
+          <a:prstGeom prst="rect">
+            <a:avLst/>
+          </a:prstGeom>
+          <a:noFill/>
+          <a:ln/>
+        </p:spPr>
+        <p:txBody>
+          <a:bodyPr wrap="square" lIns="0" tIns="0" rIns="0" bIns="0" rtlCol="0" anchor="ctr">
+            <a:normAutofit/>
+          </a:bodyPr>
+          <a:lstStyle/>
+          <a:p>
+            <a:pPr algn="ctr" indent="0" marL="0">
+              <a:buNone/>
+            </a:pPr>
+            <a:r>
+              <a:rPr lang="en-US" sz="1200" dirty="0">
+                <a:solidFill>
+                  <a:srgbClr val="536570"/>
+                </a:solidFill>
+                <a:latin typeface="Microsoft YaHei" pitchFamily="34" charset="0"/>
+                <a:ea typeface="Microsoft YaHei" pitchFamily="34" charset="-122"/>
+                <a:cs typeface="Microsoft YaHei" pitchFamily="34" charset="-120"/>
+              </a:rPr>
+              <a:t>新证据可修正原假设</a:t>
+            </a:r>
+            <a:endParaRPr lang="en-US" sz="1200" dirty="0"/>
+          </a:p>
+        </p:txBody>
+      </p:sp>
+      <p:sp>
+        <p:nvSpPr>
+          <p:cNvPr id="24" name="Editable_Source"/>
+          <p:cNvSpPr/>
+          <p:nvPr/>
+        </p:nvSpPr>
+        <p:spPr>
+          <a:xfrm>
+            <a:off x="457200" y="4882896"/>
+            <a:ext cx="7772400" cy="173736"/>
+          </a:xfrm>
+          <a:prstGeom prst="rect">
+            <a:avLst/>
+          </a:prstGeom>
+          <a:noFill/>
+          <a:ln/>
+        </p:spPr>
+        <p:txBody>
+          <a:bodyPr wrap="square" lIns="0" tIns="0" rIns="0" bIns="0" rtlCol="0" anchor="ctr">
+            <a:normAutofit/>
+          </a:bodyPr>
           <a:lstStyle/>
           <a:p>
             <a:pPr algn="l" indent="0" marL="0">
               <a:buNone/>
             </a:pPr>
             <a:r>
-              <a:rPr lang="en-US" sz="2600" b="1" dirty="0">
-                <a:solidFill>
-                  <a:srgbClr val="1B2838"/>
-                </a:solidFill>
-                <a:latin typeface="Trebuchet MS" pitchFamily="34" charset="0"/>
-                <a:ea typeface="Trebuchet MS" pitchFamily="34" charset="-122"/>
-                <a:cs typeface="Trebuchet MS" pitchFamily="34" charset="-120"/>
-              </a:rPr>
-              <a:t>研究切入点：仿真后的物理诊断与设计决策</a:t>
-            </a:r>
-            <a:endParaRPr lang="en-US" sz="2600" dirty="0"/>
-          </a:p>
-        </p:txBody>
-      </p:sp>
-      <p:sp>
-        <p:nvSpPr>
-          <p:cNvPr id="4" name="Text 2"/>
-          <p:cNvSpPr txBox="1"/>
-          <p:nvPr/>
-        </p:nvSpPr>
-        <p:spPr>
-          <a:xfrm>
-            <a:off x="457200" y="632460"/>
-            <a:ext cx="8229600" cy="292608"/>
-          </a:xfrm>
-          <a:prstGeom prst="rect">
-            <a:avLst/>
-          </a:prstGeom>
-          <a:noFill/>
-          <a:ln/>
-        </p:spPr>
-        <p:txBody>
-          <a:bodyPr wrap="square" lIns="0" tIns="0" rIns="0" bIns="0" rtlCol="0" anchor="t"/>
-          <a:lstStyle/>
-          <a:p>
-            <a:pPr algn="l" indent="0" marL="0">
-              <a:buNone/>
-            </a:pPr>
-            <a:r>
-              <a:rPr lang="en-US" sz="1300" dirty="0">
-                <a:solidFill>
-                  <a:srgbClr val="4B5563"/>
-                </a:solidFill>
-                <a:latin typeface="Calibri" pitchFamily="34" charset="0"/>
-                <a:ea typeface="Calibri" pitchFamily="34" charset="-122"/>
-                <a:cs typeface="Calibri" pitchFamily="34" charset="-120"/>
-              </a:rPr>
-              <a:t>拟研究方向：诊断形成可检验预测，动作由后续结果验证</a:t>
-            </a:r>
-            <a:endParaRPr lang="en-US" sz="1300" dirty="0"/>
-          </a:p>
-        </p:txBody>
-      </p:sp>
-      <p:pic>
-        <p:nvPicPr>
-          <p:cNvPr id="5" name="Image 0" descr="G:\PIC_Harness_Research\presentations\task-018-class-harness\assets\p04-research-focus.svg">    </p:cNvPr>
-          <p:cNvPicPr>
-            <a:picLocks noChangeAspect="1"/>
-          </p:cNvPicPr>
-          <p:nvPr/>
-        </p:nvPicPr>
-        <p:blipFill>
-          <a:blip r:embed="rId1">
-            <a:extLst>
-              <a:ext uri="{96DAC541-7B7A-43D3-8B79-37D633B846F1}">
-                <asvg:svgBlip xmlns:asvg="http://schemas.microsoft.com/office/drawing/2016/SVG/main" r:embed="rId2"/>
-              </a:ext>
-            </a:extLst>
-          </a:blip>
-          <a:stretch>
-            <a:fillRect/>
-          </a:stretch>
-        </p:blipFill>
-        <p:spPr>
-          <a:xfrm>
-            <a:off x="457200" y="1208532"/>
-            <a:ext cx="8229600" cy="3569208"/>
-          </a:xfrm>
-          <a:prstGeom prst="rect">
-            <a:avLst/>
-          </a:prstGeom>
-        </p:spPr>
-      </p:pic>
-      <p:sp>
-        <p:nvSpPr>
-          <p:cNvPr id="6" name="Text 3"/>
-          <p:cNvSpPr txBox="1"/>
-          <p:nvPr/>
-        </p:nvSpPr>
-        <p:spPr>
-          <a:xfrm>
-            <a:off x="457200" y="4777740"/>
-            <a:ext cx="8229600" cy="274320"/>
-          </a:xfrm>
-          <a:prstGeom prst="rect">
-            <a:avLst/>
-          </a:prstGeom>
-          <a:noFill/>
-          <a:ln/>
-        </p:spPr>
-        <p:txBody>
-          <a:bodyPr wrap="square" lIns="0" tIns="0" rIns="0" bIns="0" rtlCol="0" anchor="ctr"/>
-          <a:lstStyle/>
-          <a:p>
-            <a:pPr algn="l" indent="0" marL="0">
-              <a:buNone/>
-            </a:pPr>
-            <a:r>
-              <a:rPr lang="en-US" sz="1100" dirty="0">
-                <a:solidFill>
-                  <a:srgbClr val="4B5563"/>
-                </a:solidFill>
-                <a:latin typeface="Calibri" pitchFamily="34" charset="0"/>
-                <a:ea typeface="Calibri" pitchFamily="34" charset="-122"/>
-                <a:cs typeface="Calibri" pitchFamily="34" charset="-120"/>
-              </a:rPr>
-              <a:t>依据：候选方向材料 §2–4；拟研究问题，尚未验证｜2/8</a:t>
-            </a:r>
-            <a:endParaRPr lang="en-US" sz="1100" dirty="0"/>
+              <a:rPr lang="en-US" sz="820" dirty="0">
+                <a:solidFill>
+                  <a:srgbClr val="536570"/>
+                </a:solidFill>
+                <a:latin typeface="Microsoft YaHei" pitchFamily="34" charset="0"/>
+                <a:ea typeface="Microsoft YaHei" pitchFamily="34" charset="-122"/>
+                <a:cs typeface="Microsoft YaHei" pitchFamily="34" charset="-120"/>
+              </a:rPr>
+              <a:t>依据：候选方向材料 §2–4；拟研究问题，尚未验证</a:t>
+            </a:r>
+            <a:endParaRPr lang="en-US" sz="820" dirty="0"/>
+          </a:p>
+        </p:txBody>
+      </p:sp>
+      <p:sp>
+        <p:nvSpPr>
+          <p:cNvPr id="25" name="Editable_PageNumber"/>
+          <p:cNvSpPr/>
+          <p:nvPr/>
+        </p:nvSpPr>
+        <p:spPr>
+          <a:xfrm>
+            <a:off x="8339328" y="4882896"/>
+            <a:ext cx="347472" cy="173736"/>
+          </a:xfrm>
+          <a:prstGeom prst="rect">
+            <a:avLst/>
+          </a:prstGeom>
+          <a:noFill/>
+          <a:ln/>
+        </p:spPr>
+        <p:txBody>
+          <a:bodyPr wrap="square" lIns="0" tIns="0" rIns="0" bIns="0" rtlCol="0" anchor="ctr">
+            <a:normAutofit/>
+          </a:bodyPr>
+          <a:lstStyle/>
+          <a:p>
+            <a:pPr algn="r" indent="0" marL="0">
+              <a:buNone/>
+            </a:pPr>
+            <a:r>
+              <a:rPr lang="en-US" sz="900" dirty="0">
+                <a:solidFill>
+                  <a:srgbClr val="536570"/>
+                </a:solidFill>
+                <a:latin typeface="Microsoft YaHei" pitchFamily="34" charset="0"/>
+                <a:ea typeface="Microsoft YaHei" pitchFamily="34" charset="-122"/>
+                <a:cs typeface="Microsoft YaHei" pitchFamily="34" charset="-120"/>
+              </a:rPr>
+              <a:t>2/8</a:t>
+            </a:r>
+            <a:endParaRPr lang="en-US" sz="900" dirty="0"/>
           </a:p>
         </p:txBody>
       </p:sp>
@@ -1921,110 +3421,114 @@
       </p:grpSpPr>
       <p:sp>
         <p:nvSpPr>
-          <p:cNvPr id="2" name="Shape 0"/>
-          <p:cNvSpPr/>
-          <p:nvPr/>
-        </p:nvSpPr>
-        <p:spPr>
-          <a:xfrm>
-            <a:off x="457200" y="979932"/>
-            <a:ext cx="1143000" cy="45720"/>
+          <p:cNvPr id="2" name="Editable_Title"/>
+          <p:cNvSpPr/>
+          <p:nvPr/>
+        </p:nvSpPr>
+        <p:spPr>
+          <a:xfrm>
+            <a:off x="457200" y="137160"/>
+            <a:ext cx="8229600" cy="512064"/>
+          </a:xfrm>
+          <a:prstGeom prst="rect">
+            <a:avLst/>
+          </a:prstGeom>
+          <a:noFill/>
+          <a:ln/>
+        </p:spPr>
+        <p:txBody>
+          <a:bodyPr wrap="square" lIns="0" tIns="0" rIns="0" bIns="0" rtlCol="0" anchor="ctr">
+            <a:normAutofit/>
+          </a:bodyPr>
+          <a:lstStyle/>
+          <a:p>
+            <a:pPr algn="l" indent="0" marL="0">
+              <a:buNone/>
+            </a:pPr>
+            <a:r>
+              <a:rPr lang="en-US" sz="2400" b="1" dirty="0">
+                <a:solidFill>
+                  <a:srgbClr val="18364A"/>
+                </a:solidFill>
+                <a:latin typeface="Microsoft YaHei" pitchFamily="34" charset="0"/>
+                <a:ea typeface="Microsoft YaHei" pitchFamily="34" charset="-122"/>
+                <a:cs typeface="Microsoft YaHei" pitchFamily="34" charset="-120"/>
+              </a:rPr>
+              <a:t>PhIDO：自然语言到结构化设计与版图</a:t>
+            </a:r>
+            <a:endParaRPr lang="en-US" sz="2400" dirty="0"/>
+          </a:p>
+        </p:txBody>
+      </p:sp>
+      <p:sp>
+        <p:nvSpPr>
+          <p:cNvPr id="3" name="Editable_Subtitle"/>
+          <p:cNvSpPr/>
+          <p:nvPr/>
+        </p:nvSpPr>
+        <p:spPr>
+          <a:xfrm>
+            <a:off x="457200" y="749808"/>
+            <a:ext cx="8229600" cy="246888"/>
+          </a:xfrm>
+          <a:prstGeom prst="rect">
+            <a:avLst/>
+          </a:prstGeom>
+          <a:noFill/>
+          <a:ln/>
+        </p:spPr>
+        <p:txBody>
+          <a:bodyPr wrap="square" lIns="0" tIns="0" rIns="0" bIns="0" rtlCol="0" anchor="ctr">
+            <a:normAutofit/>
+          </a:bodyPr>
+          <a:lstStyle/>
+          <a:p>
+            <a:pPr algn="l" indent="0" marL="0">
+              <a:buNone/>
+            </a:pPr>
+            <a:r>
+              <a:rPr lang="en-US" sz="1150" dirty="0">
+                <a:solidFill>
+                  <a:srgbClr val="536570"/>
+                </a:solidFill>
+                <a:latin typeface="Microsoft YaHei" pitchFamily="34" charset="0"/>
+                <a:ea typeface="Microsoft YaHei" pitchFamily="34" charset="-122"/>
+                <a:cs typeface="Microsoft YaHei" pitchFamily="34" charset="-120"/>
+              </a:rPr>
+              <a:t>原文 Fig. 1｜Interpreter → Designer → Layout → Circuit Verification</a:t>
+            </a:r>
+            <a:endParaRPr lang="en-US" sz="1150" dirty="0"/>
+          </a:p>
+        </p:txBody>
+      </p:sp>
+      <p:sp>
+        <p:nvSpPr>
+          <p:cNvPr id="4" name="Header_Accent"/>
+          <p:cNvSpPr/>
+          <p:nvPr/>
+        </p:nvSpPr>
+        <p:spPr>
+          <a:xfrm>
+            <a:off x="457200" y="1042416"/>
+            <a:ext cx="1005840" cy="36576"/>
           </a:xfrm>
           <a:prstGeom prst="rect">
             <a:avLst/>
           </a:prstGeom>
           <a:solidFill>
-            <a:srgbClr val="0B2545"/>
+            <a:srgbClr val="18364A"/>
           </a:solidFill>
           <a:ln w="12700">
             <a:solidFill>
-              <a:srgbClr val="0B2545"/>
+              <a:srgbClr val="18364A"/>
             </a:solidFill>
             <a:prstDash val="solid"/>
           </a:ln>
         </p:spPr>
       </p:sp>
-      <p:sp>
-        <p:nvSpPr>
-          <p:cNvPr id="3" name="Text 1"/>
-          <p:cNvSpPr txBox="1"/>
-          <p:nvPr/>
-        </p:nvSpPr>
-        <p:spPr>
-          <a:xfrm>
-            <a:off x="457200" y="91440"/>
-            <a:ext cx="8229600" cy="495300"/>
-          </a:xfrm>
-          <a:prstGeom prst="rect">
-            <a:avLst/>
-          </a:prstGeom>
-          <a:noFill/>
-          <a:ln/>
-        </p:spPr>
-        <p:txBody>
-          <a:bodyPr wrap="square" lIns="0" tIns="0" rIns="0" bIns="0" rtlCol="0" anchor="t"/>
-          <a:lstStyle/>
-          <a:p>
-            <a:pPr algn="l" indent="0" marL="0">
-              <a:buNone/>
-            </a:pPr>
-            <a:r>
-              <a:rPr lang="en-US" sz="2600" b="1" dirty="0">
-                <a:solidFill>
-                  <a:srgbClr val="1B2838"/>
-                </a:solidFill>
-                <a:latin typeface="Trebuchet MS" pitchFamily="34" charset="0"/>
-                <a:ea typeface="Trebuchet MS" pitchFamily="34" charset="-122"/>
-                <a:cs typeface="Trebuchet MS" pitchFamily="34" charset="-120"/>
-              </a:rPr>
-              <a:t>PhIDO：自然语言到结构化设计与版图</a:t>
-            </a:r>
-            <a:endParaRPr lang="en-US" sz="2600" dirty="0"/>
-          </a:p>
-        </p:txBody>
-      </p:sp>
-      <p:sp>
-        <p:nvSpPr>
-          <p:cNvPr id="4" name="Text 2"/>
-          <p:cNvSpPr txBox="1"/>
-          <p:nvPr/>
-        </p:nvSpPr>
-        <p:spPr>
-          <a:xfrm>
-            <a:off x="457200" y="632460"/>
-            <a:ext cx="8229600" cy="292608"/>
-          </a:xfrm>
-          <a:prstGeom prst="rect">
-            <a:avLst/>
-          </a:prstGeom>
-          <a:noFill/>
-          <a:ln/>
-        </p:spPr>
-        <p:txBody>
-          <a:bodyPr wrap="square" lIns="0" tIns="0" rIns="0" bIns="0" rtlCol="0" anchor="t"/>
-          <a:lstStyle/>
-          <a:p>
-            <a:pPr algn="l" indent="0" marL="0">
-              <a:buNone/>
-            </a:pPr>
-            <a:r>
-              <a:rPr lang="en-US" sz="1300" dirty="0">
-                <a:solidFill>
-                  <a:srgbClr val="4B5563"/>
-                </a:solidFill>
-                <a:latin typeface="Calibri" pitchFamily="34" charset="0"/>
-                <a:ea typeface="Calibri" pitchFamily="34" charset="-122"/>
-                <a:cs typeface="Calibri" pitchFamily="34" charset="-120"/>
-              </a:rPr>
-              <a:t>原文 Fig. 1｜Interpreter → Designer → Layout → Circuit Verification</a:t>
-            </a:r>
-            <a:endParaRPr lang="en-US" sz="1300" dirty="0"/>
-          </a:p>
-        </p:txBody>
-      </p:sp>
       <p:pic>
         <p:nvPicPr>
-          <p:cNvPr id="5" name="Image 0" descr="G:\PIC_Harness_Research\presentations\task-018-class-harness\assets\project-phido-architecture.png">    </p:cNvPr>
+          <p:cNvPr id="5" name="PaperOriginal_PhIDO_Fig1" descr="G:\PIC_Harness_Research\presentations\task-010-group-meeting-rebuild\assets\phido-fig1.png">    </p:cNvPr>
           <p:cNvPicPr>
             <a:picLocks noChangeAspect="1"/>
           </p:cNvPicPr>
@@ -2038,8 +3542,8 @@
         </p:blipFill>
         <p:spPr>
           <a:xfrm>
-            <a:off x="457200" y="1347216"/>
-            <a:ext cx="8229600" cy="3291840"/>
+            <a:off x="457200" y="1617325"/>
+            <a:ext cx="5623560" cy="2818677"/>
           </a:xfrm>
           <a:prstGeom prst="rect">
             <a:avLst/>
@@ -2048,40 +3552,455 @@
       </p:pic>
       <p:sp>
         <p:nvSpPr>
-          <p:cNvPr id="6" name="Text 3"/>
-          <p:cNvSpPr txBox="1"/>
-          <p:nvPr/>
-        </p:nvSpPr>
-        <p:spPr>
-          <a:xfrm>
-            <a:off x="457200" y="4777740"/>
-            <a:ext cx="8229600" cy="274320"/>
-          </a:xfrm>
-          <a:prstGeom prst="rect">
-            <a:avLst/>
-          </a:prstGeom>
-          <a:noFill/>
-          <a:ln/>
-        </p:spPr>
-        <p:txBody>
-          <a:bodyPr wrap="square" lIns="0" tIns="0" rIns="0" bIns="0" rtlCol="0" anchor="ctr"/>
+          <p:cNvPr id="6" name="Native_rect_2"/>
+          <p:cNvSpPr/>
+          <p:nvPr/>
+        </p:nvSpPr>
+        <p:spPr>
+          <a:xfrm>
+            <a:off x="6355080" y="1243584"/>
+            <a:ext cx="2331720" cy="1042416"/>
+          </a:xfrm>
+          <a:prstGeom prst="rect">
+            <a:avLst/>
+          </a:prstGeom>
+          <a:solidFill>
+            <a:srgbClr val="E6F3EF"/>
+          </a:solidFill>
+          <a:ln w="8890">
+            <a:solidFill>
+              <a:srgbClr val="CBD9DF"/>
+            </a:solidFill>
+            <a:prstDash val="solid"/>
+          </a:ln>
+        </p:spPr>
+      </p:sp>
+      <p:sp>
+        <p:nvSpPr>
+          <p:cNvPr id="7" name="Native_text_3"/>
+          <p:cNvSpPr/>
+          <p:nvPr/>
+        </p:nvSpPr>
+        <p:spPr>
+          <a:xfrm>
+            <a:off x="6464808" y="1298448"/>
+            <a:ext cx="2112264" cy="292608"/>
+          </a:xfrm>
+          <a:prstGeom prst="rect">
+            <a:avLst/>
+          </a:prstGeom>
+          <a:noFill/>
+          <a:ln/>
+        </p:spPr>
+        <p:txBody>
+          <a:bodyPr wrap="square" lIns="0" tIns="0" rIns="0" bIns="0" rtlCol="0" anchor="ctr">
+            <a:normAutofit/>
+          </a:bodyPr>
           <a:lstStyle/>
           <a:p>
             <a:pPr algn="l" indent="0" marL="0">
               <a:buNone/>
             </a:pPr>
             <a:r>
-              <a:rPr lang="en-US" sz="1100" dirty="0">
-                <a:solidFill>
-                  <a:srgbClr val="4B5563"/>
-                </a:solidFill>
-                <a:latin typeface="Calibri" pitchFamily="34" charset="0"/>
-                <a:ea typeface="Calibri" pitchFamily="34" charset="-122"/>
-                <a:cs typeface="Calibri" pitchFamily="34" charset="-120"/>
-              </a:rPr>
-              <a:t>Sharma et al., 2025, Fig. 1 (PDF p.3), DOI: 10.1063/5.0300741｜3/8</a:t>
-            </a:r>
-            <a:endParaRPr lang="en-US" sz="1100" dirty="0"/>
+              <a:rPr lang="en-US" sz="1400" b="1" dirty="0">
+                <a:solidFill>
+                  <a:srgbClr val="18364A"/>
+                </a:solidFill>
+                <a:latin typeface="Microsoft YaHei" pitchFamily="34" charset="0"/>
+                <a:ea typeface="Microsoft YaHei" pitchFamily="34" charset="-122"/>
+                <a:cs typeface="Microsoft YaHei" pitchFamily="34" charset="-120"/>
+              </a:rPr>
+              <a:t>自然语言进入设计流程</a:t>
+            </a:r>
+            <a:endParaRPr lang="en-US" sz="1400" dirty="0"/>
+          </a:p>
+        </p:txBody>
+      </p:sp>
+      <p:sp>
+        <p:nvSpPr>
+          <p:cNvPr id="8" name="Native_text_4"/>
+          <p:cNvSpPr/>
+          <p:nvPr/>
+        </p:nvSpPr>
+        <p:spPr>
+          <a:xfrm>
+            <a:off x="6464808" y="1682496"/>
+            <a:ext cx="2112264" cy="548640"/>
+          </a:xfrm>
+          <a:prstGeom prst="rect">
+            <a:avLst/>
+          </a:prstGeom>
+          <a:noFill/>
+          <a:ln/>
+        </p:spPr>
+        <p:txBody>
+          <a:bodyPr wrap="square" lIns="0" tIns="0" rIns="0" bIns="0" rtlCol="0" anchor="ctr">
+            <a:normAutofit/>
+          </a:bodyPr>
+          <a:lstStyle/>
+          <a:p>
+            <a:pPr algn="l" indent="0" marL="0">
+              <a:buNone/>
+            </a:pPr>
+            <a:r>
+              <a:rPr lang="en-US" sz="1210" dirty="0">
+                <a:solidFill>
+                  <a:srgbClr val="536570"/>
+                </a:solidFill>
+                <a:latin typeface="Microsoft YaHei" pitchFamily="34" charset="0"/>
+                <a:ea typeface="Microsoft YaHei" pitchFamily="34" charset="-122"/>
+                <a:cs typeface="Microsoft YaHei" pitchFamily="34" charset="-120"/>
+              </a:rPr>
+              <a:t>解释需求 → 选器件</a:t>
+            </a:r>
+            <a:endParaRPr lang="en-US" sz="1210" dirty="0"/>
+          </a:p>
+          <a:p>
+            <a:pPr algn="l" indent="0" marL="0">
+              <a:buNone/>
+            </a:pPr>
+            <a:r>
+              <a:rPr lang="en-US" sz="1210" dirty="0">
+                <a:solidFill>
+                  <a:srgbClr val="536570"/>
+                </a:solidFill>
+                <a:latin typeface="Microsoft YaHei" pitchFamily="34" charset="0"/>
+                <a:ea typeface="Microsoft YaHei" pitchFamily="34" charset="-122"/>
+                <a:cs typeface="Microsoft YaHei" pitchFamily="34" charset="-120"/>
+              </a:rPr>
+              <a:t>结构化 DSL → 版图</a:t>
+            </a:r>
+            <a:endParaRPr lang="en-US" sz="1210" dirty="0"/>
+          </a:p>
+        </p:txBody>
+      </p:sp>
+      <p:sp>
+        <p:nvSpPr>
+          <p:cNvPr id="9" name="Native_rect_5"/>
+          <p:cNvSpPr/>
+          <p:nvPr/>
+        </p:nvSpPr>
+        <p:spPr>
+          <a:xfrm>
+            <a:off x="6355080" y="2377440"/>
+            <a:ext cx="2331720" cy="1225296"/>
+          </a:xfrm>
+          <a:prstGeom prst="rect">
+            <a:avLst/>
+          </a:prstGeom>
+          <a:solidFill>
+            <a:srgbClr val="EAF0F7"/>
+          </a:solidFill>
+          <a:ln w="8890">
+            <a:solidFill>
+              <a:srgbClr val="CBD9DF"/>
+            </a:solidFill>
+            <a:prstDash val="solid"/>
+          </a:ln>
+        </p:spPr>
+      </p:sp>
+      <p:sp>
+        <p:nvSpPr>
+          <p:cNvPr id="10" name="Native_text_6"/>
+          <p:cNvSpPr/>
+          <p:nvPr/>
+        </p:nvSpPr>
+        <p:spPr>
+          <a:xfrm>
+            <a:off x="6464808" y="2432304"/>
+            <a:ext cx="2112264" cy="292608"/>
+          </a:xfrm>
+          <a:prstGeom prst="rect">
+            <a:avLst/>
+          </a:prstGeom>
+          <a:noFill/>
+          <a:ln/>
+        </p:spPr>
+        <p:txBody>
+          <a:bodyPr wrap="square" lIns="0" tIns="0" rIns="0" bIns="0" rtlCol="0" anchor="ctr">
+            <a:normAutofit/>
+          </a:bodyPr>
+          <a:lstStyle/>
+          <a:p>
+            <a:pPr algn="l" indent="0" marL="0">
+              <a:buNone/>
+            </a:pPr>
+            <a:r>
+              <a:rPr lang="en-US" sz="1400" b="1" dirty="0">
+                <a:solidFill>
+                  <a:srgbClr val="18364A"/>
+                </a:solidFill>
+                <a:latin typeface="Microsoft YaHei" pitchFamily="34" charset="0"/>
+                <a:ea typeface="Microsoft YaHei" pitchFamily="34" charset="-122"/>
+                <a:cs typeface="Microsoft YaHei" pitchFamily="34" charset="-120"/>
+              </a:rPr>
+              <a:t>四段职责</a:t>
+            </a:r>
+            <a:endParaRPr lang="en-US" sz="1400" dirty="0"/>
+          </a:p>
+        </p:txBody>
+      </p:sp>
+      <p:sp>
+        <p:nvSpPr>
+          <p:cNvPr id="11" name="Native_text_7"/>
+          <p:cNvSpPr/>
+          <p:nvPr/>
+        </p:nvSpPr>
+        <p:spPr>
+          <a:xfrm>
+            <a:off x="6464808" y="2816352"/>
+            <a:ext cx="2112264" cy="548640"/>
+          </a:xfrm>
+          <a:prstGeom prst="rect">
+            <a:avLst/>
+          </a:prstGeom>
+          <a:noFill/>
+          <a:ln/>
+        </p:spPr>
+        <p:txBody>
+          <a:bodyPr wrap="square" lIns="0" tIns="0" rIns="0" bIns="0" rtlCol="0" anchor="ctr">
+            <a:normAutofit/>
+          </a:bodyPr>
+          <a:lstStyle/>
+          <a:p>
+            <a:pPr algn="l" indent="0" marL="0">
+              <a:buNone/>
+            </a:pPr>
+            <a:r>
+              <a:rPr lang="en-US" sz="1210" dirty="0">
+                <a:solidFill>
+                  <a:srgbClr val="536570"/>
+                </a:solidFill>
+                <a:latin typeface="Microsoft YaHei" pitchFamily="34" charset="0"/>
+                <a:ea typeface="Microsoft YaHei" pitchFamily="34" charset="-122"/>
+                <a:cs typeface="Microsoft YaHei" pitchFamily="34" charset="-120"/>
+              </a:rPr>
+              <a:t>前两段：LLM Agent</a:t>
+            </a:r>
+            <a:endParaRPr lang="en-US" sz="1210" dirty="0"/>
+          </a:p>
+          <a:p>
+            <a:pPr algn="l" indent="0" marL="0">
+              <a:buNone/>
+            </a:pPr>
+            <a:r>
+              <a:rPr lang="en-US" sz="1210" dirty="0">
+                <a:solidFill>
+                  <a:srgbClr val="536570"/>
+                </a:solidFill>
+                <a:latin typeface="Microsoft YaHei" pitchFamily="34" charset="0"/>
+                <a:ea typeface="Microsoft YaHei" pitchFamily="34" charset="-122"/>
+                <a:cs typeface="Microsoft YaHei" pitchFamily="34" charset="-120"/>
+              </a:rPr>
+              <a:t>后两段：CAD / 电路工具</a:t>
+            </a:r>
+            <a:endParaRPr lang="en-US" sz="1210" dirty="0"/>
+          </a:p>
+        </p:txBody>
+      </p:sp>
+      <p:sp>
+        <p:nvSpPr>
+          <p:cNvPr id="12" name="Native_rect_8"/>
+          <p:cNvSpPr/>
+          <p:nvPr/>
+        </p:nvSpPr>
+        <p:spPr>
+          <a:xfrm>
+            <a:off x="6355080" y="3694176"/>
+            <a:ext cx="2331720" cy="1042416"/>
+          </a:xfrm>
+          <a:prstGeom prst="rect">
+            <a:avLst/>
+          </a:prstGeom>
+          <a:solidFill>
+            <a:srgbClr val="FBEFE3"/>
+          </a:solidFill>
+          <a:ln w="8890">
+            <a:solidFill>
+              <a:srgbClr val="CBD9DF"/>
+            </a:solidFill>
+            <a:prstDash val="solid"/>
+          </a:ln>
+        </p:spPr>
+      </p:sp>
+      <p:sp>
+        <p:nvSpPr>
+          <p:cNvPr id="13" name="Native_text_9"/>
+          <p:cNvSpPr/>
+          <p:nvPr/>
+        </p:nvSpPr>
+        <p:spPr>
+          <a:xfrm>
+            <a:off x="6464808" y="3749040"/>
+            <a:ext cx="2112264" cy="292608"/>
+          </a:xfrm>
+          <a:prstGeom prst="rect">
+            <a:avLst/>
+          </a:prstGeom>
+          <a:noFill/>
+          <a:ln/>
+        </p:spPr>
+        <p:txBody>
+          <a:bodyPr wrap="square" lIns="0" tIns="0" rIns="0" bIns="0" rtlCol="0" anchor="ctr">
+            <a:normAutofit/>
+          </a:bodyPr>
+          <a:lstStyle/>
+          <a:p>
+            <a:pPr algn="l" indent="0" marL="0">
+              <a:buNone/>
+            </a:pPr>
+            <a:r>
+              <a:rPr lang="en-US" sz="1400" b="1" dirty="0">
+                <a:solidFill>
+                  <a:srgbClr val="18364A"/>
+                </a:solidFill>
+                <a:latin typeface="Microsoft YaHei" pitchFamily="34" charset="0"/>
+                <a:ea typeface="Microsoft YaHei" pitchFamily="34" charset="-122"/>
+                <a:cs typeface="Microsoft YaHei" pitchFamily="34" charset="-120"/>
+              </a:rPr>
+              <a:t>验证边界</a:t>
+            </a:r>
+            <a:endParaRPr lang="en-US" sz="1400" dirty="0"/>
+          </a:p>
+        </p:txBody>
+      </p:sp>
+      <p:sp>
+        <p:nvSpPr>
+          <p:cNvPr id="14" name="Native_text_10"/>
+          <p:cNvSpPr/>
+          <p:nvPr/>
+        </p:nvSpPr>
+        <p:spPr>
+          <a:xfrm>
+            <a:off x="6464808" y="4133088"/>
+            <a:ext cx="2112264" cy="548640"/>
+          </a:xfrm>
+          <a:prstGeom prst="rect">
+            <a:avLst/>
+          </a:prstGeom>
+          <a:noFill/>
+          <a:ln/>
+        </p:spPr>
+        <p:txBody>
+          <a:bodyPr wrap="square" lIns="0" tIns="0" rIns="0" bIns="0" rtlCol="0" anchor="ctr">
+            <a:normAutofit/>
+          </a:bodyPr>
+          <a:lstStyle/>
+          <a:p>
+            <a:pPr algn="l" indent="0" marL="0">
+              <a:buNone/>
+            </a:pPr>
+            <a:r>
+              <a:rPr lang="en-US" sz="1210" dirty="0">
+                <a:solidFill>
+                  <a:srgbClr val="536570"/>
+                </a:solidFill>
+                <a:latin typeface="Microsoft YaHei" pitchFamily="34" charset="0"/>
+                <a:ea typeface="Microsoft YaHei" pitchFamily="34" charset="-122"/>
+                <a:cs typeface="Microsoft YaHei" pitchFamily="34" charset="-120"/>
+              </a:rPr>
+              <a:t>主基准检验结构有效</a:t>
+            </a:r>
+            <a:endParaRPr lang="en-US" sz="1210" dirty="0"/>
+          </a:p>
+          <a:p>
+            <a:pPr algn="l" indent="0" marL="0">
+              <a:buNone/>
+            </a:pPr>
+            <a:r>
+              <a:rPr lang="en-US" sz="1210" dirty="0">
+                <a:solidFill>
+                  <a:srgbClr val="536570"/>
+                </a:solidFill>
+                <a:latin typeface="Microsoft YaHei" pitchFamily="34" charset="0"/>
+                <a:ea typeface="Microsoft YaHei" pitchFamily="34" charset="-122"/>
+                <a:cs typeface="Microsoft YaHei" pitchFamily="34" charset="-120"/>
+              </a:rPr>
+              <a:t>FDTD 非主发布分支</a:t>
+            </a:r>
+            <a:endParaRPr lang="en-US" sz="1210" dirty="0"/>
+          </a:p>
+        </p:txBody>
+      </p:sp>
+      <p:sp>
+        <p:nvSpPr>
+          <p:cNvPr id="15" name="Editable_Source"/>
+          <p:cNvSpPr/>
+          <p:nvPr/>
+        </p:nvSpPr>
+        <p:spPr>
+          <a:xfrm>
+            <a:off x="457200" y="4882896"/>
+            <a:ext cx="7772400" cy="173736"/>
+          </a:xfrm>
+          <a:prstGeom prst="rect">
+            <a:avLst/>
+          </a:prstGeom>
+          <a:noFill/>
+          <a:ln/>
+        </p:spPr>
+        <p:txBody>
+          <a:bodyPr wrap="square" lIns="0" tIns="0" rIns="0" bIns="0" rtlCol="0" anchor="ctr">
+            <a:normAutofit/>
+          </a:bodyPr>
+          <a:lstStyle/>
+          <a:p>
+            <a:pPr algn="l" indent="0" marL="0">
+              <a:buNone/>
+            </a:pPr>
+            <a:r>
+              <a:rPr lang="en-US" sz="820" dirty="0">
+                <a:solidFill>
+                  <a:srgbClr val="536570"/>
+                </a:solidFill>
+                <a:latin typeface="Microsoft YaHei" pitchFamily="34" charset="0"/>
+                <a:ea typeface="Microsoft YaHei" pitchFamily="34" charset="-122"/>
+                <a:cs typeface="Microsoft YaHei" pitchFamily="34" charset="-120"/>
+              </a:rPr>
+              <a:t>Sharma et al., 2025, Fig. 1 (PDF p.3), DOI: 10.1063/5.0300741</a:t>
+            </a:r>
+            <a:endParaRPr lang="en-US" sz="820" dirty="0"/>
+          </a:p>
+        </p:txBody>
+      </p:sp>
+      <p:sp>
+        <p:nvSpPr>
+          <p:cNvPr id="16" name="Editable_PageNumber"/>
+          <p:cNvSpPr/>
+          <p:nvPr/>
+        </p:nvSpPr>
+        <p:spPr>
+          <a:xfrm>
+            <a:off x="8339328" y="4882896"/>
+            <a:ext cx="347472" cy="173736"/>
+          </a:xfrm>
+          <a:prstGeom prst="rect">
+            <a:avLst/>
+          </a:prstGeom>
+          <a:noFill/>
+          <a:ln/>
+        </p:spPr>
+        <p:txBody>
+          <a:bodyPr wrap="square" lIns="0" tIns="0" rIns="0" bIns="0" rtlCol="0" anchor="ctr">
+            <a:normAutofit/>
+          </a:bodyPr>
+          <a:lstStyle/>
+          <a:p>
+            <a:pPr algn="r" indent="0" marL="0">
+              <a:buNone/>
+            </a:pPr>
+            <a:r>
+              <a:rPr lang="en-US" sz="900" dirty="0">
+                <a:solidFill>
+                  <a:srgbClr val="536570"/>
+                </a:solidFill>
+                <a:latin typeface="Microsoft YaHei" pitchFamily="34" charset="0"/>
+                <a:ea typeface="Microsoft YaHei" pitchFamily="34" charset="-122"/>
+                <a:cs typeface="Microsoft YaHei" pitchFamily="34" charset="-120"/>
+              </a:rPr>
+              <a:t>3/8</a:t>
+            </a:r>
+            <a:endParaRPr lang="en-US" sz="900" dirty="0"/>
           </a:p>
         </p:txBody>
       </p:sp>
@@ -2119,110 +4038,114 @@
       </p:grpSpPr>
       <p:sp>
         <p:nvSpPr>
-          <p:cNvPr id="2" name="Shape 0"/>
-          <p:cNvSpPr/>
-          <p:nvPr/>
-        </p:nvSpPr>
-        <p:spPr>
-          <a:xfrm>
-            <a:off x="457200" y="979932"/>
-            <a:ext cx="1143000" cy="45720"/>
+          <p:cNvPr id="2" name="Editable_Title"/>
+          <p:cNvSpPr/>
+          <p:nvPr/>
+        </p:nvSpPr>
+        <p:spPr>
+          <a:xfrm>
+            <a:off x="457200" y="137160"/>
+            <a:ext cx="8229600" cy="512064"/>
+          </a:xfrm>
+          <a:prstGeom prst="rect">
+            <a:avLst/>
+          </a:prstGeom>
+          <a:noFill/>
+          <a:ln/>
+        </p:spPr>
+        <p:txBody>
+          <a:bodyPr wrap="square" lIns="0" tIns="0" rIns="0" bIns="0" rtlCol="0" anchor="ctr">
+            <a:normAutofit/>
+          </a:bodyPr>
+          <a:lstStyle/>
+          <a:p>
+            <a:pPr algn="l" indent="0" marL="0">
+              <a:buNone/>
+            </a:pPr>
+            <a:r>
+              <a:rPr lang="en-US" sz="2400" b="1" dirty="0">
+                <a:solidFill>
+                  <a:srgbClr val="18364A"/>
+                </a:solidFill>
+                <a:latin typeface="Microsoft YaHei" pitchFamily="34" charset="0"/>
+                <a:ea typeface="Microsoft YaHei" pitchFamily="34" charset="-122"/>
+                <a:cs typeface="Microsoft YaHei" pitchFamily="34" charset="-120"/>
+              </a:rPr>
+              <a:t>PhIDO：102 个任务怎样评价“设计成功”？</a:t>
+            </a:r>
+            <a:endParaRPr lang="en-US" sz="2400" dirty="0"/>
+          </a:p>
+        </p:txBody>
+      </p:sp>
+      <p:sp>
+        <p:nvSpPr>
+          <p:cNvPr id="3" name="Editable_Subtitle"/>
+          <p:cNvSpPr/>
+          <p:nvPr/>
+        </p:nvSpPr>
+        <p:spPr>
+          <a:xfrm>
+            <a:off x="457200" y="749808"/>
+            <a:ext cx="8229600" cy="246888"/>
+          </a:xfrm>
+          <a:prstGeom prst="rect">
+            <a:avLst/>
+          </a:prstGeom>
+          <a:noFill/>
+          <a:ln/>
+        </p:spPr>
+        <p:txBody>
+          <a:bodyPr wrap="square" lIns="0" tIns="0" rIns="0" bIns="0" rtlCol="0" anchor="ctr">
+            <a:normAutofit/>
+          </a:bodyPr>
+          <a:lstStyle/>
+          <a:p>
+            <a:pPr algn="l" indent="0" marL="0">
+              <a:buNone/>
+            </a:pPr>
+            <a:r>
+              <a:rPr lang="en-US" sz="1150" dirty="0">
+                <a:solidFill>
+                  <a:srgbClr val="536570"/>
+                </a:solidFill>
+                <a:latin typeface="Microsoft YaHei" pitchFamily="34" charset="0"/>
+                <a:ea typeface="Microsoft YaHei" pitchFamily="34" charset="-122"/>
+                <a:cs typeface="Microsoft YaHei" pitchFamily="34" charset="-120"/>
+              </a:rPr>
+              <a:t>原文 Fig. 5 局部｜用复杂度与失败阶段理解 benchmark</a:t>
+            </a:r>
+            <a:endParaRPr lang="en-US" sz="1150" dirty="0"/>
+          </a:p>
+        </p:txBody>
+      </p:sp>
+      <p:sp>
+        <p:nvSpPr>
+          <p:cNvPr id="4" name="Header_Accent"/>
+          <p:cNvSpPr/>
+          <p:nvPr/>
+        </p:nvSpPr>
+        <p:spPr>
+          <a:xfrm>
+            <a:off x="457200" y="1042416"/>
+            <a:ext cx="1005840" cy="36576"/>
           </a:xfrm>
           <a:prstGeom prst="rect">
             <a:avLst/>
           </a:prstGeom>
           <a:solidFill>
-            <a:srgbClr val="0B2545"/>
+            <a:srgbClr val="18364A"/>
           </a:solidFill>
           <a:ln w="12700">
             <a:solidFill>
-              <a:srgbClr val="0B2545"/>
+              <a:srgbClr val="18364A"/>
             </a:solidFill>
             <a:prstDash val="solid"/>
           </a:ln>
         </p:spPr>
       </p:sp>
-      <p:sp>
-        <p:nvSpPr>
-          <p:cNvPr id="3" name="Text 1"/>
-          <p:cNvSpPr txBox="1"/>
-          <p:nvPr/>
-        </p:nvSpPr>
-        <p:spPr>
-          <a:xfrm>
-            <a:off x="457200" y="91440"/>
-            <a:ext cx="8229600" cy="495300"/>
-          </a:xfrm>
-          <a:prstGeom prst="rect">
-            <a:avLst/>
-          </a:prstGeom>
-          <a:noFill/>
-          <a:ln/>
-        </p:spPr>
-        <p:txBody>
-          <a:bodyPr wrap="square" lIns="0" tIns="0" rIns="0" bIns="0" rtlCol="0" anchor="t"/>
-          <a:lstStyle/>
-          <a:p>
-            <a:pPr algn="l" indent="0" marL="0">
-              <a:buNone/>
-            </a:pPr>
-            <a:r>
-              <a:rPr lang="en-US" sz="2600" b="1" dirty="0">
-                <a:solidFill>
-                  <a:srgbClr val="1B2838"/>
-                </a:solidFill>
-                <a:latin typeface="Trebuchet MS" pitchFamily="34" charset="0"/>
-                <a:ea typeface="Trebuchet MS" pitchFamily="34" charset="-122"/>
-                <a:cs typeface="Trebuchet MS" pitchFamily="34" charset="-120"/>
-              </a:rPr>
-              <a:t>PhIDO：102 个任务怎样评价“设计成功”？</a:t>
-            </a:r>
-            <a:endParaRPr lang="en-US" sz="2600" dirty="0"/>
-          </a:p>
-        </p:txBody>
-      </p:sp>
-      <p:sp>
-        <p:nvSpPr>
-          <p:cNvPr id="4" name="Text 2"/>
-          <p:cNvSpPr txBox="1"/>
-          <p:nvPr/>
-        </p:nvSpPr>
-        <p:spPr>
-          <a:xfrm>
-            <a:off x="457200" y="632460"/>
-            <a:ext cx="8229600" cy="292608"/>
-          </a:xfrm>
-          <a:prstGeom prst="rect">
-            <a:avLst/>
-          </a:prstGeom>
-          <a:noFill/>
-          <a:ln/>
-        </p:spPr>
-        <p:txBody>
-          <a:bodyPr wrap="square" lIns="0" tIns="0" rIns="0" bIns="0" rtlCol="0" anchor="t"/>
-          <a:lstStyle/>
-          <a:p>
-            <a:pPr algn="l" indent="0" marL="0">
-              <a:buNone/>
-            </a:pPr>
-            <a:r>
-              <a:rPr lang="en-US" sz="1300" dirty="0">
-                <a:solidFill>
-                  <a:srgbClr val="4B5563"/>
-                </a:solidFill>
-                <a:latin typeface="Calibri" pitchFamily="34" charset="0"/>
-                <a:ea typeface="Calibri" pitchFamily="34" charset="-122"/>
-                <a:cs typeface="Calibri" pitchFamily="34" charset="-120"/>
-              </a:rPr>
-              <a:t>原文 Fig. 5 局部｜用复杂度与失败阶段理解 benchmark</a:t>
-            </a:r>
-            <a:endParaRPr lang="en-US" sz="1300" dirty="0"/>
-          </a:p>
-        </p:txBody>
-      </p:sp>
       <p:pic>
         <p:nvPicPr>
-          <p:cNvPr id="5" name="Image 0" descr="G:\PIC_Harness_Research\presentations\task-018-class-harness\assets\project-phido-benchmark.png">    </p:cNvPr>
+          <p:cNvPr id="5" name="PaperOriginal_PhIDO_Fig5Panel" descr="G:\PIC_Harness_Research\presentations\task-018-class-harness\assets\papers\phido-fig5-panel.png">    </p:cNvPr>
           <p:cNvPicPr>
             <a:picLocks noChangeAspect="1"/>
           </p:cNvPicPr>
@@ -2236,50 +4159,530 @@
         </p:blipFill>
         <p:spPr>
           <a:xfrm>
-            <a:off x="457200" y="1347216"/>
-            <a:ext cx="8229600" cy="3291840"/>
+            <a:off x="1586829" y="1280160"/>
+            <a:ext cx="3364302" cy="2743200"/>
           </a:xfrm>
           <a:prstGeom prst="rect">
             <a:avLst/>
           </a:prstGeom>
         </p:spPr>
       </p:pic>
-      <p:sp>
-        <p:nvSpPr>
-          <p:cNvPr id="6" name="Text 3"/>
-          <p:cNvSpPr txBox="1"/>
-          <p:nvPr/>
-        </p:nvSpPr>
-        <p:spPr>
-          <a:xfrm>
-            <a:off x="457200" y="4777740"/>
-            <a:ext cx="8229600" cy="274320"/>
-          </a:xfrm>
-          <a:prstGeom prst="rect">
-            <a:avLst/>
-          </a:prstGeom>
-          <a:noFill/>
-          <a:ln/>
-        </p:spPr>
-        <p:txBody>
-          <a:bodyPr wrap="square" lIns="0" tIns="0" rIns="0" bIns="0" rtlCol="0" anchor="ctr"/>
+      <p:pic>
+        <p:nvPicPr>
+          <p:cNvPr id="6" name="PaperOriginal_PhIDO_Fig5Legend" descr="G:\PIC_Harness_Research\presentations\task-018-class-harness\assets\papers\phido-fig5-legend.png">    </p:cNvPr>
+          <p:cNvPicPr>
+            <a:picLocks noChangeAspect="1"/>
+          </p:cNvPicPr>
+          <p:nvPr/>
+        </p:nvPicPr>
+        <p:blipFill>
+          <a:blip r:embed="rId2"/>
+          <a:stretch>
+            <a:fillRect/>
+          </a:stretch>
+        </p:blipFill>
+        <p:spPr>
+          <a:xfrm>
+            <a:off x="1161288" y="4069080"/>
+            <a:ext cx="4261104" cy="438912"/>
+          </a:xfrm>
+          <a:prstGeom prst="rect">
+            <a:avLst/>
+          </a:prstGeom>
+        </p:spPr>
+      </p:pic>
+      <p:sp>
+        <p:nvSpPr>
+          <p:cNvPr id="7" name="Native_text_3"/>
+          <p:cNvSpPr/>
+          <p:nvPr/>
+        </p:nvSpPr>
+        <p:spPr>
+          <a:xfrm>
+            <a:off x="457200" y="4599432"/>
+            <a:ext cx="5623560" cy="173736"/>
+          </a:xfrm>
+          <a:prstGeom prst="rect">
+            <a:avLst/>
+          </a:prstGeom>
+          <a:noFill/>
+          <a:ln/>
+        </p:spPr>
+        <p:txBody>
+          <a:bodyPr wrap="square" lIns="0" tIns="0" rIns="0" bIns="0" rtlCol="0" anchor="ctr">
+            <a:normAutofit/>
+          </a:bodyPr>
+          <a:lstStyle/>
+          <a:p>
+            <a:pPr algn="ctr" indent="0" marL="0">
+              <a:buNone/>
+            </a:pPr>
+            <a:r>
+              <a:rPr lang="en-US" sz="880" dirty="0">
+                <a:solidFill>
+                  <a:srgbClr val="536570"/>
+                </a:solidFill>
+                <a:latin typeface="Microsoft YaHei" pitchFamily="34" charset="0"/>
+                <a:ea typeface="Microsoft YaHei" pitchFamily="34" charset="-122"/>
+                <a:cs typeface="Microsoft YaHei" pitchFamily="34" charset="-120"/>
+              </a:rPr>
+              <a:t>Fig. 5 局部：Gemini-2.5-pro/GPT-4o；保留原始颜色图例</a:t>
+            </a:r>
+            <a:endParaRPr lang="en-US" sz="880" dirty="0"/>
+          </a:p>
+        </p:txBody>
+      </p:sp>
+      <p:sp>
+        <p:nvSpPr>
+          <p:cNvPr id="8" name="Native_rect_4"/>
+          <p:cNvSpPr/>
+          <p:nvPr/>
+        </p:nvSpPr>
+        <p:spPr>
+          <a:xfrm>
+            <a:off x="6355080" y="1243584"/>
+            <a:ext cx="2331720" cy="1042416"/>
+          </a:xfrm>
+          <a:prstGeom prst="rect">
+            <a:avLst/>
+          </a:prstGeom>
+          <a:solidFill>
+            <a:srgbClr val="E6F3EF"/>
+          </a:solidFill>
+          <a:ln w="8890">
+            <a:solidFill>
+              <a:srgbClr val="CBD9DF"/>
+            </a:solidFill>
+            <a:prstDash val="solid"/>
+          </a:ln>
+        </p:spPr>
+      </p:sp>
+      <p:sp>
+        <p:nvSpPr>
+          <p:cNvPr id="9" name="Native_text_5"/>
+          <p:cNvSpPr/>
+          <p:nvPr/>
+        </p:nvSpPr>
+        <p:spPr>
+          <a:xfrm>
+            <a:off x="6464808" y="1298448"/>
+            <a:ext cx="2112264" cy="292608"/>
+          </a:xfrm>
+          <a:prstGeom prst="rect">
+            <a:avLst/>
+          </a:prstGeom>
+          <a:noFill/>
+          <a:ln/>
+        </p:spPr>
+        <p:txBody>
+          <a:bodyPr wrap="square" lIns="0" tIns="0" rIns="0" bIns="0" rtlCol="0" anchor="ctr">
+            <a:normAutofit/>
+          </a:bodyPr>
           <a:lstStyle/>
           <a:p>
             <a:pPr algn="l" indent="0" marL="0">
               <a:buNone/>
             </a:pPr>
             <a:r>
-              <a:rPr lang="en-US" sz="1100" dirty="0">
-                <a:solidFill>
-                  <a:srgbClr val="4B5563"/>
-                </a:solidFill>
-                <a:latin typeface="Calibri" pitchFamily="34" charset="0"/>
-                <a:ea typeface="Calibri" pitchFamily="34" charset="-122"/>
-                <a:cs typeface="Calibri" pitchFamily="34" charset="-120"/>
-              </a:rPr>
-              <a:t>Sharma et al., 2025, Fig. 5 / Table II (PDF p.8–9), DOI: 10.1063/5.0300741｜4/8</a:t>
-            </a:r>
-            <a:endParaRPr lang="en-US" sz="1100" dirty="0"/>
+              <a:rPr lang="en-US" sz="1400" b="1" dirty="0">
+                <a:solidFill>
+                  <a:srgbClr val="18364A"/>
+                </a:solidFill>
+                <a:latin typeface="Microsoft YaHei" pitchFamily="34" charset="0"/>
+                <a:ea typeface="Microsoft YaHei" pitchFamily="34" charset="-122"/>
+                <a:cs typeface="Microsoft YaHei" pitchFamily="34" charset="-120"/>
+              </a:rPr>
+              <a:t>102 个设计描述</a:t>
+            </a:r>
+            <a:endParaRPr lang="en-US" sz="1400" dirty="0"/>
+          </a:p>
+        </p:txBody>
+      </p:sp>
+      <p:sp>
+        <p:nvSpPr>
+          <p:cNvPr id="10" name="Native_text_6"/>
+          <p:cNvSpPr/>
+          <p:nvPr/>
+        </p:nvSpPr>
+        <p:spPr>
+          <a:xfrm>
+            <a:off x="6464808" y="1682496"/>
+            <a:ext cx="2112264" cy="548640"/>
+          </a:xfrm>
+          <a:prstGeom prst="rect">
+            <a:avLst/>
+          </a:prstGeom>
+          <a:noFill/>
+          <a:ln/>
+        </p:spPr>
+        <p:txBody>
+          <a:bodyPr wrap="square" lIns="0" tIns="0" rIns="0" bIns="0" rtlCol="0" anchor="ctr">
+            <a:normAutofit/>
+          </a:bodyPr>
+          <a:lstStyle/>
+          <a:p>
+            <a:pPr algn="l" indent="0" marL="0">
+              <a:buNone/>
+            </a:pPr>
+            <a:r>
+              <a:rPr lang="en-US" sz="1210" dirty="0">
+                <a:solidFill>
+                  <a:srgbClr val="536570"/>
+                </a:solidFill>
+                <a:latin typeface="Microsoft YaHei" pitchFamily="34" charset="0"/>
+                <a:ea typeface="Microsoft YaHei" pitchFamily="34" charset="-122"/>
+                <a:cs typeface="Microsoft YaHei" pitchFamily="34" charset="-120"/>
+              </a:rPr>
+              <a:t>Level 1/2/3/4</a:t>
+            </a:r>
+            <a:endParaRPr lang="en-US" sz="1210" dirty="0"/>
+          </a:p>
+          <a:p>
+            <a:pPr algn="l" indent="0" marL="0">
+              <a:buNone/>
+            </a:pPr>
+            <a:r>
+              <a:rPr lang="en-US" sz="1210" dirty="0">
+                <a:solidFill>
+                  <a:srgbClr val="536570"/>
+                </a:solidFill>
+                <a:latin typeface="Microsoft YaHei" pitchFamily="34" charset="0"/>
+                <a:ea typeface="Microsoft YaHei" pitchFamily="34" charset="-122"/>
+                <a:cs typeface="Microsoft YaHei" pitchFamily="34" charset="-120"/>
+              </a:rPr>
+              <a:t>任务数：23/10/60/9</a:t>
+            </a:r>
+            <a:endParaRPr lang="en-US" sz="1210" dirty="0"/>
+          </a:p>
+        </p:txBody>
+      </p:sp>
+      <p:sp>
+        <p:nvSpPr>
+          <p:cNvPr id="11" name="Native_rect_7"/>
+          <p:cNvSpPr/>
+          <p:nvPr/>
+        </p:nvSpPr>
+        <p:spPr>
+          <a:xfrm>
+            <a:off x="6355080" y="2377440"/>
+            <a:ext cx="2331720" cy="1225296"/>
+          </a:xfrm>
+          <a:prstGeom prst="rect">
+            <a:avLst/>
+          </a:prstGeom>
+          <a:solidFill>
+            <a:srgbClr val="EAF0F7"/>
+          </a:solidFill>
+          <a:ln w="8890">
+            <a:solidFill>
+              <a:srgbClr val="CBD9DF"/>
+            </a:solidFill>
+            <a:prstDash val="solid"/>
+          </a:ln>
+        </p:spPr>
+      </p:sp>
+      <p:sp>
+        <p:nvSpPr>
+          <p:cNvPr id="12" name="Native_text_8"/>
+          <p:cNvSpPr/>
+          <p:nvPr/>
+        </p:nvSpPr>
+        <p:spPr>
+          <a:xfrm>
+            <a:off x="6464808" y="2432304"/>
+            <a:ext cx="2112264" cy="292608"/>
+          </a:xfrm>
+          <a:prstGeom prst="rect">
+            <a:avLst/>
+          </a:prstGeom>
+          <a:noFill/>
+          <a:ln/>
+        </p:spPr>
+        <p:txBody>
+          <a:bodyPr wrap="square" lIns="0" tIns="0" rIns="0" bIns="0" rtlCol="0" anchor="ctr">
+            <a:normAutofit/>
+          </a:bodyPr>
+          <a:lstStyle/>
+          <a:p>
+            <a:pPr algn="l" indent="0" marL="0">
+              <a:buNone/>
+            </a:pPr>
+            <a:r>
+              <a:rPr lang="en-US" sz="1400" b="1" dirty="0">
+                <a:solidFill>
+                  <a:srgbClr val="18364A"/>
+                </a:solidFill>
+                <a:latin typeface="Microsoft YaHei" pitchFamily="34" charset="0"/>
+                <a:ea typeface="Microsoft YaHei" pitchFamily="34" charset="-122"/>
+                <a:cs typeface="Microsoft YaHei" pitchFamily="34" charset="-120"/>
+              </a:rPr>
+              <a:t>左柱 @1，右柱 @5</a:t>
+            </a:r>
+            <a:endParaRPr lang="en-US" sz="1400" dirty="0"/>
+          </a:p>
+        </p:txBody>
+      </p:sp>
+      <p:sp>
+        <p:nvSpPr>
+          <p:cNvPr id="13" name="Native_text_9"/>
+          <p:cNvSpPr/>
+          <p:nvPr/>
+        </p:nvSpPr>
+        <p:spPr>
+          <a:xfrm>
+            <a:off x="6464808" y="2816352"/>
+            <a:ext cx="2112264" cy="548640"/>
+          </a:xfrm>
+          <a:prstGeom prst="rect">
+            <a:avLst/>
+          </a:prstGeom>
+          <a:noFill/>
+          <a:ln/>
+        </p:spPr>
+        <p:txBody>
+          <a:bodyPr wrap="square" lIns="0" tIns="0" rIns="0" bIns="0" rtlCol="0" anchor="ctr">
+            <a:normAutofit/>
+          </a:bodyPr>
+          <a:lstStyle/>
+          <a:p>
+            <a:pPr algn="l" indent="0" marL="0">
+              <a:buNone/>
+            </a:pPr>
+            <a:r>
+              <a:rPr lang="en-US" sz="1210" dirty="0">
+                <a:solidFill>
+                  <a:srgbClr val="536570"/>
+                </a:solidFill>
+                <a:latin typeface="Microsoft YaHei" pitchFamily="34" charset="0"/>
+                <a:ea typeface="Microsoft YaHei" pitchFamily="34" charset="-122"/>
+                <a:cs typeface="Microsoft YaHei" pitchFamily="34" charset="-120"/>
+              </a:rPr>
+              <a:t>图中蓝色 S 为成功</a:t>
+            </a:r>
+            <a:endParaRPr lang="en-US" sz="1210" dirty="0"/>
+          </a:p>
+          <a:p>
+            <a:pPr algn="l" indent="0" marL="0">
+              <a:buNone/>
+            </a:pPr>
+            <a:r>
+              <a:rPr lang="en-US" sz="1210" dirty="0">
+                <a:solidFill>
+                  <a:srgbClr val="536570"/>
+                </a:solidFill>
+                <a:latin typeface="Microsoft YaHei" pitchFamily="34" charset="0"/>
+                <a:ea typeface="Microsoft YaHei" pitchFamily="34" charset="-122"/>
+                <a:cs typeface="Microsoft YaHei" pitchFamily="34" charset="-120"/>
+              </a:rPr>
+              <a:t>复杂任务的成功仍有限</a:t>
+            </a:r>
+            <a:endParaRPr lang="en-US" sz="1210" dirty="0"/>
+          </a:p>
+        </p:txBody>
+      </p:sp>
+      <p:sp>
+        <p:nvSpPr>
+          <p:cNvPr id="14" name="Native_rect_10"/>
+          <p:cNvSpPr/>
+          <p:nvPr/>
+        </p:nvSpPr>
+        <p:spPr>
+          <a:xfrm>
+            <a:off x="6355080" y="3694176"/>
+            <a:ext cx="2331720" cy="1042416"/>
+          </a:xfrm>
+          <a:prstGeom prst="rect">
+            <a:avLst/>
+          </a:prstGeom>
+          <a:solidFill>
+            <a:srgbClr val="FBEFE3"/>
+          </a:solidFill>
+          <a:ln w="8890">
+            <a:solidFill>
+              <a:srgbClr val="CBD9DF"/>
+            </a:solidFill>
+            <a:prstDash val="solid"/>
+          </a:ln>
+        </p:spPr>
+      </p:sp>
+      <p:sp>
+        <p:nvSpPr>
+          <p:cNvPr id="15" name="Native_text_11"/>
+          <p:cNvSpPr/>
+          <p:nvPr/>
+        </p:nvSpPr>
+        <p:spPr>
+          <a:xfrm>
+            <a:off x="6464808" y="3749040"/>
+            <a:ext cx="2112264" cy="292608"/>
+          </a:xfrm>
+          <a:prstGeom prst="rect">
+            <a:avLst/>
+          </a:prstGeom>
+          <a:noFill/>
+          <a:ln/>
+        </p:spPr>
+        <p:txBody>
+          <a:bodyPr wrap="square" lIns="0" tIns="0" rIns="0" bIns="0" rtlCol="0" anchor="ctr">
+            <a:normAutofit/>
+          </a:bodyPr>
+          <a:lstStyle/>
+          <a:p>
+            <a:pPr algn="l" indent="0" marL="0">
+              <a:buNone/>
+            </a:pPr>
+            <a:r>
+              <a:rPr lang="en-US" sz="1400" b="1" dirty="0">
+                <a:solidFill>
+                  <a:srgbClr val="18364A"/>
+                </a:solidFill>
+                <a:latin typeface="Microsoft YaHei" pitchFamily="34" charset="0"/>
+                <a:ea typeface="Microsoft YaHei" pitchFamily="34" charset="-122"/>
+                <a:cs typeface="Microsoft YaHei" pitchFamily="34" charset="-120"/>
+              </a:rPr>
+              <a:t>“成功”是什么？</a:t>
+            </a:r>
+            <a:endParaRPr lang="en-US" sz="1400" dirty="0"/>
+          </a:p>
+        </p:txBody>
+      </p:sp>
+      <p:sp>
+        <p:nvSpPr>
+          <p:cNvPr id="16" name="Native_text_12"/>
+          <p:cNvSpPr/>
+          <p:nvPr/>
+        </p:nvSpPr>
+        <p:spPr>
+          <a:xfrm>
+            <a:off x="6464808" y="4133088"/>
+            <a:ext cx="2112264" cy="548640"/>
+          </a:xfrm>
+          <a:prstGeom prst="rect">
+            <a:avLst/>
+          </a:prstGeom>
+          <a:noFill/>
+          <a:ln/>
+        </p:spPr>
+        <p:txBody>
+          <a:bodyPr wrap="square" lIns="0" tIns="0" rIns="0" bIns="0" rtlCol="0" anchor="ctr">
+            <a:normAutofit/>
+          </a:bodyPr>
+          <a:lstStyle/>
+          <a:p>
+            <a:pPr algn="l" indent="0" marL="0">
+              <a:buNone/>
+            </a:pPr>
+            <a:r>
+              <a:rPr lang="en-US" sz="1210" dirty="0">
+                <a:solidFill>
+                  <a:srgbClr val="536570"/>
+                </a:solidFill>
+                <a:latin typeface="Microsoft YaHei" pitchFamily="34" charset="0"/>
+                <a:ea typeface="Microsoft YaHei" pitchFamily="34" charset="-122"/>
+                <a:cs typeface="Microsoft YaHei" pitchFamily="34" charset="-120"/>
+              </a:rPr>
+              <a:t>有效 schematic 与 GDS</a:t>
+            </a:r>
+            <a:endParaRPr lang="en-US" sz="1210" dirty="0"/>
+          </a:p>
+          <a:p>
+            <a:pPr algn="l" indent="0" marL="0">
+              <a:buNone/>
+            </a:pPr>
+            <a:r>
+              <a:rPr lang="en-US" sz="1210" dirty="0">
+                <a:solidFill>
+                  <a:srgbClr val="536570"/>
+                </a:solidFill>
+                <a:latin typeface="Microsoft YaHei" pitchFamily="34" charset="0"/>
+                <a:ea typeface="Microsoft YaHei" pitchFamily="34" charset="-122"/>
+                <a:cs typeface="Microsoft YaHei" pitchFamily="34" charset="-120"/>
+              </a:rPr>
+              <a:t>不等同光学性能达标</a:t>
+            </a:r>
+            <a:endParaRPr lang="en-US" sz="1210" dirty="0"/>
+          </a:p>
+        </p:txBody>
+      </p:sp>
+      <p:sp>
+        <p:nvSpPr>
+          <p:cNvPr id="17" name="Editable_Source"/>
+          <p:cNvSpPr/>
+          <p:nvPr/>
+        </p:nvSpPr>
+        <p:spPr>
+          <a:xfrm>
+            <a:off x="457200" y="4882896"/>
+            <a:ext cx="7772400" cy="173736"/>
+          </a:xfrm>
+          <a:prstGeom prst="rect">
+            <a:avLst/>
+          </a:prstGeom>
+          <a:noFill/>
+          <a:ln/>
+        </p:spPr>
+        <p:txBody>
+          <a:bodyPr wrap="square" lIns="0" tIns="0" rIns="0" bIns="0" rtlCol="0" anchor="ctr">
+            <a:normAutofit/>
+          </a:bodyPr>
+          <a:lstStyle/>
+          <a:p>
+            <a:pPr algn="l" indent="0" marL="0">
+              <a:buNone/>
+            </a:pPr>
+            <a:r>
+              <a:rPr lang="en-US" sz="820" dirty="0">
+                <a:solidFill>
+                  <a:srgbClr val="536570"/>
+                </a:solidFill>
+                <a:latin typeface="Microsoft YaHei" pitchFamily="34" charset="0"/>
+                <a:ea typeface="Microsoft YaHei" pitchFamily="34" charset="-122"/>
+                <a:cs typeface="Microsoft YaHei" pitchFamily="34" charset="-120"/>
+              </a:rPr>
+              <a:t>Sharma et al., 2025, Fig. 5 / Table II (PDF p.8–9), DOI: 10.1063/5.0300741</a:t>
+            </a:r>
+            <a:endParaRPr lang="en-US" sz="820" dirty="0"/>
+          </a:p>
+        </p:txBody>
+      </p:sp>
+      <p:sp>
+        <p:nvSpPr>
+          <p:cNvPr id="18" name="Editable_PageNumber"/>
+          <p:cNvSpPr/>
+          <p:nvPr/>
+        </p:nvSpPr>
+        <p:spPr>
+          <a:xfrm>
+            <a:off x="8339328" y="4882896"/>
+            <a:ext cx="347472" cy="173736"/>
+          </a:xfrm>
+          <a:prstGeom prst="rect">
+            <a:avLst/>
+          </a:prstGeom>
+          <a:noFill/>
+          <a:ln/>
+        </p:spPr>
+        <p:txBody>
+          <a:bodyPr wrap="square" lIns="0" tIns="0" rIns="0" bIns="0" rtlCol="0" anchor="ctr">
+            <a:normAutofit/>
+          </a:bodyPr>
+          <a:lstStyle/>
+          <a:p>
+            <a:pPr algn="r" indent="0" marL="0">
+              <a:buNone/>
+            </a:pPr>
+            <a:r>
+              <a:rPr lang="en-US" sz="900" dirty="0">
+                <a:solidFill>
+                  <a:srgbClr val="536570"/>
+                </a:solidFill>
+                <a:latin typeface="Microsoft YaHei" pitchFamily="34" charset="0"/>
+                <a:ea typeface="Microsoft YaHei" pitchFamily="34" charset="-122"/>
+                <a:cs typeface="Microsoft YaHei" pitchFamily="34" charset="-120"/>
+              </a:rPr>
+              <a:t>4/8</a:t>
+            </a:r>
+            <a:endParaRPr lang="en-US" sz="900" dirty="0"/>
           </a:p>
         </p:txBody>
       </p:sp>
@@ -2317,110 +4720,114 @@
       </p:grpSpPr>
       <p:sp>
         <p:nvSpPr>
-          <p:cNvPr id="2" name="Shape 0"/>
-          <p:cNvSpPr/>
-          <p:nvPr/>
-        </p:nvSpPr>
-        <p:spPr>
-          <a:xfrm>
-            <a:off x="457200" y="979932"/>
-            <a:ext cx="1143000" cy="45720"/>
+          <p:cNvPr id="2" name="Editable_Title"/>
+          <p:cNvSpPr/>
+          <p:nvPr/>
+        </p:nvSpPr>
+        <p:spPr>
+          <a:xfrm>
+            <a:off x="457200" y="137160"/>
+            <a:ext cx="8229600" cy="512064"/>
+          </a:xfrm>
+          <a:prstGeom prst="rect">
+            <a:avLst/>
+          </a:prstGeom>
+          <a:noFill/>
+          <a:ln/>
+        </p:spPr>
+        <p:txBody>
+          <a:bodyPr wrap="square" lIns="0" tIns="0" rIns="0" bIns="0" rtlCol="0" anchor="ctr">
+            <a:normAutofit/>
+          </a:bodyPr>
+          <a:lstStyle/>
+          <a:p>
+            <a:pPr algn="l" indent="0" marL="0">
+              <a:buNone/>
+            </a:pPr>
+            <a:r>
+              <a:rPr lang="en-US" sz="2400" b="1" dirty="0">
+                <a:solidFill>
+                  <a:srgbClr val="18364A"/>
+                </a:solidFill>
+                <a:latin typeface="Microsoft YaHei" pitchFamily="34" charset="0"/>
+                <a:ea typeface="Microsoft YaHei" pitchFamily="34" charset="-122"/>
+                <a:cs typeface="Microsoft YaHei" pitchFamily="34" charset="-120"/>
+              </a:rPr>
+              <a:t>PICopilot：领域 RAG 与多 Agent 生成设计脚本</a:t>
+            </a:r>
+            <a:endParaRPr lang="en-US" sz="2400" dirty="0"/>
+          </a:p>
+        </p:txBody>
+      </p:sp>
+      <p:sp>
+        <p:nvSpPr>
+          <p:cNvPr id="3" name="Editable_Subtitle"/>
+          <p:cNvSpPr/>
+          <p:nvPr/>
+        </p:nvSpPr>
+        <p:spPr>
+          <a:xfrm>
+            <a:off x="457200" y="749808"/>
+            <a:ext cx="8229600" cy="246888"/>
+          </a:xfrm>
+          <a:prstGeom prst="rect">
+            <a:avLst/>
+          </a:prstGeom>
+          <a:noFill/>
+          <a:ln/>
+        </p:spPr>
+        <p:txBody>
+          <a:bodyPr wrap="square" lIns="0" tIns="0" rIns="0" bIns="0" rtlCol="0" anchor="ctr">
+            <a:normAutofit/>
+          </a:bodyPr>
+          <a:lstStyle/>
+          <a:p>
+            <a:pPr algn="l" indent="0" marL="0">
+              <a:buNone/>
+            </a:pPr>
+            <a:r>
+              <a:rPr lang="en-US" sz="1150" dirty="0">
+                <a:solidFill>
+                  <a:srgbClr val="536570"/>
+                </a:solidFill>
+                <a:latin typeface="Microsoft YaHei" pitchFamily="34" charset="0"/>
+                <a:ea typeface="Microsoft YaHei" pitchFamily="34" charset="-122"/>
+                <a:cs typeface="Microsoft YaHei" pitchFamily="34" charset="-120"/>
+              </a:rPr>
+              <a:t>原文 Fig. 2｜脚本生成反馈与 benchmark 执行评分分开理解</a:t>
+            </a:r>
+            <a:endParaRPr lang="en-US" sz="1150" dirty="0"/>
+          </a:p>
+        </p:txBody>
+      </p:sp>
+      <p:sp>
+        <p:nvSpPr>
+          <p:cNvPr id="4" name="Header_Accent"/>
+          <p:cNvSpPr/>
+          <p:nvPr/>
+        </p:nvSpPr>
+        <p:spPr>
+          <a:xfrm>
+            <a:off x="457200" y="1042416"/>
+            <a:ext cx="1005840" cy="36576"/>
           </a:xfrm>
           <a:prstGeom prst="rect">
             <a:avLst/>
           </a:prstGeom>
           <a:solidFill>
-            <a:srgbClr val="0B2545"/>
+            <a:srgbClr val="18364A"/>
           </a:solidFill>
           <a:ln w="12700">
             <a:solidFill>
-              <a:srgbClr val="0B2545"/>
+              <a:srgbClr val="18364A"/>
             </a:solidFill>
             <a:prstDash val="solid"/>
           </a:ln>
         </p:spPr>
       </p:sp>
-      <p:sp>
-        <p:nvSpPr>
-          <p:cNvPr id="3" name="Text 1"/>
-          <p:cNvSpPr txBox="1"/>
-          <p:nvPr/>
-        </p:nvSpPr>
-        <p:spPr>
-          <a:xfrm>
-            <a:off x="457200" y="91440"/>
-            <a:ext cx="8229600" cy="495300"/>
-          </a:xfrm>
-          <a:prstGeom prst="rect">
-            <a:avLst/>
-          </a:prstGeom>
-          <a:noFill/>
-          <a:ln/>
-        </p:spPr>
-        <p:txBody>
-          <a:bodyPr wrap="square" lIns="0" tIns="0" rIns="0" bIns="0" rtlCol="0" anchor="t"/>
-          <a:lstStyle/>
-          <a:p>
-            <a:pPr algn="l" indent="0" marL="0">
-              <a:buNone/>
-            </a:pPr>
-            <a:r>
-              <a:rPr lang="en-US" sz="2600" b="1" dirty="0">
-                <a:solidFill>
-                  <a:srgbClr val="1B2838"/>
-                </a:solidFill>
-                <a:latin typeface="Trebuchet MS" pitchFamily="34" charset="0"/>
-                <a:ea typeface="Trebuchet MS" pitchFamily="34" charset="-122"/>
-                <a:cs typeface="Trebuchet MS" pitchFamily="34" charset="-120"/>
-              </a:rPr>
-              <a:t>PICopilot：领域 RAG 与多 Agent 生成设计脚本</a:t>
-            </a:r>
-            <a:endParaRPr lang="en-US" sz="2600" dirty="0"/>
-          </a:p>
-        </p:txBody>
-      </p:sp>
-      <p:sp>
-        <p:nvSpPr>
-          <p:cNvPr id="4" name="Text 2"/>
-          <p:cNvSpPr txBox="1"/>
-          <p:nvPr/>
-        </p:nvSpPr>
-        <p:spPr>
-          <a:xfrm>
-            <a:off x="457200" y="632460"/>
-            <a:ext cx="8229600" cy="292608"/>
-          </a:xfrm>
-          <a:prstGeom prst="rect">
-            <a:avLst/>
-          </a:prstGeom>
-          <a:noFill/>
-          <a:ln/>
-        </p:spPr>
-        <p:txBody>
-          <a:bodyPr wrap="square" lIns="0" tIns="0" rIns="0" bIns="0" rtlCol="0" anchor="t"/>
-          <a:lstStyle/>
-          <a:p>
-            <a:pPr algn="l" indent="0" marL="0">
-              <a:buNone/>
-            </a:pPr>
-            <a:r>
-              <a:rPr lang="en-US" sz="1300" dirty="0">
-                <a:solidFill>
-                  <a:srgbClr val="4B5563"/>
-                </a:solidFill>
-                <a:latin typeface="Calibri" pitchFamily="34" charset="0"/>
-                <a:ea typeface="Calibri" pitchFamily="34" charset="-122"/>
-                <a:cs typeface="Calibri" pitchFamily="34" charset="-120"/>
-              </a:rPr>
-              <a:t>原文 Fig. 2｜脚本生成反馈与 benchmark 执行评分分开理解</a:t>
-            </a:r>
-            <a:endParaRPr lang="en-US" sz="1300" dirty="0"/>
-          </a:p>
-        </p:txBody>
-      </p:sp>
       <p:pic>
         <p:nvPicPr>
-          <p:cNvPr id="5" name="Image 0" descr="G:\PIC_Harness_Research\presentations\task-018-class-harness\assets\project-picopilot.png">    </p:cNvPr>
+          <p:cNvPr id="5" name="PaperOriginal_PICopilot_Fig2" descr="G:\PIC_Harness_Research\presentations\task-010-group-meeting-rebuild\assets\picopilot-fig2.png">    </p:cNvPr>
           <p:cNvPicPr>
             <a:picLocks noChangeAspect="1"/>
           </p:cNvPicPr>
@@ -2434,8 +4841,8 @@
         </p:blipFill>
         <p:spPr>
           <a:xfrm>
-            <a:off x="457200" y="1347216"/>
-            <a:ext cx="8229600" cy="3291840"/>
+            <a:off x="457200" y="1688822"/>
+            <a:ext cx="5623560" cy="2675685"/>
           </a:xfrm>
           <a:prstGeom prst="rect">
             <a:avLst/>
@@ -2444,40 +4851,472 @@
       </p:pic>
       <p:sp>
         <p:nvSpPr>
-          <p:cNvPr id="6" name="Text 3"/>
-          <p:cNvSpPr txBox="1"/>
-          <p:nvPr/>
-        </p:nvSpPr>
-        <p:spPr>
-          <a:xfrm>
-            <a:off x="457200" y="4777740"/>
-            <a:ext cx="8229600" cy="274320"/>
-          </a:xfrm>
-          <a:prstGeom prst="rect">
-            <a:avLst/>
-          </a:prstGeom>
-          <a:noFill/>
-          <a:ln/>
-        </p:spPr>
-        <p:txBody>
-          <a:bodyPr wrap="square" lIns="0" tIns="0" rIns="0" bIns="0" rtlCol="0" anchor="ctr"/>
+          <p:cNvPr id="6" name="Native_rect_2"/>
+          <p:cNvSpPr/>
+          <p:nvPr/>
+        </p:nvSpPr>
+        <p:spPr>
+          <a:xfrm>
+            <a:off x="6355080" y="1243584"/>
+            <a:ext cx="2331720" cy="1042416"/>
+          </a:xfrm>
+          <a:prstGeom prst="rect">
+            <a:avLst/>
+          </a:prstGeom>
+          <a:solidFill>
+            <a:srgbClr val="E6F3EF"/>
+          </a:solidFill>
+          <a:ln w="8890">
+            <a:solidFill>
+              <a:srgbClr val="CBD9DF"/>
+            </a:solidFill>
+            <a:prstDash val="solid"/>
+          </a:ln>
+        </p:spPr>
+      </p:sp>
+      <p:sp>
+        <p:nvSpPr>
+          <p:cNvPr id="7" name="Native_text_3"/>
+          <p:cNvSpPr/>
+          <p:nvPr/>
+        </p:nvSpPr>
+        <p:spPr>
+          <a:xfrm>
+            <a:off x="6464808" y="1298448"/>
+            <a:ext cx="2112264" cy="292608"/>
+          </a:xfrm>
+          <a:prstGeom prst="rect">
+            <a:avLst/>
+          </a:prstGeom>
+          <a:noFill/>
+          <a:ln/>
+        </p:spPr>
+        <p:txBody>
+          <a:bodyPr wrap="square" lIns="0" tIns="0" rIns="0" bIns="0" rtlCol="0" anchor="ctr">
+            <a:normAutofit/>
+          </a:bodyPr>
           <a:lstStyle/>
           <a:p>
             <a:pPr algn="l" indent="0" marL="0">
               <a:buNone/>
             </a:pPr>
             <a:r>
-              <a:rPr lang="en-US" sz="1100" dirty="0">
-                <a:solidFill>
-                  <a:srgbClr val="4B5563"/>
-                </a:solidFill>
-                <a:latin typeface="Calibri" pitchFamily="34" charset="0"/>
-                <a:ea typeface="Calibri" pitchFamily="34" charset="-122"/>
-                <a:cs typeface="Calibri" pitchFamily="34" charset="-120"/>
-              </a:rPr>
-              <a:t>Jiang et al., 2026, Fig. 2 / §3.6 / Table 3, DOI: 10.48550/arXiv.2608.01791｜5/8</a:t>
-            </a:r>
-            <a:endParaRPr lang="en-US" sz="1100" dirty="0"/>
+              <a:rPr lang="en-US" sz="1400" b="1" dirty="0">
+                <a:solidFill>
+                  <a:srgbClr val="18364A"/>
+                </a:solidFill>
+                <a:latin typeface="Microsoft YaHei" pitchFamily="34" charset="0"/>
+                <a:ea typeface="Microsoft YaHei" pitchFamily="34" charset="-122"/>
+                <a:cs typeface="Microsoft YaHei" pitchFamily="34" charset="-120"/>
+              </a:rPr>
+              <a:t>任务 → 脚本</a:t>
+            </a:r>
+            <a:endParaRPr lang="en-US" sz="1400" dirty="0"/>
+          </a:p>
+        </p:txBody>
+      </p:sp>
+      <p:sp>
+        <p:nvSpPr>
+          <p:cNvPr id="8" name="Native_text_4"/>
+          <p:cNvSpPr/>
+          <p:nvPr/>
+        </p:nvSpPr>
+        <p:spPr>
+          <a:xfrm>
+            <a:off x="6464808" y="1682496"/>
+            <a:ext cx="2112264" cy="548640"/>
+          </a:xfrm>
+          <a:prstGeom prst="rect">
+            <a:avLst/>
+          </a:prstGeom>
+          <a:noFill/>
+          <a:ln/>
+        </p:spPr>
+        <p:txBody>
+          <a:bodyPr wrap="square" lIns="0" tIns="0" rIns="0" bIns="0" rtlCol="0" anchor="ctr">
+            <a:normAutofit/>
+          </a:bodyPr>
+          <a:lstStyle/>
+          <a:p>
+            <a:pPr algn="l" indent="0" marL="0">
+              <a:buNone/>
+            </a:pPr>
+            <a:r>
+              <a:rPr lang="en-US" sz="1210" dirty="0">
+                <a:solidFill>
+                  <a:srgbClr val="536570"/>
+                </a:solidFill>
+                <a:latin typeface="Microsoft YaHei" pitchFamily="34" charset="0"/>
+                <a:ea typeface="Microsoft YaHei" pitchFamily="34" charset="-122"/>
+                <a:cs typeface="Microsoft YaHei" pitchFamily="34" charset="-120"/>
+              </a:rPr>
+              <a:t>规划 → 检索增强生成</a:t>
+            </a:r>
+            <a:endParaRPr lang="en-US" sz="1210" dirty="0"/>
+          </a:p>
+          <a:p>
+            <a:pPr algn="l" indent="0" marL="0">
+              <a:buNone/>
+            </a:pPr>
+            <a:r>
+              <a:rPr lang="en-US" sz="1210" dirty="0">
+                <a:solidFill>
+                  <a:srgbClr val="536570"/>
+                </a:solidFill>
+                <a:latin typeface="Microsoft YaHei" pitchFamily="34" charset="0"/>
+                <a:ea typeface="Microsoft YaHei" pitchFamily="34" charset="-122"/>
+                <a:cs typeface="Microsoft YaHei" pitchFamily="34" charset="-120"/>
+              </a:rPr>
+              <a:t>合成脚本 → 静态评价</a:t>
+            </a:r>
+            <a:endParaRPr lang="en-US" sz="1210" dirty="0"/>
+          </a:p>
+        </p:txBody>
+      </p:sp>
+      <p:sp>
+        <p:nvSpPr>
+          <p:cNvPr id="9" name="Native_rect_5"/>
+          <p:cNvSpPr/>
+          <p:nvPr/>
+        </p:nvSpPr>
+        <p:spPr>
+          <a:xfrm>
+            <a:off x="6355080" y="2377440"/>
+            <a:ext cx="2331720" cy="1225296"/>
+          </a:xfrm>
+          <a:prstGeom prst="rect">
+            <a:avLst/>
+          </a:prstGeom>
+          <a:solidFill>
+            <a:srgbClr val="EAF0F7"/>
+          </a:solidFill>
+          <a:ln w="8890">
+            <a:solidFill>
+              <a:srgbClr val="CBD9DF"/>
+            </a:solidFill>
+            <a:prstDash val="solid"/>
+          </a:ln>
+        </p:spPr>
+      </p:sp>
+      <p:sp>
+        <p:nvSpPr>
+          <p:cNvPr id="10" name="Native_text_6"/>
+          <p:cNvSpPr/>
+          <p:nvPr/>
+        </p:nvSpPr>
+        <p:spPr>
+          <a:xfrm>
+            <a:off x="6464808" y="2432304"/>
+            <a:ext cx="2112264" cy="292608"/>
+          </a:xfrm>
+          <a:prstGeom prst="rect">
+            <a:avLst/>
+          </a:prstGeom>
+          <a:noFill/>
+          <a:ln/>
+        </p:spPr>
+        <p:txBody>
+          <a:bodyPr wrap="square" lIns="0" tIns="0" rIns="0" bIns="0" rtlCol="0" anchor="ctr">
+            <a:normAutofit/>
+          </a:bodyPr>
+          <a:lstStyle/>
+          <a:p>
+            <a:pPr algn="l" indent="0" marL="0">
+              <a:buNone/>
+            </a:pPr>
+            <a:r>
+              <a:rPr lang="en-US" sz="1400" b="1" dirty="0">
+                <a:solidFill>
+                  <a:srgbClr val="18364A"/>
+                </a:solidFill>
+                <a:latin typeface="Microsoft YaHei" pitchFamily="34" charset="0"/>
+                <a:ea typeface="Microsoft YaHei" pitchFamily="34" charset="-122"/>
+                <a:cs typeface="Microsoft YaHei" pitchFamily="34" charset="-120"/>
+              </a:rPr>
+              <a:t>48 项脚本任务（作者）</a:t>
+            </a:r>
+            <a:endParaRPr lang="en-US" sz="1400" dirty="0"/>
+          </a:p>
+        </p:txBody>
+      </p:sp>
+      <p:sp>
+        <p:nvSpPr>
+          <p:cNvPr id="11" name="Native_text_7"/>
+          <p:cNvSpPr/>
+          <p:nvPr/>
+        </p:nvSpPr>
+        <p:spPr>
+          <a:xfrm>
+            <a:off x="6464808" y="2816352"/>
+            <a:ext cx="2112264" cy="713232"/>
+          </a:xfrm>
+          <a:prstGeom prst="rect">
+            <a:avLst/>
+          </a:prstGeom>
+          <a:noFill/>
+          <a:ln/>
+        </p:spPr>
+        <p:txBody>
+          <a:bodyPr wrap="square" lIns="0" tIns="0" rIns="0" bIns="0" rtlCol="0" anchor="ctr">
+            <a:normAutofit/>
+          </a:bodyPr>
+          <a:lstStyle/>
+          <a:p>
+            <a:pPr algn="l" indent="0" marL="0">
+              <a:buNone/>
+            </a:pPr>
+            <a:r>
+              <a:rPr lang="en-US" sz="1210" dirty="0">
+                <a:solidFill>
+                  <a:srgbClr val="536570"/>
+                </a:solidFill>
+                <a:latin typeface="Microsoft YaHei" pitchFamily="34" charset="0"/>
+                <a:ea typeface="Microsoft YaHei" pitchFamily="34" charset="-122"/>
+                <a:cs typeface="Microsoft YaHei" pitchFamily="34" charset="-120"/>
+              </a:rPr>
+              <a:t>Basic 12 / Medium 12</a:t>
+            </a:r>
+            <a:endParaRPr lang="en-US" sz="1210" dirty="0"/>
+          </a:p>
+          <a:p>
+            <a:pPr algn="l" indent="0" marL="0">
+              <a:buNone/>
+            </a:pPr>
+            <a:r>
+              <a:rPr lang="en-US" sz="1210" dirty="0">
+                <a:solidFill>
+                  <a:srgbClr val="536570"/>
+                </a:solidFill>
+                <a:latin typeface="Microsoft YaHei" pitchFamily="34" charset="0"/>
+                <a:ea typeface="Microsoft YaHei" pitchFamily="34" charset="-122"/>
+                <a:cs typeface="Microsoft YaHei" pitchFamily="34" charset="-120"/>
+              </a:rPr>
+              <a:t>Advanced 24；15 次/任务</a:t>
+            </a:r>
+            <a:endParaRPr lang="en-US" sz="1210" dirty="0"/>
+          </a:p>
+          <a:p>
+            <a:pPr algn="l" indent="0" marL="0">
+              <a:buNone/>
+            </a:pPr>
+            <a:r>
+              <a:rPr lang="en-US" sz="1210" dirty="0">
+                <a:solidFill>
+                  <a:srgbClr val="536570"/>
+                </a:solidFill>
+                <a:latin typeface="Microsoft YaHei" pitchFamily="34" charset="0"/>
+                <a:ea typeface="Microsoft YaHei" pitchFamily="34" charset="-122"/>
+                <a:cs typeface="Microsoft YaHei" pitchFamily="34" charset="-120"/>
+              </a:rPr>
+              <a:t>Solved：48/48（≥3/15）</a:t>
+            </a:r>
+            <a:endParaRPr lang="en-US" sz="1210" dirty="0"/>
+          </a:p>
+        </p:txBody>
+      </p:sp>
+      <p:sp>
+        <p:nvSpPr>
+          <p:cNvPr id="12" name="Native_rect_8"/>
+          <p:cNvSpPr/>
+          <p:nvPr/>
+        </p:nvSpPr>
+        <p:spPr>
+          <a:xfrm>
+            <a:off x="6355080" y="3694176"/>
+            <a:ext cx="2331720" cy="1042416"/>
+          </a:xfrm>
+          <a:prstGeom prst="rect">
+            <a:avLst/>
+          </a:prstGeom>
+          <a:solidFill>
+            <a:srgbClr val="FBEFE3"/>
+          </a:solidFill>
+          <a:ln w="8890">
+            <a:solidFill>
+              <a:srgbClr val="CBD9DF"/>
+            </a:solidFill>
+            <a:prstDash val="solid"/>
+          </a:ln>
+        </p:spPr>
+      </p:sp>
+      <p:sp>
+        <p:nvSpPr>
+          <p:cNvPr id="13" name="Native_text_9"/>
+          <p:cNvSpPr/>
+          <p:nvPr/>
+        </p:nvSpPr>
+        <p:spPr>
+          <a:xfrm>
+            <a:off x="6464808" y="3749040"/>
+            <a:ext cx="2112264" cy="292608"/>
+          </a:xfrm>
+          <a:prstGeom prst="rect">
+            <a:avLst/>
+          </a:prstGeom>
+          <a:noFill/>
+          <a:ln/>
+        </p:spPr>
+        <p:txBody>
+          <a:bodyPr wrap="square" lIns="0" tIns="0" rIns="0" bIns="0" rtlCol="0" anchor="ctr">
+            <a:normAutofit/>
+          </a:bodyPr>
+          <a:lstStyle/>
+          <a:p>
+            <a:pPr algn="l" indent="0" marL="0">
+              <a:buNone/>
+            </a:pPr>
+            <a:r>
+              <a:rPr lang="en-US" sz="1400" b="1" dirty="0">
+                <a:solidFill>
+                  <a:srgbClr val="18364A"/>
+                </a:solidFill>
+                <a:latin typeface="Microsoft YaHei" pitchFamily="34" charset="0"/>
+                <a:ea typeface="Microsoft YaHei" pitchFamily="34" charset="-122"/>
+                <a:cs typeface="Microsoft YaHei" pitchFamily="34" charset="-120"/>
+              </a:rPr>
+              <a:t>内部与外部评价不同</a:t>
+            </a:r>
+            <a:endParaRPr lang="en-US" sz="1400" dirty="0"/>
+          </a:p>
+        </p:txBody>
+      </p:sp>
+      <p:sp>
+        <p:nvSpPr>
+          <p:cNvPr id="14" name="Native_text_10"/>
+          <p:cNvSpPr/>
+          <p:nvPr/>
+        </p:nvSpPr>
+        <p:spPr>
+          <a:xfrm>
+            <a:off x="6464808" y="4133088"/>
+            <a:ext cx="2112264" cy="548640"/>
+          </a:xfrm>
+          <a:prstGeom prst="rect">
+            <a:avLst/>
+          </a:prstGeom>
+          <a:noFill/>
+          <a:ln/>
+        </p:spPr>
+        <p:txBody>
+          <a:bodyPr wrap="square" lIns="0" tIns="0" rIns="0" bIns="0" rtlCol="0" anchor="ctr">
+            <a:normAutofit/>
+          </a:bodyPr>
+          <a:lstStyle/>
+          <a:p>
+            <a:pPr algn="l" indent="0" marL="0">
+              <a:buNone/>
+            </a:pPr>
+            <a:r>
+              <a:rPr lang="en-US" sz="1210" dirty="0">
+                <a:solidFill>
+                  <a:srgbClr val="536570"/>
+                </a:solidFill>
+                <a:latin typeface="Microsoft YaHei" pitchFamily="34" charset="0"/>
+                <a:ea typeface="Microsoft YaHei" pitchFamily="34" charset="-122"/>
+                <a:cs typeface="Microsoft YaHei" pitchFamily="34" charset="-120"/>
+              </a:rPr>
+              <a:t>内部：静态检查 + LLM</a:t>
+            </a:r>
+            <a:endParaRPr lang="en-US" sz="1210" dirty="0"/>
+          </a:p>
+          <a:p>
+            <a:pPr algn="l" indent="0" marL="0">
+              <a:buNone/>
+            </a:pPr>
+            <a:r>
+              <a:rPr lang="en-US" sz="1210" dirty="0">
+                <a:solidFill>
+                  <a:srgbClr val="536570"/>
+                </a:solidFill>
+                <a:latin typeface="Microsoft YaHei" pitchFamily="34" charset="0"/>
+                <a:ea typeface="Microsoft YaHei" pitchFamily="34" charset="-122"/>
+                <a:cs typeface="Microsoft YaHei" pitchFamily="34" charset="-120"/>
+              </a:rPr>
+              <a:t>外部：运行脚本并评分</a:t>
+            </a:r>
+            <a:endParaRPr lang="en-US" sz="1210" dirty="0"/>
+          </a:p>
+        </p:txBody>
+      </p:sp>
+      <p:sp>
+        <p:nvSpPr>
+          <p:cNvPr id="15" name="Editable_Source"/>
+          <p:cNvSpPr/>
+          <p:nvPr/>
+        </p:nvSpPr>
+        <p:spPr>
+          <a:xfrm>
+            <a:off x="457200" y="4882896"/>
+            <a:ext cx="7772400" cy="173736"/>
+          </a:xfrm>
+          <a:prstGeom prst="rect">
+            <a:avLst/>
+          </a:prstGeom>
+          <a:noFill/>
+          <a:ln/>
+        </p:spPr>
+        <p:txBody>
+          <a:bodyPr wrap="square" lIns="0" tIns="0" rIns="0" bIns="0" rtlCol="0" anchor="ctr">
+            <a:normAutofit/>
+          </a:bodyPr>
+          <a:lstStyle/>
+          <a:p>
+            <a:pPr algn="l" indent="0" marL="0">
+              <a:buNone/>
+            </a:pPr>
+            <a:r>
+              <a:rPr lang="en-US" sz="820" dirty="0">
+                <a:solidFill>
+                  <a:srgbClr val="536570"/>
+                </a:solidFill>
+                <a:latin typeface="Microsoft YaHei" pitchFamily="34" charset="0"/>
+                <a:ea typeface="Microsoft YaHei" pitchFamily="34" charset="-122"/>
+                <a:cs typeface="Microsoft YaHei" pitchFamily="34" charset="-120"/>
+              </a:rPr>
+              <a:t>Jiang et al., 2026, Fig. 2 / §3.6 / Table 3, DOI: 10.48550/arXiv.2608.01791</a:t>
+            </a:r>
+            <a:endParaRPr lang="en-US" sz="820" dirty="0"/>
+          </a:p>
+        </p:txBody>
+      </p:sp>
+      <p:sp>
+        <p:nvSpPr>
+          <p:cNvPr id="16" name="Editable_PageNumber"/>
+          <p:cNvSpPr/>
+          <p:nvPr/>
+        </p:nvSpPr>
+        <p:spPr>
+          <a:xfrm>
+            <a:off x="8339328" y="4882896"/>
+            <a:ext cx="347472" cy="173736"/>
+          </a:xfrm>
+          <a:prstGeom prst="rect">
+            <a:avLst/>
+          </a:prstGeom>
+          <a:noFill/>
+          <a:ln/>
+        </p:spPr>
+        <p:txBody>
+          <a:bodyPr wrap="square" lIns="0" tIns="0" rIns="0" bIns="0" rtlCol="0" anchor="ctr">
+            <a:normAutofit/>
+          </a:bodyPr>
+          <a:lstStyle/>
+          <a:p>
+            <a:pPr algn="r" indent="0" marL="0">
+              <a:buNone/>
+            </a:pPr>
+            <a:r>
+              <a:rPr lang="en-US" sz="900" dirty="0">
+                <a:solidFill>
+                  <a:srgbClr val="536570"/>
+                </a:solidFill>
+                <a:latin typeface="Microsoft YaHei" pitchFamily="34" charset="0"/>
+                <a:ea typeface="Microsoft YaHei" pitchFamily="34" charset="-122"/>
+                <a:cs typeface="Microsoft YaHei" pitchFamily="34" charset="-120"/>
+              </a:rPr>
+              <a:t>5/8</a:t>
+            </a:r>
+            <a:endParaRPr lang="en-US" sz="900" dirty="0"/>
           </a:p>
         </p:txBody>
       </p:sp>
@@ -2515,110 +5354,114 @@
       </p:grpSpPr>
       <p:sp>
         <p:nvSpPr>
-          <p:cNvPr id="2" name="Shape 0"/>
-          <p:cNvSpPr/>
-          <p:nvPr/>
-        </p:nvSpPr>
-        <p:spPr>
-          <a:xfrm>
-            <a:off x="457200" y="979932"/>
-            <a:ext cx="1143000" cy="45720"/>
+          <p:cNvPr id="2" name="Editable_Title"/>
+          <p:cNvSpPr/>
+          <p:nvPr/>
+        </p:nvSpPr>
+        <p:spPr>
+          <a:xfrm>
+            <a:off x="457200" y="137160"/>
+            <a:ext cx="8229600" cy="512064"/>
+          </a:xfrm>
+          <a:prstGeom prst="rect">
+            <a:avLst/>
+          </a:prstGeom>
+          <a:noFill/>
+          <a:ln/>
+        </p:spPr>
+        <p:txBody>
+          <a:bodyPr wrap="square" lIns="0" tIns="0" rIns="0" bIns="0" rtlCol="0" anchor="ctr">
+            <a:normAutofit/>
+          </a:bodyPr>
+          <a:lstStyle/>
+          <a:p>
+            <a:pPr algn="l" indent="0" marL="0">
+              <a:buNone/>
+            </a:pPr>
+            <a:r>
+              <a:rPr lang="en-US" sz="2400" b="1" dirty="0">
+                <a:solidFill>
+                  <a:srgbClr val="18364A"/>
+                </a:solidFill>
+                <a:latin typeface="Microsoft YaHei" pitchFamily="34" charset="0"/>
+                <a:ea typeface="Microsoft YaHei" pitchFamily="34" charset="-122"/>
+                <a:cs typeface="Microsoft YaHei" pitchFamily="34" charset="-120"/>
+              </a:rPr>
+              <a:t>Kharel：规则与数值仿真驱动的设计闭环</a:t>
+            </a:r>
+            <a:endParaRPr lang="en-US" sz="2400" dirty="0"/>
+          </a:p>
+        </p:txBody>
+      </p:sp>
+      <p:sp>
+        <p:nvSpPr>
+          <p:cNvPr id="3" name="Editable_Subtitle"/>
+          <p:cNvSpPr/>
+          <p:nvPr/>
+        </p:nvSpPr>
+        <p:spPr>
+          <a:xfrm>
+            <a:off x="457200" y="749808"/>
+            <a:ext cx="8229600" cy="246888"/>
+          </a:xfrm>
+          <a:prstGeom prst="rect">
+            <a:avLst/>
+          </a:prstGeom>
+          <a:noFill/>
+          <a:ln/>
+        </p:spPr>
+        <p:txBody>
+          <a:bodyPr wrap="square" lIns="0" tIns="0" rIns="0" bIns="0" rtlCol="0" anchor="ctr">
+            <a:normAutofit/>
+          </a:bodyPr>
+          <a:lstStyle/>
+          <a:p>
+            <a:pPr algn="l" indent="0" marL="0">
+              <a:buNone/>
+            </a:pPr>
+            <a:r>
+              <a:rPr lang="en-US" sz="1150" dirty="0">
+                <a:solidFill>
+                  <a:srgbClr val="536570"/>
+                </a:solidFill>
+                <a:latin typeface="Microsoft YaHei" pitchFamily="34" charset="0"/>
+                <a:ea typeface="Microsoft YaHei" pitchFamily="34" charset="-122"/>
+                <a:cs typeface="Microsoft YaHei" pitchFamily="34" charset="-120"/>
+              </a:rPr>
+              <a:t>原文 Fig. 1(b)｜目标、显式规则、求解器与验收条件共同作用</a:t>
+            </a:r>
+            <a:endParaRPr lang="en-US" sz="1150" dirty="0"/>
+          </a:p>
+        </p:txBody>
+      </p:sp>
+      <p:sp>
+        <p:nvSpPr>
+          <p:cNvPr id="4" name="Header_Accent"/>
+          <p:cNvSpPr/>
+          <p:nvPr/>
+        </p:nvSpPr>
+        <p:spPr>
+          <a:xfrm>
+            <a:off x="457200" y="1042416"/>
+            <a:ext cx="1005840" cy="36576"/>
           </a:xfrm>
           <a:prstGeom prst="rect">
             <a:avLst/>
           </a:prstGeom>
           <a:solidFill>
-            <a:srgbClr val="0B2545"/>
+            <a:srgbClr val="18364A"/>
           </a:solidFill>
           <a:ln w="12700">
             <a:solidFill>
-              <a:srgbClr val="0B2545"/>
+              <a:srgbClr val="18364A"/>
             </a:solidFill>
             <a:prstDash val="solid"/>
           </a:ln>
         </p:spPr>
       </p:sp>
-      <p:sp>
-        <p:nvSpPr>
-          <p:cNvPr id="3" name="Text 1"/>
-          <p:cNvSpPr txBox="1"/>
-          <p:nvPr/>
-        </p:nvSpPr>
-        <p:spPr>
-          <a:xfrm>
-            <a:off x="457200" y="91440"/>
-            <a:ext cx="8229600" cy="495300"/>
-          </a:xfrm>
-          <a:prstGeom prst="rect">
-            <a:avLst/>
-          </a:prstGeom>
-          <a:noFill/>
-          <a:ln/>
-        </p:spPr>
-        <p:txBody>
-          <a:bodyPr wrap="square" lIns="0" tIns="0" rIns="0" bIns="0" rtlCol="0" anchor="t"/>
-          <a:lstStyle/>
-          <a:p>
-            <a:pPr algn="l" indent="0" marL="0">
-              <a:buNone/>
-            </a:pPr>
-            <a:r>
-              <a:rPr lang="en-US" sz="2600" b="1" dirty="0">
-                <a:solidFill>
-                  <a:srgbClr val="1B2838"/>
-                </a:solidFill>
-                <a:latin typeface="Trebuchet MS" pitchFamily="34" charset="0"/>
-                <a:ea typeface="Trebuchet MS" pitchFamily="34" charset="-122"/>
-                <a:cs typeface="Trebuchet MS" pitchFamily="34" charset="-120"/>
-              </a:rPr>
-              <a:t>Kharel：规则与数值仿真驱动的设计闭环</a:t>
-            </a:r>
-            <a:endParaRPr lang="en-US" sz="2600" dirty="0"/>
-          </a:p>
-        </p:txBody>
-      </p:sp>
-      <p:sp>
-        <p:nvSpPr>
-          <p:cNvPr id="4" name="Text 2"/>
-          <p:cNvSpPr txBox="1"/>
-          <p:nvPr/>
-        </p:nvSpPr>
-        <p:spPr>
-          <a:xfrm>
-            <a:off x="457200" y="632460"/>
-            <a:ext cx="8229600" cy="292608"/>
-          </a:xfrm>
-          <a:prstGeom prst="rect">
-            <a:avLst/>
-          </a:prstGeom>
-          <a:noFill/>
-          <a:ln/>
-        </p:spPr>
-        <p:txBody>
-          <a:bodyPr wrap="square" lIns="0" tIns="0" rIns="0" bIns="0" rtlCol="0" anchor="t"/>
-          <a:lstStyle/>
-          <a:p>
-            <a:pPr algn="l" indent="0" marL="0">
-              <a:buNone/>
-            </a:pPr>
-            <a:r>
-              <a:rPr lang="en-US" sz="1300" dirty="0">
-                <a:solidFill>
-                  <a:srgbClr val="4B5563"/>
-                </a:solidFill>
-                <a:latin typeface="Calibri" pitchFamily="34" charset="0"/>
-                <a:ea typeface="Calibri" pitchFamily="34" charset="-122"/>
-                <a:cs typeface="Calibri" pitchFamily="34" charset="-120"/>
-              </a:rPr>
-              <a:t>原文 Fig. 1(b)｜目标、显式规则、求解器与验收条件共同作用</a:t>
-            </a:r>
-            <a:endParaRPr lang="en-US" sz="1300" dirty="0"/>
-          </a:p>
-        </p:txBody>
-      </p:sp>
       <p:pic>
         <p:nvPicPr>
-          <p:cNvPr id="5" name="Image 0" descr="G:\PIC_Harness_Research\presentations\task-018-class-harness\assets\project-kharel-loop.png">    </p:cNvPr>
+          <p:cNvPr id="5" name="PaperOriginal_Kharel_Fig1b" descr="G:\PIC_Harness_Research\presentations\task-018-class-harness\assets\papers\kharel-fig1b.png">    </p:cNvPr>
           <p:cNvPicPr>
             <a:picLocks noChangeAspect="1"/>
           </p:cNvPicPr>
@@ -2632,8 +5475,8 @@
         </p:blipFill>
         <p:spPr>
           <a:xfrm>
-            <a:off x="457200" y="1347216"/>
-            <a:ext cx="8229600" cy="3291840"/>
+            <a:off x="457200" y="1561054"/>
+            <a:ext cx="5440680" cy="2931219"/>
           </a:xfrm>
           <a:prstGeom prst="rect">
             <a:avLst/>
@@ -2642,40 +5485,455 @@
       </p:pic>
       <p:sp>
         <p:nvSpPr>
-          <p:cNvPr id="6" name="Text 3"/>
-          <p:cNvSpPr txBox="1"/>
-          <p:nvPr/>
-        </p:nvSpPr>
-        <p:spPr>
-          <a:xfrm>
-            <a:off x="457200" y="4777740"/>
-            <a:ext cx="8229600" cy="274320"/>
-          </a:xfrm>
-          <a:prstGeom prst="rect">
-            <a:avLst/>
-          </a:prstGeom>
-          <a:noFill/>
-          <a:ln/>
-        </p:spPr>
-        <p:txBody>
-          <a:bodyPr wrap="square" lIns="0" tIns="0" rIns="0" bIns="0" rtlCol="0" anchor="ctr"/>
+          <p:cNvPr id="6" name="Native_rect_2"/>
+          <p:cNvSpPr/>
+          <p:nvPr/>
+        </p:nvSpPr>
+        <p:spPr>
+          <a:xfrm>
+            <a:off x="6355080" y="1243584"/>
+            <a:ext cx="2331720" cy="1042416"/>
+          </a:xfrm>
+          <a:prstGeom prst="rect">
+            <a:avLst/>
+          </a:prstGeom>
+          <a:solidFill>
+            <a:srgbClr val="E6F3EF"/>
+          </a:solidFill>
+          <a:ln w="8890">
+            <a:solidFill>
+              <a:srgbClr val="CBD9DF"/>
+            </a:solidFill>
+            <a:prstDash val="solid"/>
+          </a:ln>
+        </p:spPr>
+      </p:sp>
+      <p:sp>
+        <p:nvSpPr>
+          <p:cNvPr id="7" name="Native_text_3"/>
+          <p:cNvSpPr/>
+          <p:nvPr/>
+        </p:nvSpPr>
+        <p:spPr>
+          <a:xfrm>
+            <a:off x="6464808" y="1298448"/>
+            <a:ext cx="2112264" cy="292608"/>
+          </a:xfrm>
+          <a:prstGeom prst="rect">
+            <a:avLst/>
+          </a:prstGeom>
+          <a:noFill/>
+          <a:ln/>
+        </p:spPr>
+        <p:txBody>
+          <a:bodyPr wrap="square" lIns="0" tIns="0" rIns="0" bIns="0" rtlCol="0" anchor="ctr">
+            <a:normAutofit/>
+          </a:bodyPr>
           <a:lstStyle/>
           <a:p>
             <a:pPr algn="l" indent="0" marL="0">
               <a:buNone/>
             </a:pPr>
             <a:r>
-              <a:rPr lang="en-US" sz="1100" dirty="0">
-                <a:solidFill>
-                  <a:srgbClr val="4B5563"/>
-                </a:solidFill>
-                <a:latin typeface="Calibri" pitchFamily="34" charset="0"/>
-                <a:ea typeface="Calibri" pitchFamily="34" charset="-122"/>
-                <a:cs typeface="Calibri" pitchFamily="34" charset="-120"/>
-              </a:rPr>
-              <a:t>Kharel et al., 2026, Fig. 1(b) / Table S2, DOI: 10.48550/arXiv.2606.00915｜6/8</a:t>
-            </a:r>
-            <a:endParaRPr lang="en-US" sz="1100" dirty="0"/>
+              <a:rPr lang="en-US" sz="1400" b="1" dirty="0">
+                <a:solidFill>
+                  <a:srgbClr val="18364A"/>
+                </a:solidFill>
+                <a:latin typeface="Microsoft YaHei" pitchFamily="34" charset="0"/>
+                <a:ea typeface="Microsoft YaHei" pitchFamily="34" charset="-122"/>
+                <a:cs typeface="Microsoft YaHei" pitchFamily="34" charset="-120"/>
+              </a:rPr>
+              <a:t>人类提供起点</a:t>
+            </a:r>
+            <a:endParaRPr lang="en-US" sz="1400" dirty="0"/>
+          </a:p>
+        </p:txBody>
+      </p:sp>
+      <p:sp>
+        <p:nvSpPr>
+          <p:cNvPr id="8" name="Native_text_4"/>
+          <p:cNvSpPr/>
+          <p:nvPr/>
+        </p:nvSpPr>
+        <p:spPr>
+          <a:xfrm>
+            <a:off x="6464808" y="1682496"/>
+            <a:ext cx="2112264" cy="548640"/>
+          </a:xfrm>
+          <a:prstGeom prst="rect">
+            <a:avLst/>
+          </a:prstGeom>
+          <a:noFill/>
+          <a:ln/>
+        </p:spPr>
+        <p:txBody>
+          <a:bodyPr wrap="square" lIns="0" tIns="0" rIns="0" bIns="0" rtlCol="0" anchor="ctr">
+            <a:normAutofit/>
+          </a:bodyPr>
+          <a:lstStyle/>
+          <a:p>
+            <a:pPr algn="l" indent="0" marL="0">
+              <a:buNone/>
+            </a:pPr>
+            <a:r>
+              <a:rPr lang="en-US" sz="1210" dirty="0">
+                <a:solidFill>
+                  <a:srgbClr val="536570"/>
+                </a:solidFill>
+                <a:latin typeface="Microsoft YaHei" pitchFamily="34" charset="0"/>
+                <a:ea typeface="Microsoft YaHei" pitchFamily="34" charset="-122"/>
+                <a:cs typeface="Microsoft YaHei" pitchFamily="34" charset="-120"/>
+              </a:rPr>
+              <a:t>目标、约束、仿真初设</a:t>
+            </a:r>
+            <a:endParaRPr lang="en-US" sz="1210" dirty="0"/>
+          </a:p>
+          <a:p>
+            <a:pPr algn="l" indent="0" marL="0">
+              <a:buNone/>
+            </a:pPr>
+            <a:r>
+              <a:rPr lang="en-US" sz="1210" dirty="0">
+                <a:solidFill>
+                  <a:srgbClr val="536570"/>
+                </a:solidFill>
+                <a:latin typeface="Microsoft YaHei" pitchFamily="34" charset="0"/>
+                <a:ea typeface="Microsoft YaHei" pitchFamily="34" charset="-122"/>
+                <a:cs typeface="Microsoft YaHei" pitchFamily="34" charset="-120"/>
+              </a:rPr>
+              <a:t>评价器与可编辑参数</a:t>
+            </a:r>
+            <a:endParaRPr lang="en-US" sz="1210" dirty="0"/>
+          </a:p>
+        </p:txBody>
+      </p:sp>
+      <p:sp>
+        <p:nvSpPr>
+          <p:cNvPr id="9" name="Native_rect_5"/>
+          <p:cNvSpPr/>
+          <p:nvPr/>
+        </p:nvSpPr>
+        <p:spPr>
+          <a:xfrm>
+            <a:off x="6355080" y="2377440"/>
+            <a:ext cx="2331720" cy="1225296"/>
+          </a:xfrm>
+          <a:prstGeom prst="rect">
+            <a:avLst/>
+          </a:prstGeom>
+          <a:solidFill>
+            <a:srgbClr val="EAF0F7"/>
+          </a:solidFill>
+          <a:ln w="8890">
+            <a:solidFill>
+              <a:srgbClr val="CBD9DF"/>
+            </a:solidFill>
+            <a:prstDash val="solid"/>
+          </a:ln>
+        </p:spPr>
+      </p:sp>
+      <p:sp>
+        <p:nvSpPr>
+          <p:cNvPr id="10" name="Native_text_6"/>
+          <p:cNvSpPr/>
+          <p:nvPr/>
+        </p:nvSpPr>
+        <p:spPr>
+          <a:xfrm>
+            <a:off x="6464808" y="2432304"/>
+            <a:ext cx="2112264" cy="292608"/>
+          </a:xfrm>
+          <a:prstGeom prst="rect">
+            <a:avLst/>
+          </a:prstGeom>
+          <a:noFill/>
+          <a:ln/>
+        </p:spPr>
+        <p:txBody>
+          <a:bodyPr wrap="square" lIns="0" tIns="0" rIns="0" bIns="0" rtlCol="0" anchor="ctr">
+            <a:normAutofit/>
+          </a:bodyPr>
+          <a:lstStyle/>
+          <a:p>
+            <a:pPr algn="l" indent="0" marL="0">
+              <a:buNone/>
+            </a:pPr>
+            <a:r>
+              <a:rPr lang="en-US" sz="1400" b="1" dirty="0">
+                <a:solidFill>
+                  <a:srgbClr val="18364A"/>
+                </a:solidFill>
+                <a:latin typeface="Microsoft YaHei" pitchFamily="34" charset="0"/>
+                <a:ea typeface="Microsoft YaHei" pitchFamily="34" charset="-122"/>
+                <a:cs typeface="Microsoft YaHei" pitchFamily="34" charset="-120"/>
+              </a:rPr>
+              <a:t>真实求解器在环</a:t>
+            </a:r>
+            <a:endParaRPr lang="en-US" sz="1400" dirty="0"/>
+          </a:p>
+        </p:txBody>
+      </p:sp>
+      <p:sp>
+        <p:nvSpPr>
+          <p:cNvPr id="11" name="Native_text_7"/>
+          <p:cNvSpPr/>
+          <p:nvPr/>
+        </p:nvSpPr>
+        <p:spPr>
+          <a:xfrm>
+            <a:off x="6464808" y="2816352"/>
+            <a:ext cx="2112264" cy="548640"/>
+          </a:xfrm>
+          <a:prstGeom prst="rect">
+            <a:avLst/>
+          </a:prstGeom>
+          <a:noFill/>
+          <a:ln/>
+        </p:spPr>
+        <p:txBody>
+          <a:bodyPr wrap="square" lIns="0" tIns="0" rIns="0" bIns="0" rtlCol="0" anchor="ctr">
+            <a:normAutofit/>
+          </a:bodyPr>
+          <a:lstStyle/>
+          <a:p>
+            <a:pPr algn="l" indent="0" marL="0">
+              <a:buNone/>
+            </a:pPr>
+            <a:r>
+              <a:rPr lang="en-US" sz="1210" dirty="0">
+                <a:solidFill>
+                  <a:srgbClr val="536570"/>
+                </a:solidFill>
+                <a:latin typeface="Microsoft YaHei" pitchFamily="34" charset="0"/>
+                <a:ea typeface="Microsoft YaHei" pitchFamily="34" charset="-122"/>
+                <a:cs typeface="Microsoft YaHei" pitchFamily="34" charset="-120"/>
+              </a:rPr>
+              <a:t>设计 → 规则检查 → 仿真</a:t>
+            </a:r>
+            <a:endParaRPr lang="en-US" sz="1210" dirty="0"/>
+          </a:p>
+          <a:p>
+            <a:pPr algn="l" indent="0" marL="0">
+              <a:buNone/>
+            </a:pPr>
+            <a:r>
+              <a:rPr lang="en-US" sz="1210" dirty="0">
+                <a:solidFill>
+                  <a:srgbClr val="536570"/>
+                </a:solidFill>
+                <a:latin typeface="Microsoft YaHei" pitchFamily="34" charset="0"/>
+                <a:ea typeface="Microsoft YaHei" pitchFamily="34" charset="-122"/>
+                <a:cs typeface="Microsoft YaHei" pitchFamily="34" charset="-120"/>
+              </a:rPr>
+              <a:t>数值结果决定保留 / 回退</a:t>
+            </a:r>
+            <a:endParaRPr lang="en-US" sz="1210" dirty="0"/>
+          </a:p>
+        </p:txBody>
+      </p:sp>
+      <p:sp>
+        <p:nvSpPr>
+          <p:cNvPr id="12" name="Native_rect_8"/>
+          <p:cNvSpPr/>
+          <p:nvPr/>
+        </p:nvSpPr>
+        <p:spPr>
+          <a:xfrm>
+            <a:off x="6355080" y="3694176"/>
+            <a:ext cx="2331720" cy="1042416"/>
+          </a:xfrm>
+          <a:prstGeom prst="rect">
+            <a:avLst/>
+          </a:prstGeom>
+          <a:solidFill>
+            <a:srgbClr val="FBEFE3"/>
+          </a:solidFill>
+          <a:ln w="8890">
+            <a:solidFill>
+              <a:srgbClr val="CBD9DF"/>
+            </a:solidFill>
+            <a:prstDash val="solid"/>
+          </a:ln>
+        </p:spPr>
+      </p:sp>
+      <p:sp>
+        <p:nvSpPr>
+          <p:cNvPr id="13" name="Native_text_9"/>
+          <p:cNvSpPr/>
+          <p:nvPr/>
+        </p:nvSpPr>
+        <p:spPr>
+          <a:xfrm>
+            <a:off x="6464808" y="3749040"/>
+            <a:ext cx="2112264" cy="292608"/>
+          </a:xfrm>
+          <a:prstGeom prst="rect">
+            <a:avLst/>
+          </a:prstGeom>
+          <a:noFill/>
+          <a:ln/>
+        </p:spPr>
+        <p:txBody>
+          <a:bodyPr wrap="square" lIns="0" tIns="0" rIns="0" bIns="0" rtlCol="0" anchor="ctr">
+            <a:normAutofit/>
+          </a:bodyPr>
+          <a:lstStyle/>
+          <a:p>
+            <a:pPr algn="l" indent="0" marL="0">
+              <a:buNone/>
+            </a:pPr>
+            <a:r>
+              <a:rPr lang="en-US" sz="1400" b="1" dirty="0">
+                <a:solidFill>
+                  <a:srgbClr val="18364A"/>
+                </a:solidFill>
+                <a:latin typeface="Microsoft YaHei" pitchFamily="34" charset="0"/>
+                <a:ea typeface="Microsoft YaHei" pitchFamily="34" charset="-122"/>
+                <a:cs typeface="Microsoft YaHei" pitchFamily="34" charset="-120"/>
+              </a:rPr>
+              <a:t>关键能力与边界</a:t>
+            </a:r>
+            <a:endParaRPr lang="en-US" sz="1400" dirty="0"/>
+          </a:p>
+        </p:txBody>
+      </p:sp>
+      <p:sp>
+        <p:nvSpPr>
+          <p:cNvPr id="14" name="Native_text_10"/>
+          <p:cNvSpPr/>
+          <p:nvPr/>
+        </p:nvSpPr>
+        <p:spPr>
+          <a:xfrm>
+            <a:off x="6464808" y="4133088"/>
+            <a:ext cx="2112264" cy="548640"/>
+          </a:xfrm>
+          <a:prstGeom prst="rect">
+            <a:avLst/>
+          </a:prstGeom>
+          <a:noFill/>
+          <a:ln/>
+        </p:spPr>
+        <p:txBody>
+          <a:bodyPr wrap="square" lIns="0" tIns="0" rIns="0" bIns="0" rtlCol="0" anchor="ctr">
+            <a:normAutofit/>
+          </a:bodyPr>
+          <a:lstStyle/>
+          <a:p>
+            <a:pPr algn="l" indent="0" marL="0">
+              <a:buNone/>
+            </a:pPr>
+            <a:r>
+              <a:rPr lang="en-US" sz="1210" dirty="0">
+                <a:solidFill>
+                  <a:srgbClr val="536570"/>
+                </a:solidFill>
+                <a:latin typeface="Microsoft YaHei" pitchFamily="34" charset="0"/>
+                <a:ea typeface="Microsoft YaHei" pitchFamily="34" charset="-122"/>
+                <a:cs typeface="Microsoft YaHei" pitchFamily="34" charset="-120"/>
+              </a:rPr>
+              <a:t>显式规则 + 定量验收</a:t>
+            </a:r>
+            <a:endParaRPr lang="en-US" sz="1210" dirty="0"/>
+          </a:p>
+          <a:p>
+            <a:pPr algn="l" indent="0" marL="0">
+              <a:buNone/>
+            </a:pPr>
+            <a:r>
+              <a:rPr lang="en-US" sz="1210" dirty="0">
+                <a:solidFill>
+                  <a:srgbClr val="536570"/>
+                </a:solidFill>
+                <a:latin typeface="Microsoft YaHei" pitchFamily="34" charset="0"/>
+                <a:ea typeface="Microsoft YaHei" pitchFamily="34" charset="-122"/>
+                <a:cs typeface="Microsoft YaHei" pitchFamily="34" charset="-120"/>
+              </a:rPr>
+              <a:t>多物理初设曾由专家纠错</a:t>
+            </a:r>
+            <a:endParaRPr lang="en-US" sz="1210" dirty="0"/>
+          </a:p>
+        </p:txBody>
+      </p:sp>
+      <p:sp>
+        <p:nvSpPr>
+          <p:cNvPr id="15" name="Editable_Source"/>
+          <p:cNvSpPr/>
+          <p:nvPr/>
+        </p:nvSpPr>
+        <p:spPr>
+          <a:xfrm>
+            <a:off x="457200" y="4882896"/>
+            <a:ext cx="7772400" cy="173736"/>
+          </a:xfrm>
+          <a:prstGeom prst="rect">
+            <a:avLst/>
+          </a:prstGeom>
+          <a:noFill/>
+          <a:ln/>
+        </p:spPr>
+        <p:txBody>
+          <a:bodyPr wrap="square" lIns="0" tIns="0" rIns="0" bIns="0" rtlCol="0" anchor="ctr">
+            <a:normAutofit/>
+          </a:bodyPr>
+          <a:lstStyle/>
+          <a:p>
+            <a:pPr algn="l" indent="0" marL="0">
+              <a:buNone/>
+            </a:pPr>
+            <a:r>
+              <a:rPr lang="en-US" sz="820" dirty="0">
+                <a:solidFill>
+                  <a:srgbClr val="536570"/>
+                </a:solidFill>
+                <a:latin typeface="Microsoft YaHei" pitchFamily="34" charset="0"/>
+                <a:ea typeface="Microsoft YaHei" pitchFamily="34" charset="-122"/>
+                <a:cs typeface="Microsoft YaHei" pitchFamily="34" charset="-120"/>
+              </a:rPr>
+              <a:t>Kharel et al., 2026, Fig. 1(b) / Table S2, DOI: 10.48550/arXiv.2606.00915</a:t>
+            </a:r>
+            <a:endParaRPr lang="en-US" sz="820" dirty="0"/>
+          </a:p>
+        </p:txBody>
+      </p:sp>
+      <p:sp>
+        <p:nvSpPr>
+          <p:cNvPr id="16" name="Editable_PageNumber"/>
+          <p:cNvSpPr/>
+          <p:nvPr/>
+        </p:nvSpPr>
+        <p:spPr>
+          <a:xfrm>
+            <a:off x="8339328" y="4882896"/>
+            <a:ext cx="347472" cy="173736"/>
+          </a:xfrm>
+          <a:prstGeom prst="rect">
+            <a:avLst/>
+          </a:prstGeom>
+          <a:noFill/>
+          <a:ln/>
+        </p:spPr>
+        <p:txBody>
+          <a:bodyPr wrap="square" lIns="0" tIns="0" rIns="0" bIns="0" rtlCol="0" anchor="ctr">
+            <a:normAutofit/>
+          </a:bodyPr>
+          <a:lstStyle/>
+          <a:p>
+            <a:pPr algn="r" indent="0" marL="0">
+              <a:buNone/>
+            </a:pPr>
+            <a:r>
+              <a:rPr lang="en-US" sz="900" dirty="0">
+                <a:solidFill>
+                  <a:srgbClr val="536570"/>
+                </a:solidFill>
+                <a:latin typeface="Microsoft YaHei" pitchFamily="34" charset="0"/>
+                <a:ea typeface="Microsoft YaHei" pitchFamily="34" charset="-122"/>
+                <a:cs typeface="Microsoft YaHei" pitchFamily="34" charset="-120"/>
+              </a:rPr>
+              <a:t>6/8</a:t>
+            </a:r>
+            <a:endParaRPr lang="en-US" sz="900" dirty="0"/>
           </a:p>
         </p:txBody>
       </p:sp>
@@ -2713,110 +5971,114 @@
       </p:grpSpPr>
       <p:sp>
         <p:nvSpPr>
-          <p:cNvPr id="2" name="Shape 0"/>
-          <p:cNvSpPr/>
-          <p:nvPr/>
-        </p:nvSpPr>
-        <p:spPr>
-          <a:xfrm>
-            <a:off x="457200" y="979932"/>
-            <a:ext cx="1143000" cy="45720"/>
+          <p:cNvPr id="2" name="Editable_Title"/>
+          <p:cNvSpPr/>
+          <p:nvPr/>
+        </p:nvSpPr>
+        <p:spPr>
+          <a:xfrm>
+            <a:off x="457200" y="137160"/>
+            <a:ext cx="8229600" cy="512064"/>
+          </a:xfrm>
+          <a:prstGeom prst="rect">
+            <a:avLst/>
+          </a:prstGeom>
+          <a:noFill/>
+          <a:ln/>
+        </p:spPr>
+        <p:txBody>
+          <a:bodyPr wrap="square" lIns="0" tIns="0" rIns="0" bIns="0" rtlCol="0" anchor="ctr">
+            <a:normAutofit/>
+          </a:bodyPr>
+          <a:lstStyle/>
+          <a:p>
+            <a:pPr algn="l" indent="0" marL="0">
+              <a:buNone/>
+            </a:pPr>
+            <a:r>
+              <a:rPr lang="en-US" sz="2400" b="1" dirty="0">
+                <a:solidFill>
+                  <a:srgbClr val="18364A"/>
+                </a:solidFill>
+                <a:latin typeface="Microsoft YaHei" pitchFamily="34" charset="0"/>
+                <a:ea typeface="Microsoft YaHei" pitchFamily="34" charset="-122"/>
+                <a:cs typeface="Microsoft YaHei" pitchFamily="34" charset="-120"/>
+              </a:rPr>
+              <a:t>Kharel 案例：在求解器反馈中优化波导弯曲</a:t>
+            </a:r>
+            <a:endParaRPr lang="en-US" sz="2400" dirty="0"/>
+          </a:p>
+        </p:txBody>
+      </p:sp>
+      <p:sp>
+        <p:nvSpPr>
+          <p:cNvPr id="3" name="Editable_Subtitle"/>
+          <p:cNvSpPr/>
+          <p:nvPr/>
+        </p:nvSpPr>
+        <p:spPr>
+          <a:xfrm>
+            <a:off x="457200" y="749808"/>
+            <a:ext cx="8229600" cy="246888"/>
+          </a:xfrm>
+          <a:prstGeom prst="rect">
+            <a:avLst/>
+          </a:prstGeom>
+          <a:noFill/>
+          <a:ln/>
+        </p:spPr>
+        <p:txBody>
+          <a:bodyPr wrap="square" lIns="0" tIns="0" rIns="0" bIns="0" rtlCol="0" anchor="ctr">
+            <a:normAutofit/>
+          </a:bodyPr>
+          <a:lstStyle/>
+          <a:p>
+            <a:pPr algn="l" indent="0" marL="0">
+              <a:buNone/>
+            </a:pPr>
+            <a:r>
+              <a:rPr lang="en-US" sz="1150" dirty="0">
+                <a:solidFill>
+                  <a:srgbClr val="536570"/>
+                </a:solidFill>
+                <a:latin typeface="Microsoft YaHei" pitchFamily="34" charset="0"/>
+                <a:ea typeface="Microsoft YaHei" pitchFamily="34" charset="-122"/>
+                <a:cs typeface="Microsoft YaHei" pitchFamily="34" charset="-120"/>
+              </a:rPr>
+              <a:t>原文 Fig. 2(a)｜数值仿真案例，不是流片测量结果</a:t>
+            </a:r>
+            <a:endParaRPr lang="en-US" sz="1150" dirty="0"/>
+          </a:p>
+        </p:txBody>
+      </p:sp>
+      <p:sp>
+        <p:nvSpPr>
+          <p:cNvPr id="4" name="Header_Accent"/>
+          <p:cNvSpPr/>
+          <p:nvPr/>
+        </p:nvSpPr>
+        <p:spPr>
+          <a:xfrm>
+            <a:off x="457200" y="1042416"/>
+            <a:ext cx="1005840" cy="36576"/>
           </a:xfrm>
           <a:prstGeom prst="rect">
             <a:avLst/>
           </a:prstGeom>
           <a:solidFill>
-            <a:srgbClr val="0B2545"/>
+            <a:srgbClr val="18364A"/>
           </a:solidFill>
           <a:ln w="12700">
             <a:solidFill>
-              <a:srgbClr val="0B2545"/>
+              <a:srgbClr val="18364A"/>
             </a:solidFill>
             <a:prstDash val="solid"/>
           </a:ln>
         </p:spPr>
       </p:sp>
-      <p:sp>
-        <p:nvSpPr>
-          <p:cNvPr id="3" name="Text 1"/>
-          <p:cNvSpPr txBox="1"/>
-          <p:nvPr/>
-        </p:nvSpPr>
-        <p:spPr>
-          <a:xfrm>
-            <a:off x="457200" y="91440"/>
-            <a:ext cx="8229600" cy="495300"/>
-          </a:xfrm>
-          <a:prstGeom prst="rect">
-            <a:avLst/>
-          </a:prstGeom>
-          <a:noFill/>
-          <a:ln/>
-        </p:spPr>
-        <p:txBody>
-          <a:bodyPr wrap="square" lIns="0" tIns="0" rIns="0" bIns="0" rtlCol="0" anchor="t"/>
-          <a:lstStyle/>
-          <a:p>
-            <a:pPr algn="l" indent="0" marL="0">
-              <a:buNone/>
-            </a:pPr>
-            <a:r>
-              <a:rPr lang="en-US" sz="2600" b="1" dirty="0">
-                <a:solidFill>
-                  <a:srgbClr val="1B2838"/>
-                </a:solidFill>
-                <a:latin typeface="Trebuchet MS" pitchFamily="34" charset="0"/>
-                <a:ea typeface="Trebuchet MS" pitchFamily="34" charset="-122"/>
-                <a:cs typeface="Trebuchet MS" pitchFamily="34" charset="-120"/>
-              </a:rPr>
-              <a:t>Kharel 案例：在求解器反馈中优化波导弯曲</a:t>
-            </a:r>
-            <a:endParaRPr lang="en-US" sz="2600" dirty="0"/>
-          </a:p>
-        </p:txBody>
-      </p:sp>
-      <p:sp>
-        <p:nvSpPr>
-          <p:cNvPr id="4" name="Text 2"/>
-          <p:cNvSpPr txBox="1"/>
-          <p:nvPr/>
-        </p:nvSpPr>
-        <p:spPr>
-          <a:xfrm>
-            <a:off x="457200" y="632460"/>
-            <a:ext cx="8229600" cy="292608"/>
-          </a:xfrm>
-          <a:prstGeom prst="rect">
-            <a:avLst/>
-          </a:prstGeom>
-          <a:noFill/>
-          <a:ln/>
-        </p:spPr>
-        <p:txBody>
-          <a:bodyPr wrap="square" lIns="0" tIns="0" rIns="0" bIns="0" rtlCol="0" anchor="t"/>
-          <a:lstStyle/>
-          <a:p>
-            <a:pPr algn="l" indent="0" marL="0">
-              <a:buNone/>
-            </a:pPr>
-            <a:r>
-              <a:rPr lang="en-US" sz="1300" dirty="0">
-                <a:solidFill>
-                  <a:srgbClr val="4B5563"/>
-                </a:solidFill>
-                <a:latin typeface="Calibri" pitchFamily="34" charset="0"/>
-                <a:ea typeface="Calibri" pitchFamily="34" charset="-122"/>
-                <a:cs typeface="Calibri" pitchFamily="34" charset="-120"/>
-              </a:rPr>
-              <a:t>原文 Fig. 2(a)｜数值仿真案例，不是流片测量结果</a:t>
-            </a:r>
-            <a:endParaRPr lang="en-US" sz="1300" dirty="0"/>
-          </a:p>
-        </p:txBody>
-      </p:sp>
       <p:pic>
         <p:nvPicPr>
-          <p:cNvPr id="5" name="Image 0" descr="G:\PIC_Harness_Research\presentations\task-018-class-harness\assets\project-kharel-result.png">    </p:cNvPr>
+          <p:cNvPr id="5" name="PaperOriginal_Kharel_Fig2a" descr="G:\PIC_Harness_Research\presentations\task-018-class-harness\assets\papers\kharel-fig2a.png">    </p:cNvPr>
           <p:cNvPicPr>
             <a:picLocks noChangeAspect="1"/>
           </p:cNvPicPr>
@@ -2830,8 +6092,8 @@
         </p:blipFill>
         <p:spPr>
           <a:xfrm>
-            <a:off x="457200" y="1347216"/>
-            <a:ext cx="8229600" cy="3291840"/>
+            <a:off x="457200" y="1635635"/>
+            <a:ext cx="5623560" cy="2782057"/>
           </a:xfrm>
           <a:prstGeom prst="rect">
             <a:avLst/>
@@ -2840,40 +6102,472 @@
       </p:pic>
       <p:sp>
         <p:nvSpPr>
-          <p:cNvPr id="6" name="Text 3"/>
-          <p:cNvSpPr txBox="1"/>
-          <p:nvPr/>
-        </p:nvSpPr>
-        <p:spPr>
-          <a:xfrm>
-            <a:off x="457200" y="4777740"/>
-            <a:ext cx="8229600" cy="274320"/>
-          </a:xfrm>
-          <a:prstGeom prst="rect">
-            <a:avLst/>
-          </a:prstGeom>
-          <a:noFill/>
-          <a:ln/>
-        </p:spPr>
-        <p:txBody>
-          <a:bodyPr wrap="square" lIns="0" tIns="0" rIns="0" bIns="0" rtlCol="0" anchor="ctr"/>
+          <p:cNvPr id="6" name="Native_rect_2"/>
+          <p:cNvSpPr/>
+          <p:nvPr/>
+        </p:nvSpPr>
+        <p:spPr>
+          <a:xfrm>
+            <a:off x="6355080" y="1243584"/>
+            <a:ext cx="2331720" cy="1042416"/>
+          </a:xfrm>
+          <a:prstGeom prst="rect">
+            <a:avLst/>
+          </a:prstGeom>
+          <a:solidFill>
+            <a:srgbClr val="E6F3EF"/>
+          </a:solidFill>
+          <a:ln w="8890">
+            <a:solidFill>
+              <a:srgbClr val="CBD9DF"/>
+            </a:solidFill>
+            <a:prstDash val="solid"/>
+          </a:ln>
+        </p:spPr>
+      </p:sp>
+      <p:sp>
+        <p:nvSpPr>
+          <p:cNvPr id="7" name="Native_text_3"/>
+          <p:cNvSpPr/>
+          <p:nvPr/>
+        </p:nvSpPr>
+        <p:spPr>
+          <a:xfrm>
+            <a:off x="6464808" y="1298448"/>
+            <a:ext cx="2112264" cy="292608"/>
+          </a:xfrm>
+          <a:prstGeom prst="rect">
+            <a:avLst/>
+          </a:prstGeom>
+          <a:noFill/>
+          <a:ln/>
+        </p:spPr>
+        <p:txBody>
+          <a:bodyPr wrap="square" lIns="0" tIns="0" rIns="0" bIns="0" rtlCol="0" anchor="ctr">
+            <a:normAutofit/>
+          </a:bodyPr>
           <a:lstStyle/>
           <a:p>
             <a:pPr algn="l" indent="0" marL="0">
               <a:buNone/>
             </a:pPr>
             <a:r>
-              <a:rPr lang="en-US" sz="1100" dirty="0">
-                <a:solidFill>
-                  <a:srgbClr val="4B5563"/>
-                </a:solidFill>
-                <a:latin typeface="Calibri" pitchFamily="34" charset="0"/>
-                <a:ea typeface="Calibri" pitchFamily="34" charset="-122"/>
-                <a:cs typeface="Calibri" pitchFamily="34" charset="-120"/>
-              </a:rPr>
-              <a:t>Kharel et al., 2026, Fig. 2(a) / §S2.1 (PDF p.5/12–14), DOI: 10.48550/arXiv.2606.00915｜7/8</a:t>
-            </a:r>
-            <a:endParaRPr lang="en-US" sz="1100" dirty="0"/>
+              <a:rPr lang="en-US" sz="1400" b="1" dirty="0">
+                <a:solidFill>
+                  <a:srgbClr val="18364A"/>
+                </a:solidFill>
+                <a:latin typeface="Microsoft YaHei" pitchFamily="34" charset="0"/>
+                <a:ea typeface="Microsoft YaHei" pitchFamily="34" charset="-122"/>
+                <a:cs typeface="Microsoft YaHei" pitchFamily="34" charset="-120"/>
+              </a:rPr>
+              <a:t>弯曲损耗：作者仿真</a:t>
+            </a:r>
+            <a:endParaRPr lang="en-US" sz="1400" dirty="0"/>
+          </a:p>
+        </p:txBody>
+      </p:sp>
+      <p:sp>
+        <p:nvSpPr>
+          <p:cNvPr id="8" name="Native_text_4"/>
+          <p:cNvSpPr/>
+          <p:nvPr/>
+        </p:nvSpPr>
+        <p:spPr>
+          <a:xfrm>
+            <a:off x="6464808" y="1682496"/>
+            <a:ext cx="2112264" cy="548640"/>
+          </a:xfrm>
+          <a:prstGeom prst="rect">
+            <a:avLst/>
+          </a:prstGeom>
+          <a:noFill/>
+          <a:ln/>
+        </p:spPr>
+        <p:txBody>
+          <a:bodyPr wrap="square" lIns="0" tIns="0" rIns="0" bIns="0" rtlCol="0" anchor="ctr">
+            <a:normAutofit/>
+          </a:bodyPr>
+          <a:lstStyle/>
+          <a:p>
+            <a:pPr algn="l" indent="0" marL="0">
+              <a:buNone/>
+            </a:pPr>
+            <a:r>
+              <a:rPr lang="en-US" sz="1210" dirty="0">
+                <a:solidFill>
+                  <a:srgbClr val="536570"/>
+                </a:solidFill>
+                <a:latin typeface="Microsoft YaHei" pitchFamily="34" charset="0"/>
+                <a:ea typeface="Microsoft YaHei" pitchFamily="34" charset="-122"/>
+                <a:cs typeface="Microsoft YaHei" pitchFamily="34" charset="-120"/>
+              </a:rPr>
+              <a:t>0.460 → 0.109 dB</a:t>
+            </a:r>
+            <a:endParaRPr lang="en-US" sz="1210" dirty="0"/>
+          </a:p>
+          <a:p>
+            <a:pPr algn="l" indent="0" marL="0">
+              <a:buNone/>
+            </a:pPr>
+            <a:r>
+              <a:rPr lang="en-US" sz="1210" dirty="0">
+                <a:solidFill>
+                  <a:srgbClr val="536570"/>
+                </a:solidFill>
+                <a:latin typeface="Microsoft YaHei" pitchFamily="34" charset="0"/>
+                <a:ea typeface="Microsoft YaHei" pitchFamily="34" charset="-122"/>
+                <a:cs typeface="Microsoft YaHei" pitchFamily="34" charset="-120"/>
+              </a:rPr>
+              <a:t>50 次仿真预算</a:t>
+            </a:r>
+            <a:endParaRPr lang="en-US" sz="1210" dirty="0"/>
+          </a:p>
+        </p:txBody>
+      </p:sp>
+      <p:sp>
+        <p:nvSpPr>
+          <p:cNvPr id="9" name="Native_rect_5"/>
+          <p:cNvSpPr/>
+          <p:nvPr/>
+        </p:nvSpPr>
+        <p:spPr>
+          <a:xfrm>
+            <a:off x="6355080" y="2377440"/>
+            <a:ext cx="2331720" cy="1225296"/>
+          </a:xfrm>
+          <a:prstGeom prst="rect">
+            <a:avLst/>
+          </a:prstGeom>
+          <a:solidFill>
+            <a:srgbClr val="EAF0F7"/>
+          </a:solidFill>
+          <a:ln w="8890">
+            <a:solidFill>
+              <a:srgbClr val="CBD9DF"/>
+            </a:solidFill>
+            <a:prstDash val="solid"/>
+          </a:ln>
+        </p:spPr>
+      </p:sp>
+      <p:sp>
+        <p:nvSpPr>
+          <p:cNvPr id="10" name="Native_text_6"/>
+          <p:cNvSpPr/>
+          <p:nvPr/>
+        </p:nvSpPr>
+        <p:spPr>
+          <a:xfrm>
+            <a:off x="6464808" y="2432304"/>
+            <a:ext cx="2112264" cy="292608"/>
+          </a:xfrm>
+          <a:prstGeom prst="rect">
+            <a:avLst/>
+          </a:prstGeom>
+          <a:noFill/>
+          <a:ln/>
+        </p:spPr>
+        <p:txBody>
+          <a:bodyPr wrap="square" lIns="0" tIns="0" rIns="0" bIns="0" rtlCol="0" anchor="ctr">
+            <a:normAutofit/>
+          </a:bodyPr>
+          <a:lstStyle/>
+          <a:p>
+            <a:pPr algn="l" indent="0" marL="0">
+              <a:buNone/>
+            </a:pPr>
+            <a:r>
+              <a:rPr lang="en-US" sz="1400" b="1" dirty="0">
+                <a:solidFill>
+                  <a:srgbClr val="18364A"/>
+                </a:solidFill>
+                <a:latin typeface="Microsoft YaHei" pitchFamily="34" charset="0"/>
+                <a:ea typeface="Microsoft YaHei" pitchFamily="34" charset="-122"/>
+                <a:cs typeface="Microsoft YaHei" pitchFamily="34" charset="-120"/>
+              </a:rPr>
+              <a:t>案例条件</a:t>
+            </a:r>
+            <a:endParaRPr lang="en-US" sz="1400" dirty="0"/>
+          </a:p>
+        </p:txBody>
+      </p:sp>
+      <p:sp>
+        <p:nvSpPr>
+          <p:cNvPr id="11" name="Native_text_7"/>
+          <p:cNvSpPr/>
+          <p:nvPr/>
+        </p:nvSpPr>
+        <p:spPr>
+          <a:xfrm>
+            <a:off x="6464808" y="2816352"/>
+            <a:ext cx="2112264" cy="713232"/>
+          </a:xfrm>
+          <a:prstGeom prst="rect">
+            <a:avLst/>
+          </a:prstGeom>
+          <a:noFill/>
+          <a:ln/>
+        </p:spPr>
+        <p:txBody>
+          <a:bodyPr wrap="square" lIns="0" tIns="0" rIns="0" bIns="0" rtlCol="0" anchor="ctr">
+            <a:normAutofit/>
+          </a:bodyPr>
+          <a:lstStyle/>
+          <a:p>
+            <a:pPr algn="l" indent="0" marL="0">
+              <a:buNone/>
+            </a:pPr>
+            <a:r>
+              <a:rPr lang="en-US" sz="1210" dirty="0">
+                <a:solidFill>
+                  <a:srgbClr val="536570"/>
+                </a:solidFill>
+                <a:latin typeface="Microsoft YaHei" pitchFamily="34" charset="0"/>
+                <a:ea typeface="Microsoft YaHei" pitchFamily="34" charset="-122"/>
+                <a:cs typeface="Microsoft YaHei" pitchFamily="34" charset="-120"/>
+              </a:rPr>
+              <a:t>400 nm SiN；1550 nm</a:t>
+            </a:r>
+            <a:endParaRPr lang="en-US" sz="1210" dirty="0"/>
+          </a:p>
+          <a:p>
+            <a:pPr algn="l" indent="0" marL="0">
+              <a:buNone/>
+            </a:pPr>
+            <a:r>
+              <a:rPr lang="en-US" sz="1210" dirty="0">
+                <a:solidFill>
+                  <a:srgbClr val="536570"/>
+                </a:solidFill>
+                <a:latin typeface="Microsoft YaHei" pitchFamily="34" charset="0"/>
+                <a:ea typeface="Microsoft YaHei" pitchFamily="34" charset="-122"/>
+                <a:cs typeface="Microsoft YaHei" pitchFamily="34" charset="-120"/>
+              </a:rPr>
+              <a:t>12 µm 半径</a:t>
+            </a:r>
+            <a:endParaRPr lang="en-US" sz="1210" dirty="0"/>
+          </a:p>
+          <a:p>
+            <a:pPr algn="l" indent="0" marL="0">
+              <a:buNone/>
+            </a:pPr>
+            <a:r>
+              <a:rPr lang="en-US" sz="1210" dirty="0">
+                <a:solidFill>
+                  <a:srgbClr val="536570"/>
+                </a:solidFill>
+                <a:latin typeface="Microsoft YaHei" pitchFamily="34" charset="0"/>
+                <a:ea typeface="Microsoft YaHei" pitchFamily="34" charset="-122"/>
+                <a:cs typeface="Microsoft YaHei" pitchFamily="34" charset="-120"/>
+              </a:rPr>
+              <a:t>150 nm 最小特征</a:t>
+            </a:r>
+            <a:endParaRPr lang="en-US" sz="1210" dirty="0"/>
+          </a:p>
+        </p:txBody>
+      </p:sp>
+      <p:sp>
+        <p:nvSpPr>
+          <p:cNvPr id="12" name="Native_rect_8"/>
+          <p:cNvSpPr/>
+          <p:nvPr/>
+        </p:nvSpPr>
+        <p:spPr>
+          <a:xfrm>
+            <a:off x="6355080" y="3694176"/>
+            <a:ext cx="2331720" cy="1042416"/>
+          </a:xfrm>
+          <a:prstGeom prst="rect">
+            <a:avLst/>
+          </a:prstGeom>
+          <a:solidFill>
+            <a:srgbClr val="FBEFE3"/>
+          </a:solidFill>
+          <a:ln w="8890">
+            <a:solidFill>
+              <a:srgbClr val="CBD9DF"/>
+            </a:solidFill>
+            <a:prstDash val="solid"/>
+          </a:ln>
+        </p:spPr>
+      </p:sp>
+      <p:sp>
+        <p:nvSpPr>
+          <p:cNvPr id="13" name="Native_text_9"/>
+          <p:cNvSpPr/>
+          <p:nvPr/>
+        </p:nvSpPr>
+        <p:spPr>
+          <a:xfrm>
+            <a:off x="6464808" y="3749040"/>
+            <a:ext cx="2112264" cy="292608"/>
+          </a:xfrm>
+          <a:prstGeom prst="rect">
+            <a:avLst/>
+          </a:prstGeom>
+          <a:noFill/>
+          <a:ln/>
+        </p:spPr>
+        <p:txBody>
+          <a:bodyPr wrap="square" lIns="0" tIns="0" rIns="0" bIns="0" rtlCol="0" anchor="ctr">
+            <a:normAutofit/>
+          </a:bodyPr>
+          <a:lstStyle/>
+          <a:p>
+            <a:pPr algn="l" indent="0" marL="0">
+              <a:buNone/>
+            </a:pPr>
+            <a:r>
+              <a:rPr lang="en-US" sz="1400" b="1" dirty="0">
+                <a:solidFill>
+                  <a:srgbClr val="18364A"/>
+                </a:solidFill>
+                <a:latin typeface="Microsoft YaHei" pitchFamily="34" charset="0"/>
+                <a:ea typeface="Microsoft YaHei" pitchFamily="34" charset="-122"/>
+                <a:cs typeface="Microsoft YaHei" pitchFamily="34" charset="-120"/>
+              </a:rPr>
+              <a:t>如何读这张图？</a:t>
+            </a:r>
+            <a:endParaRPr lang="en-US" sz="1400" dirty="0"/>
+          </a:p>
+        </p:txBody>
+      </p:sp>
+      <p:sp>
+        <p:nvSpPr>
+          <p:cNvPr id="14" name="Native_text_10"/>
+          <p:cNvSpPr/>
+          <p:nvPr/>
+        </p:nvSpPr>
+        <p:spPr>
+          <a:xfrm>
+            <a:off x="6464808" y="4133088"/>
+            <a:ext cx="2112264" cy="548640"/>
+          </a:xfrm>
+          <a:prstGeom prst="rect">
+            <a:avLst/>
+          </a:prstGeom>
+          <a:noFill/>
+          <a:ln/>
+        </p:spPr>
+        <p:txBody>
+          <a:bodyPr wrap="square" lIns="0" tIns="0" rIns="0" bIns="0" rtlCol="0" anchor="ctr">
+            <a:normAutofit/>
+          </a:bodyPr>
+          <a:lstStyle/>
+          <a:p>
+            <a:pPr algn="l" indent="0" marL="0">
+              <a:buNone/>
+            </a:pPr>
+            <a:r>
+              <a:rPr lang="en-US" sz="1210" dirty="0">
+                <a:solidFill>
+                  <a:srgbClr val="536570"/>
+                </a:solidFill>
+                <a:latin typeface="Microsoft YaHei" pitchFamily="34" charset="0"/>
+                <a:ea typeface="Microsoft YaHei" pitchFamily="34" charset="-122"/>
+                <a:cs typeface="Microsoft YaHei" pitchFamily="34" charset="-120"/>
+              </a:rPr>
+              <a:t>绿色：保留 / 最优值</a:t>
+            </a:r>
+            <a:endParaRPr lang="en-US" sz="1210" dirty="0"/>
+          </a:p>
+          <a:p>
+            <a:pPr algn="l" indent="0" marL="0">
+              <a:buNone/>
+            </a:pPr>
+            <a:r>
+              <a:rPr lang="en-US" sz="1210" dirty="0">
+                <a:solidFill>
+                  <a:srgbClr val="536570"/>
+                </a:solidFill>
+                <a:latin typeface="Microsoft YaHei" pitchFamily="34" charset="0"/>
+                <a:ea typeface="Microsoft YaHei" pitchFamily="34" charset="-122"/>
+                <a:cs typeface="Microsoft YaHei" pitchFamily="34" charset="-120"/>
+              </a:rPr>
+              <a:t>红色：丢弃；不是实测</a:t>
+            </a:r>
+            <a:endParaRPr lang="en-US" sz="1210" dirty="0"/>
+          </a:p>
+        </p:txBody>
+      </p:sp>
+      <p:sp>
+        <p:nvSpPr>
+          <p:cNvPr id="15" name="Editable_Source"/>
+          <p:cNvSpPr/>
+          <p:nvPr/>
+        </p:nvSpPr>
+        <p:spPr>
+          <a:xfrm>
+            <a:off x="457200" y="4882896"/>
+            <a:ext cx="7772400" cy="173736"/>
+          </a:xfrm>
+          <a:prstGeom prst="rect">
+            <a:avLst/>
+          </a:prstGeom>
+          <a:noFill/>
+          <a:ln/>
+        </p:spPr>
+        <p:txBody>
+          <a:bodyPr wrap="square" lIns="0" tIns="0" rIns="0" bIns="0" rtlCol="0" anchor="ctr">
+            <a:normAutofit/>
+          </a:bodyPr>
+          <a:lstStyle/>
+          <a:p>
+            <a:pPr algn="l" indent="0" marL="0">
+              <a:buNone/>
+            </a:pPr>
+            <a:r>
+              <a:rPr lang="en-US" sz="820" dirty="0">
+                <a:solidFill>
+                  <a:srgbClr val="536570"/>
+                </a:solidFill>
+                <a:latin typeface="Microsoft YaHei" pitchFamily="34" charset="0"/>
+                <a:ea typeface="Microsoft YaHei" pitchFamily="34" charset="-122"/>
+                <a:cs typeface="Microsoft YaHei" pitchFamily="34" charset="-120"/>
+              </a:rPr>
+              <a:t>Kharel et al., 2026, Fig. 2(a) / §S2.1 (PDF p.5/12–14), DOI: 10.48550/arXiv.2606.00915</a:t>
+            </a:r>
+            <a:endParaRPr lang="en-US" sz="820" dirty="0"/>
+          </a:p>
+        </p:txBody>
+      </p:sp>
+      <p:sp>
+        <p:nvSpPr>
+          <p:cNvPr id="16" name="Editable_PageNumber"/>
+          <p:cNvSpPr/>
+          <p:nvPr/>
+        </p:nvSpPr>
+        <p:spPr>
+          <a:xfrm>
+            <a:off x="8339328" y="4882896"/>
+            <a:ext cx="347472" cy="173736"/>
+          </a:xfrm>
+          <a:prstGeom prst="rect">
+            <a:avLst/>
+          </a:prstGeom>
+          <a:noFill/>
+          <a:ln/>
+        </p:spPr>
+        <p:txBody>
+          <a:bodyPr wrap="square" lIns="0" tIns="0" rIns="0" bIns="0" rtlCol="0" anchor="ctr">
+            <a:normAutofit/>
+          </a:bodyPr>
+          <a:lstStyle/>
+          <a:p>
+            <a:pPr algn="r" indent="0" marL="0">
+              <a:buNone/>
+            </a:pPr>
+            <a:r>
+              <a:rPr lang="en-US" sz="900" dirty="0">
+                <a:solidFill>
+                  <a:srgbClr val="536570"/>
+                </a:solidFill>
+                <a:latin typeface="Microsoft YaHei" pitchFamily="34" charset="0"/>
+                <a:ea typeface="Microsoft YaHei" pitchFamily="34" charset="-122"/>
+                <a:cs typeface="Microsoft YaHei" pitchFamily="34" charset="-120"/>
+              </a:rPr>
+              <a:t>7/8</a:t>
+            </a:r>
+            <a:endParaRPr lang="en-US" sz="900" dirty="0"/>
           </a:p>
         </p:txBody>
       </p:sp>
@@ -2911,24 +6605,106 @@
       </p:grpSpPr>
       <p:sp>
         <p:nvSpPr>
-          <p:cNvPr id="2" name="Shape 0"/>
-          <p:cNvSpPr/>
-          <p:nvPr/>
-        </p:nvSpPr>
-        <p:spPr>
-          <a:xfrm>
-            <a:off x="457200" y="979932"/>
-            <a:ext cx="1143000" cy="45720"/>
+          <p:cNvPr id="2" name="Editable_Title"/>
+          <p:cNvSpPr/>
+          <p:nvPr/>
+        </p:nvSpPr>
+        <p:spPr>
+          <a:xfrm>
+            <a:off x="457200" y="137160"/>
+            <a:ext cx="8229600" cy="512064"/>
+          </a:xfrm>
+          <a:prstGeom prst="rect">
+            <a:avLst/>
+          </a:prstGeom>
+          <a:noFill/>
+          <a:ln/>
+        </p:spPr>
+        <p:txBody>
+          <a:bodyPr wrap="square" lIns="0" tIns="0" rIns="0" bIns="0" rtlCol="0" anchor="ctr">
+            <a:normAutofit/>
+          </a:bodyPr>
+          <a:lstStyle/>
+          <a:p>
+            <a:pPr algn="l" indent="0" marL="0">
+              <a:buNone/>
+            </a:pPr>
+            <a:r>
+              <a:rPr lang="en-US" sz="2400" b="1" dirty="0">
+                <a:solidFill>
+                  <a:srgbClr val="18364A"/>
+                </a:solidFill>
+                <a:latin typeface="Microsoft YaHei" pitchFamily="34" charset="0"/>
+                <a:ea typeface="Microsoft YaHei" pitchFamily="34" charset="-122"/>
+                <a:cs typeface="Microsoft YaHei" pitchFamily="34" charset="-120"/>
+              </a:rPr>
+              <a:t>总结：已有方法基础与我的研究切入点</a:t>
+            </a:r>
+            <a:endParaRPr lang="en-US" sz="2400" dirty="0"/>
+          </a:p>
+        </p:txBody>
+      </p:sp>
+      <p:sp>
+        <p:nvSpPr>
+          <p:cNvPr id="3" name="Editable_Subtitle"/>
+          <p:cNvSpPr/>
+          <p:nvPr/>
+        </p:nvSpPr>
+        <p:spPr>
+          <a:xfrm>
+            <a:off x="457200" y="749808"/>
+            <a:ext cx="8229600" cy="246888"/>
+          </a:xfrm>
+          <a:prstGeom prst="rect">
+            <a:avLst/>
+          </a:prstGeom>
+          <a:noFill/>
+          <a:ln/>
+        </p:spPr>
+        <p:txBody>
+          <a:bodyPr wrap="square" lIns="0" tIns="0" rIns="0" bIns="0" rtlCol="0" anchor="ctr">
+            <a:normAutofit/>
+          </a:bodyPr>
+          <a:lstStyle/>
+          <a:p>
+            <a:pPr algn="l" indent="0" marL="0">
+              <a:buNone/>
+            </a:pPr>
+            <a:r>
+              <a:rPr lang="en-US" sz="1150" dirty="0">
+                <a:solidFill>
+                  <a:srgbClr val="536570"/>
+                </a:solidFill>
+                <a:latin typeface="Microsoft YaHei" pitchFamily="34" charset="0"/>
+                <a:ea typeface="Microsoft YaHei" pitchFamily="34" charset="-122"/>
+                <a:cs typeface="Microsoft YaHei" pitchFamily="34" charset="-120"/>
+              </a:rPr>
+              <a:t>从结构生成、脚本生成走向可检验的设计诊断与决策</a:t>
+            </a:r>
+            <a:endParaRPr lang="en-US" sz="1150" dirty="0"/>
+          </a:p>
+        </p:txBody>
+      </p:sp>
+      <p:sp>
+        <p:nvSpPr>
+          <p:cNvPr id="4" name="Header_Accent"/>
+          <p:cNvSpPr/>
+          <p:nvPr/>
+        </p:nvSpPr>
+        <p:spPr>
+          <a:xfrm>
+            <a:off x="457200" y="1042416"/>
+            <a:ext cx="1005840" cy="36576"/>
           </a:xfrm>
           <a:prstGeom prst="rect">
             <a:avLst/>
           </a:prstGeom>
           <a:solidFill>
-            <a:srgbClr val="0B2545"/>
+            <a:srgbClr val="18364A"/>
           </a:solidFill>
           <a:ln w="12700">
             <a:solidFill>
-              <a:srgbClr val="0B2545"/>
+              <a:srgbClr val="18364A"/>
             </a:solidFill>
             <a:prstDash val="solid"/>
           </a:ln>
@@ -2936,148 +6712,527 @@
       </p:sp>
       <p:sp>
         <p:nvSpPr>
-          <p:cNvPr id="3" name="Text 1"/>
-          <p:cNvSpPr txBox="1"/>
-          <p:nvPr/>
-        </p:nvSpPr>
-        <p:spPr>
-          <a:xfrm>
-            <a:off x="457200" y="91440"/>
-            <a:ext cx="8229600" cy="495300"/>
-          </a:xfrm>
-          <a:prstGeom prst="rect">
-            <a:avLst/>
-          </a:prstGeom>
-          <a:noFill/>
-          <a:ln/>
-        </p:spPr>
-        <p:txBody>
-          <a:bodyPr wrap="square" lIns="0" tIns="0" rIns="0" bIns="0" rtlCol="0" anchor="t"/>
+          <p:cNvPr id="5" name="Native_rect_1"/>
+          <p:cNvSpPr/>
+          <p:nvPr/>
+        </p:nvSpPr>
+        <p:spPr>
+          <a:xfrm>
+            <a:off x="457200" y="1307592"/>
+            <a:ext cx="8229600" cy="530352"/>
+          </a:xfrm>
+          <a:prstGeom prst="rect">
+            <a:avLst/>
+          </a:prstGeom>
+          <a:solidFill>
+            <a:srgbClr val="EAF0F7"/>
+          </a:solidFill>
+          <a:ln w="8890">
+            <a:solidFill>
+              <a:srgbClr val="CBD9DF"/>
+            </a:solidFill>
+            <a:prstDash val="solid"/>
+          </a:ln>
+        </p:spPr>
+      </p:sp>
+      <p:sp>
+        <p:nvSpPr>
+          <p:cNvPr id="6" name="Native_text_2"/>
+          <p:cNvSpPr/>
+          <p:nvPr/>
+        </p:nvSpPr>
+        <p:spPr>
+          <a:xfrm>
+            <a:off x="594360" y="1380744"/>
+            <a:ext cx="1828800" cy="402336"/>
+          </a:xfrm>
+          <a:prstGeom prst="rect">
+            <a:avLst/>
+          </a:prstGeom>
+          <a:noFill/>
+          <a:ln/>
+        </p:spPr>
+        <p:txBody>
+          <a:bodyPr wrap="square" lIns="0" tIns="0" rIns="0" bIns="0" rtlCol="0" anchor="ctr">
+            <a:normAutofit/>
+          </a:bodyPr>
+          <a:lstStyle/>
+          <a:p>
+            <a:pPr algn="ctr" indent="0" marL="0">
+              <a:buNone/>
+            </a:pPr>
+            <a:r>
+              <a:rPr lang="en-US" sz="1700" b="1" dirty="0">
+                <a:solidFill>
+                  <a:srgbClr val="18364A"/>
+                </a:solidFill>
+                <a:latin typeface="Microsoft YaHei" pitchFamily="34" charset="0"/>
+                <a:ea typeface="Microsoft YaHei" pitchFamily="34" charset="-122"/>
+                <a:cs typeface="Microsoft YaHei" pitchFamily="34" charset="-120"/>
+              </a:rPr>
+              <a:t>PhIDO</a:t>
+            </a:r>
+            <a:endParaRPr lang="en-US" sz="1700" dirty="0"/>
+          </a:p>
+        </p:txBody>
+      </p:sp>
+      <p:sp>
+        <p:nvSpPr>
+          <p:cNvPr id="7" name="Native_text_3"/>
+          <p:cNvSpPr/>
+          <p:nvPr/>
+        </p:nvSpPr>
+        <p:spPr>
+          <a:xfrm>
+            <a:off x="2651760" y="1380744"/>
+            <a:ext cx="5669280" cy="402336"/>
+          </a:xfrm>
+          <a:prstGeom prst="rect">
+            <a:avLst/>
+          </a:prstGeom>
+          <a:noFill/>
+          <a:ln/>
+        </p:spPr>
+        <p:txBody>
+          <a:bodyPr wrap="square" lIns="0" tIns="0" rIns="0" bIns="0" rtlCol="0" anchor="ctr">
+            <a:normAutofit/>
+          </a:bodyPr>
+          <a:lstStyle/>
+          <a:p>
+            <a:pPr algn="ctr" indent="0" marL="0">
+              <a:buNone/>
+            </a:pPr>
+            <a:r>
+              <a:rPr lang="en-US" sz="1700" dirty="0">
+                <a:solidFill>
+                  <a:srgbClr val="18364A"/>
+                </a:solidFill>
+                <a:latin typeface="Microsoft YaHei" pitchFamily="34" charset="0"/>
+                <a:ea typeface="Microsoft YaHei" pitchFamily="34" charset="-122"/>
+                <a:cs typeface="Microsoft YaHei" pitchFamily="34" charset="-120"/>
+              </a:rPr>
+              <a:t>自然语言 → 结构化设计与版图</a:t>
+            </a:r>
+            <a:endParaRPr lang="en-US" sz="1700" dirty="0"/>
+          </a:p>
+        </p:txBody>
+      </p:sp>
+      <p:sp>
+        <p:nvSpPr>
+          <p:cNvPr id="8" name="Native_rect_4"/>
+          <p:cNvSpPr/>
+          <p:nvPr/>
+        </p:nvSpPr>
+        <p:spPr>
+          <a:xfrm>
+            <a:off x="457200" y="1965960"/>
+            <a:ext cx="8229600" cy="530352"/>
+          </a:xfrm>
+          <a:prstGeom prst="rect">
+            <a:avLst/>
+          </a:prstGeom>
+          <a:solidFill>
+            <a:srgbClr val="E6F3EF"/>
+          </a:solidFill>
+          <a:ln w="8890">
+            <a:solidFill>
+              <a:srgbClr val="CBD9DF"/>
+            </a:solidFill>
+            <a:prstDash val="solid"/>
+          </a:ln>
+        </p:spPr>
+      </p:sp>
+      <p:sp>
+        <p:nvSpPr>
+          <p:cNvPr id="9" name="Native_text_5"/>
+          <p:cNvSpPr/>
+          <p:nvPr/>
+        </p:nvSpPr>
+        <p:spPr>
+          <a:xfrm>
+            <a:off x="594360" y="2039112"/>
+            <a:ext cx="1828800" cy="402336"/>
+          </a:xfrm>
+          <a:prstGeom prst="rect">
+            <a:avLst/>
+          </a:prstGeom>
+          <a:noFill/>
+          <a:ln/>
+        </p:spPr>
+        <p:txBody>
+          <a:bodyPr wrap="square" lIns="0" tIns="0" rIns="0" bIns="0" rtlCol="0" anchor="ctr">
+            <a:normAutofit/>
+          </a:bodyPr>
+          <a:lstStyle/>
+          <a:p>
+            <a:pPr algn="ctr" indent="0" marL="0">
+              <a:buNone/>
+            </a:pPr>
+            <a:r>
+              <a:rPr lang="en-US" sz="1700" b="1" dirty="0">
+                <a:solidFill>
+                  <a:srgbClr val="18364A"/>
+                </a:solidFill>
+                <a:latin typeface="Microsoft YaHei" pitchFamily="34" charset="0"/>
+                <a:ea typeface="Microsoft YaHei" pitchFamily="34" charset="-122"/>
+                <a:cs typeface="Microsoft YaHei" pitchFamily="34" charset="-120"/>
+              </a:rPr>
+              <a:t>PICopilot</a:t>
+            </a:r>
+            <a:endParaRPr lang="en-US" sz="1700" dirty="0"/>
+          </a:p>
+        </p:txBody>
+      </p:sp>
+      <p:sp>
+        <p:nvSpPr>
+          <p:cNvPr id="10" name="Native_text_6"/>
+          <p:cNvSpPr/>
+          <p:nvPr/>
+        </p:nvSpPr>
+        <p:spPr>
+          <a:xfrm>
+            <a:off x="2651760" y="2039112"/>
+            <a:ext cx="5669280" cy="402336"/>
+          </a:xfrm>
+          <a:prstGeom prst="rect">
+            <a:avLst/>
+          </a:prstGeom>
+          <a:noFill/>
+          <a:ln/>
+        </p:spPr>
+        <p:txBody>
+          <a:bodyPr wrap="square" lIns="0" tIns="0" rIns="0" bIns="0" rtlCol="0" anchor="ctr">
+            <a:normAutofit/>
+          </a:bodyPr>
+          <a:lstStyle/>
+          <a:p>
+            <a:pPr algn="ctr" indent="0" marL="0">
+              <a:buNone/>
+            </a:pPr>
+            <a:r>
+              <a:rPr lang="en-US" sz="1700" dirty="0">
+                <a:solidFill>
+                  <a:srgbClr val="18364A"/>
+                </a:solidFill>
+                <a:latin typeface="Microsoft YaHei" pitchFamily="34" charset="0"/>
+                <a:ea typeface="Microsoft YaHei" pitchFamily="34" charset="-122"/>
+                <a:cs typeface="Microsoft YaHei" pitchFamily="34" charset="-120"/>
+              </a:rPr>
+              <a:t>自然语言 → PIC 脚本与功能评价</a:t>
+            </a:r>
+            <a:endParaRPr lang="en-US" sz="1700" dirty="0"/>
+          </a:p>
+        </p:txBody>
+      </p:sp>
+      <p:sp>
+        <p:nvSpPr>
+          <p:cNvPr id="11" name="Native_rect_7"/>
+          <p:cNvSpPr/>
+          <p:nvPr/>
+        </p:nvSpPr>
+        <p:spPr>
+          <a:xfrm>
+            <a:off x="457200" y="2624328"/>
+            <a:ext cx="8229600" cy="530352"/>
+          </a:xfrm>
+          <a:prstGeom prst="rect">
+            <a:avLst/>
+          </a:prstGeom>
+          <a:solidFill>
+            <a:srgbClr val="FBEFE3"/>
+          </a:solidFill>
+          <a:ln w="8890">
+            <a:solidFill>
+              <a:srgbClr val="CBD9DF"/>
+            </a:solidFill>
+            <a:prstDash val="solid"/>
+          </a:ln>
+        </p:spPr>
+      </p:sp>
+      <p:sp>
+        <p:nvSpPr>
+          <p:cNvPr id="12" name="Native_text_8"/>
+          <p:cNvSpPr/>
+          <p:nvPr/>
+        </p:nvSpPr>
+        <p:spPr>
+          <a:xfrm>
+            <a:off x="594360" y="2697480"/>
+            <a:ext cx="1828800" cy="402336"/>
+          </a:xfrm>
+          <a:prstGeom prst="rect">
+            <a:avLst/>
+          </a:prstGeom>
+          <a:noFill/>
+          <a:ln/>
+        </p:spPr>
+        <p:txBody>
+          <a:bodyPr wrap="square" lIns="0" tIns="0" rIns="0" bIns="0" rtlCol="0" anchor="ctr">
+            <a:normAutofit/>
+          </a:bodyPr>
+          <a:lstStyle/>
+          <a:p>
+            <a:pPr algn="ctr" indent="0" marL="0">
+              <a:buNone/>
+            </a:pPr>
+            <a:r>
+              <a:rPr lang="en-US" sz="1700" b="1" dirty="0">
+                <a:solidFill>
+                  <a:srgbClr val="18364A"/>
+                </a:solidFill>
+                <a:latin typeface="Microsoft YaHei" pitchFamily="34" charset="0"/>
+                <a:ea typeface="Microsoft YaHei" pitchFamily="34" charset="-122"/>
+                <a:cs typeface="Microsoft YaHei" pitchFamily="34" charset="-120"/>
+              </a:rPr>
+              <a:t>Kharel</a:t>
+            </a:r>
+            <a:endParaRPr lang="en-US" sz="1700" dirty="0"/>
+          </a:p>
+        </p:txBody>
+      </p:sp>
+      <p:sp>
+        <p:nvSpPr>
+          <p:cNvPr id="13" name="Native_text_9"/>
+          <p:cNvSpPr/>
+          <p:nvPr/>
+        </p:nvSpPr>
+        <p:spPr>
+          <a:xfrm>
+            <a:off x="2651760" y="2697480"/>
+            <a:ext cx="5669280" cy="402336"/>
+          </a:xfrm>
+          <a:prstGeom prst="rect">
+            <a:avLst/>
+          </a:prstGeom>
+          <a:noFill/>
+          <a:ln/>
+        </p:spPr>
+        <p:txBody>
+          <a:bodyPr wrap="square" lIns="0" tIns="0" rIns="0" bIns="0" rtlCol="0" anchor="ctr">
+            <a:normAutofit/>
+          </a:bodyPr>
+          <a:lstStyle/>
+          <a:p>
+            <a:pPr algn="ctr" indent="0" marL="0">
+              <a:buNone/>
+            </a:pPr>
+            <a:r>
+              <a:rPr lang="en-US" sz="1700" dirty="0">
+                <a:solidFill>
+                  <a:srgbClr val="18364A"/>
+                </a:solidFill>
+                <a:latin typeface="Microsoft YaHei" pitchFamily="34" charset="0"/>
+                <a:ea typeface="Microsoft YaHei" pitchFamily="34" charset="-122"/>
+                <a:cs typeface="Microsoft YaHei" pitchFamily="34" charset="-120"/>
+              </a:rPr>
+              <a:t>显式规则 → 仿真反馈 → 定量迭代</a:t>
+            </a:r>
+            <a:endParaRPr lang="en-US" sz="1700" dirty="0"/>
+          </a:p>
+        </p:txBody>
+      </p:sp>
+      <p:sp>
+        <p:nvSpPr>
+          <p:cNvPr id="14" name="Native_text_10"/>
+          <p:cNvSpPr/>
+          <p:nvPr/>
+        </p:nvSpPr>
+        <p:spPr>
+          <a:xfrm>
+            <a:off x="457200" y="3502152"/>
+            <a:ext cx="8229600" cy="402336"/>
+          </a:xfrm>
+          <a:prstGeom prst="rect">
+            <a:avLst/>
+          </a:prstGeom>
+          <a:noFill/>
+          <a:ln/>
+        </p:spPr>
+        <p:txBody>
+          <a:bodyPr wrap="square" lIns="0" tIns="0" rIns="0" bIns="0" rtlCol="0" anchor="ctr">
+            <a:normAutofit/>
+          </a:bodyPr>
+          <a:lstStyle/>
+          <a:p>
+            <a:pPr algn="ctr" indent="0" marL="0">
+              <a:buNone/>
+            </a:pPr>
+            <a:r>
+              <a:rPr lang="en-US" sz="1700" b="1" dirty="0">
+                <a:solidFill>
+                  <a:srgbClr val="167B78"/>
+                </a:solidFill>
+                <a:latin typeface="Microsoft YaHei" pitchFamily="34" charset="0"/>
+                <a:ea typeface="Microsoft YaHei" pitchFamily="34" charset="-122"/>
+                <a:cs typeface="Microsoft YaHei" pitchFamily="34" charset="-120"/>
+              </a:rPr>
+              <a:t>已有项目构成方法基础，成功定义与验证层级需要区分</a:t>
+            </a:r>
+            <a:endParaRPr lang="en-US" sz="1700" dirty="0"/>
+          </a:p>
+        </p:txBody>
+      </p:sp>
+      <p:sp>
+        <p:nvSpPr>
+          <p:cNvPr id="15" name="Native_text_11"/>
+          <p:cNvSpPr/>
+          <p:nvPr/>
+        </p:nvSpPr>
+        <p:spPr>
+          <a:xfrm>
+            <a:off x="457200" y="4005072"/>
+            <a:ext cx="8229600" cy="402336"/>
+          </a:xfrm>
+          <a:prstGeom prst="rect">
+            <a:avLst/>
+          </a:prstGeom>
+          <a:noFill/>
+          <a:ln/>
+        </p:spPr>
+        <p:txBody>
+          <a:bodyPr wrap="square" lIns="0" tIns="0" rIns="0" bIns="0" rtlCol="0" anchor="ctr">
+            <a:normAutofit/>
+          </a:bodyPr>
+          <a:lstStyle/>
+          <a:p>
+            <a:pPr algn="ctr" indent="0" marL="0">
+              <a:buNone/>
+            </a:pPr>
+            <a:r>
+              <a:rPr lang="en-US" sz="1700" b="1" dirty="0">
+                <a:solidFill>
+                  <a:srgbClr val="18364A"/>
+                </a:solidFill>
+                <a:latin typeface="Microsoft YaHei" pitchFamily="34" charset="0"/>
+                <a:ea typeface="Microsoft YaHei" pitchFamily="34" charset="-122"/>
+                <a:cs typeface="Microsoft YaHei" pitchFamily="34" charset="-120"/>
+              </a:rPr>
+              <a:t>我的切入点：让仿真后的诊断与动作选择得到证据检验</a:t>
+            </a:r>
+            <a:endParaRPr lang="en-US" sz="1700" dirty="0"/>
+          </a:p>
+        </p:txBody>
+      </p:sp>
+      <p:sp>
+        <p:nvSpPr>
+          <p:cNvPr id="16" name="Native_text_12"/>
+          <p:cNvSpPr/>
+          <p:nvPr/>
+        </p:nvSpPr>
+        <p:spPr>
+          <a:xfrm>
+            <a:off x="457200" y="4462272"/>
+            <a:ext cx="8229600" cy="365760"/>
+          </a:xfrm>
+          <a:prstGeom prst="rect">
+            <a:avLst/>
+          </a:prstGeom>
+          <a:noFill/>
+          <a:ln/>
+        </p:spPr>
+        <p:txBody>
+          <a:bodyPr wrap="square" lIns="0" tIns="0" rIns="0" bIns="0" rtlCol="0" anchor="ctr">
+            <a:normAutofit/>
+          </a:bodyPr>
+          <a:lstStyle/>
+          <a:p>
+            <a:pPr algn="ctr" indent="0" marL="0">
+              <a:buNone/>
+            </a:pPr>
+            <a:r>
+              <a:rPr lang="en-US" sz="1300" dirty="0">
+                <a:solidFill>
+                  <a:srgbClr val="536570"/>
+                </a:solidFill>
+                <a:latin typeface="Microsoft YaHei" pitchFamily="34" charset="0"/>
+                <a:ea typeface="Microsoft YaHei" pitchFamily="34" charset="-122"/>
+                <a:cs typeface="Microsoft YaHei" pitchFamily="34" charset="-120"/>
+              </a:rPr>
+              <a:t>方法增益待验证；DAS 可作为后续复杂应用场景</a:t>
+            </a:r>
+            <a:endParaRPr lang="en-US" sz="1300" dirty="0"/>
+          </a:p>
+        </p:txBody>
+      </p:sp>
+      <p:sp>
+        <p:nvSpPr>
+          <p:cNvPr id="17" name="Editable_Source"/>
+          <p:cNvSpPr/>
+          <p:nvPr/>
+        </p:nvSpPr>
+        <p:spPr>
+          <a:xfrm>
+            <a:off x="457200" y="4882896"/>
+            <a:ext cx="7772400" cy="173736"/>
+          </a:xfrm>
+          <a:prstGeom prst="rect">
+            <a:avLst/>
+          </a:prstGeom>
+          <a:noFill/>
+          <a:ln/>
+        </p:spPr>
+        <p:txBody>
+          <a:bodyPr wrap="square" lIns="0" tIns="0" rIns="0" bIns="0" rtlCol="0" anchor="ctr">
+            <a:normAutofit/>
+          </a:bodyPr>
           <a:lstStyle/>
           <a:p>
             <a:pPr algn="l" indent="0" marL="0">
               <a:buNone/>
             </a:pPr>
             <a:r>
-              <a:rPr lang="en-US" sz="2600" b="1" dirty="0">
-                <a:solidFill>
-                  <a:srgbClr val="1B2838"/>
-                </a:solidFill>
-                <a:latin typeface="Trebuchet MS" pitchFamily="34" charset="0"/>
-                <a:ea typeface="Trebuchet MS" pitchFamily="34" charset="-122"/>
-                <a:cs typeface="Trebuchet MS" pitchFamily="34" charset="-120"/>
-              </a:rPr>
-              <a:t>总结：已有方法基础与我的研究切入点</a:t>
-            </a:r>
-            <a:endParaRPr lang="en-US" sz="2600" dirty="0"/>
-          </a:p>
-        </p:txBody>
-      </p:sp>
-      <p:sp>
-        <p:nvSpPr>
-          <p:cNvPr id="4" name="Text 2"/>
-          <p:cNvSpPr txBox="1"/>
-          <p:nvPr/>
-        </p:nvSpPr>
-        <p:spPr>
-          <a:xfrm>
-            <a:off x="457200" y="632460"/>
-            <a:ext cx="8229600" cy="292608"/>
-          </a:xfrm>
-          <a:prstGeom prst="rect">
-            <a:avLst/>
-          </a:prstGeom>
-          <a:noFill/>
-          <a:ln/>
-        </p:spPr>
-        <p:txBody>
-          <a:bodyPr wrap="square" lIns="0" tIns="0" rIns="0" bIns="0" rtlCol="0" anchor="t"/>
-          <a:lstStyle/>
-          <a:p>
-            <a:pPr algn="l" indent="0" marL="0">
-              <a:buNone/>
-            </a:pPr>
-            <a:r>
-              <a:rPr lang="en-US" sz="1300" dirty="0">
-                <a:solidFill>
-                  <a:srgbClr val="4B5563"/>
-                </a:solidFill>
-                <a:latin typeface="Calibri" pitchFamily="34" charset="0"/>
-                <a:ea typeface="Calibri" pitchFamily="34" charset="-122"/>
-                <a:cs typeface="Calibri" pitchFamily="34" charset="-120"/>
-              </a:rPr>
-              <a:t>从结构生成、脚本生成走向可检验的设计诊断与决策</a:t>
-            </a:r>
-            <a:endParaRPr lang="en-US" sz="1300" dirty="0"/>
-          </a:p>
-        </p:txBody>
-      </p:sp>
-      <p:pic>
-        <p:nvPicPr>
-          <p:cNvPr id="5" name="Image 0" descr="G:\PIC_Harness_Research\presentations\task-018-class-harness\assets\project-summary.svg">    </p:cNvPr>
-          <p:cNvPicPr>
-            <a:picLocks noChangeAspect="1"/>
-          </p:cNvPicPr>
-          <p:nvPr/>
-        </p:nvPicPr>
-        <p:blipFill>
-          <a:blip r:embed="rId1">
-            <a:extLst>
-              <a:ext uri="{96DAC541-7B7A-43D3-8B79-37D633B846F1}">
-                <asvg:svgBlip xmlns:asvg="http://schemas.microsoft.com/office/drawing/2016/SVG/main" r:embed="rId2"/>
-              </a:ext>
-            </a:extLst>
-          </a:blip>
-          <a:stretch>
-            <a:fillRect/>
-          </a:stretch>
-        </p:blipFill>
-        <p:spPr>
-          <a:xfrm>
-            <a:off x="457200" y="1208532"/>
-            <a:ext cx="8229600" cy="3569208"/>
-          </a:xfrm>
-          <a:prstGeom prst="rect">
-            <a:avLst/>
-          </a:prstGeom>
-        </p:spPr>
-      </p:pic>
-      <p:sp>
-        <p:nvSpPr>
-          <p:cNvPr id="6" name="Text 3"/>
-          <p:cNvSpPr txBox="1"/>
-          <p:nvPr/>
-        </p:nvSpPr>
-        <p:spPr>
-          <a:xfrm>
-            <a:off x="457200" y="4777740"/>
-            <a:ext cx="8229600" cy="274320"/>
-          </a:xfrm>
-          <a:prstGeom prst="rect">
-            <a:avLst/>
-          </a:prstGeom>
-          <a:noFill/>
-          <a:ln/>
-        </p:spPr>
-        <p:txBody>
-          <a:bodyPr wrap="square" lIns="0" tIns="0" rIns="0" bIns="0" rtlCol="0" anchor="ctr"/>
-          <a:lstStyle/>
-          <a:p>
-            <a:pPr algn="l" indent="0" marL="0">
-              <a:buNone/>
-            </a:pPr>
-            <a:r>
-              <a:rPr lang="en-US" sz="1100" dirty="0">
-                <a:solidFill>
-                  <a:srgbClr val="4B5563"/>
-                </a:solidFill>
-                <a:latin typeface="Calibri" pitchFamily="34" charset="0"/>
-                <a:ea typeface="Calibri" pitchFamily="34" charset="-122"/>
-                <a:cs typeface="Calibri" pitchFamily="34" charset="-120"/>
-              </a:rPr>
-              <a:t>依据：TASK-016 三项目比较；候选方向材料 §2–8｜8/8</a:t>
-            </a:r>
-            <a:endParaRPr lang="en-US" sz="1100" dirty="0"/>
+              <a:rPr lang="en-US" sz="820" dirty="0">
+                <a:solidFill>
+                  <a:srgbClr val="536570"/>
+                </a:solidFill>
+                <a:latin typeface="Microsoft YaHei" pitchFamily="34" charset="0"/>
+                <a:ea typeface="Microsoft YaHei" pitchFamily="34" charset="-122"/>
+                <a:cs typeface="Microsoft YaHei" pitchFamily="34" charset="-120"/>
+              </a:rPr>
+              <a:t>依据：TASK-016 三项目比较；候选方向材料 §2–8</a:t>
+            </a:r>
+            <a:endParaRPr lang="en-US" sz="820" dirty="0"/>
+          </a:p>
+        </p:txBody>
+      </p:sp>
+      <p:sp>
+        <p:nvSpPr>
+          <p:cNvPr id="18" name="Editable_PageNumber"/>
+          <p:cNvSpPr/>
+          <p:nvPr/>
+        </p:nvSpPr>
+        <p:spPr>
+          <a:xfrm>
+            <a:off x="8339328" y="4882896"/>
+            <a:ext cx="347472" cy="173736"/>
+          </a:xfrm>
+          <a:prstGeom prst="rect">
+            <a:avLst/>
+          </a:prstGeom>
+          <a:noFill/>
+          <a:ln/>
+        </p:spPr>
+        <p:txBody>
+          <a:bodyPr wrap="square" lIns="0" tIns="0" rIns="0" bIns="0" rtlCol="0" anchor="ctr">
+            <a:normAutofit/>
+          </a:bodyPr>
+          <a:lstStyle/>
+          <a:p>
+            <a:pPr algn="r" indent="0" marL="0">
+              <a:buNone/>
+            </a:pPr>
+            <a:r>
+              <a:rPr lang="en-US" sz="900" dirty="0">
+                <a:solidFill>
+                  <a:srgbClr val="536570"/>
+                </a:solidFill>
+                <a:latin typeface="Microsoft YaHei" pitchFamily="34" charset="0"/>
+                <a:ea typeface="Microsoft YaHei" pitchFamily="34" charset="-122"/>
+                <a:cs typeface="Microsoft YaHei" pitchFamily="34" charset="-120"/>
+              </a:rPr>
+              <a:t>8/8</a:t>
+            </a:r>
+            <a:endParaRPr lang="en-US" sz="900" dirty="0"/>
           </a:p>
         </p:txBody>
       </p:sp>
